--- a/Presentations/ITB_SCREEN_RECORDER_Executive_Management.pptx
+++ b/Presentations/ITB_SCREEN_RECORDER_Executive_Management.pptx
@@ -18,7 +18,6 @@
     <p:sldId id="266" r:id="rId17"/>
     <p:sldId id="267" r:id="rId18"/>
     <p:sldId id="268" r:id="rId19"/>
-    <p:sldId id="269" r:id="rId20"/>
   </p:sldIdLst>
   <p:sldSz cx="12191695" cy="6858000" type="screen4x3"/>
   <p:notesSz cx="6858000" cy="9144000"/>
@@ -3116,7 +3115,7 @@
             <a:avLst/>
           </a:prstGeom>
           <a:solidFill>
-            <a:srgbClr val="0A1128"/>
+            <a:srgbClr val="070A10"/>
           </a:solidFill>
           <a:ln>
             <a:noFill/>
@@ -3169,7 +3168,7 @@
             <a:pPr>
               <a:defRPr sz="1000" b="1">
                 <a:solidFill>
-                  <a:srgbClr val="F59E0B"/>
+                  <a:srgbClr val="06B6D4"/>
                 </a:solidFill>
                 <a:latin typeface="Arial"/>
               </a:defRPr>
@@ -3247,7 +3246,7 @@
               </a:defRPr>
             </a:pPr>
             <a:r>
-              <a:t>High-density, air-gapped screen recording and multi-station forensic investigation platform.</a:t>
+              <a:t>Air-gapped, high-density screen recording, live C2 command wall, and multicam forensic intelligence.</a:t>
             </a:r>
           </a:p>
         </p:txBody>
@@ -3267,11 +3266,11 @@
             <a:avLst/>
           </a:prstGeom>
           <a:solidFill>
-            <a:srgbClr val="1E293B"/>
+            <a:srgbClr val="151E2E"/>
           </a:solidFill>
           <a:ln w="19050">
             <a:solidFill>
-              <a:srgbClr val="F59E0B"/>
+              <a:srgbClr val="06B6D4"/>
             </a:solidFill>
           </a:ln>
         </p:spPr>
@@ -3325,13 +3324,13 @@
               </a:spcAft>
               <a:defRPr sz="1400" b="1">
                 <a:solidFill>
-                  <a:srgbClr val="F59E0B"/>
-                </a:solidFill>
-                <a:latin typeface="Segoe UI"/>
-              </a:defRPr>
-            </a:pPr>
-            <a:r>
-              <a:t>💼 Executive Overview</a:t>
+                  <a:srgbClr val="06B6D4"/>
+                </a:solidFill>
+                <a:latin typeface="Segoe UI"/>
+              </a:defRPr>
+            </a:pPr>
+            <a:r>
+              <a:t>💼 The Executive Mission</a:t>
             </a:r>
           </a:p>
           <a:p>
@@ -3363,39 +3362,39 @@
               </a:defRPr>
             </a:pPr>
             <a:r>
-              <a:t>• Air-Gapped Sovereignty: Engineered for closed, classified, and strictly isolated enterprise networks.</a:t>
-            </a:r>
-          </a:p>
-          <a:p>
-            <a:pPr>
-              <a:spcAft>
-                <a:spcPts val="600"/>
-              </a:spcAft>
-              <a:defRPr sz="1100">
-                <a:solidFill>
-                  <a:srgbClr val="CBD5E1"/>
-                </a:solidFill>
-                <a:latin typeface="Segoe UI"/>
-              </a:defRPr>
-            </a:pPr>
-            <a:r>
-              <a:t>• Rapid Incident Reconstruction: Reconstruct cross-team operational incidents in minutes instead of days.</a:t>
-            </a:r>
-          </a:p>
-          <a:p>
-            <a:pPr>
-              <a:spcAft>
-                <a:spcPts val="600"/>
-              </a:spcAft>
-              <a:defRPr sz="1100">
-                <a:solidFill>
-                  <a:srgbClr val="CBD5E1"/>
-                </a:solidFill>
-                <a:latin typeface="Segoe UI"/>
-              </a:defRPr>
-            </a:pPr>
-            <a:r>
-              <a:t>• Uncompromised Performance: Workstations operate at 100% full speed with zero lag.</a:t>
+              <a:t>• Air-Gapped Sovereignty: Engineered from day one for closed, classified, and strictly isolated networks.</a:t>
+            </a:r>
+          </a:p>
+          <a:p>
+            <a:pPr>
+              <a:spcAft>
+                <a:spcPts val="600"/>
+              </a:spcAft>
+              <a:defRPr sz="1100">
+                <a:solidFill>
+                  <a:srgbClr val="CBD5E1"/>
+                </a:solidFill>
+                <a:latin typeface="Segoe UI"/>
+              </a:defRPr>
+            </a:pPr>
+            <a:r>
+              <a:t>• Instant Incident Reconstruction: Turn multi-day incident reviews into seconds of verified proof.</a:t>
+            </a:r>
+          </a:p>
+          <a:p>
+            <a:pPr>
+              <a:spcAft>
+                <a:spcPts val="600"/>
+              </a:spcAft>
+              <a:defRPr sz="1100">
+                <a:solidFill>
+                  <a:srgbClr val="CBD5E1"/>
+                </a:solidFill>
+                <a:latin typeface="Segoe UI"/>
+              </a:defRPr>
+            </a:pPr>
+            <a:r>
+              <a:t>• Zero Operator Friction: Invisible background execution without mouse lag or performance loss.</a:t>
             </a:r>
           </a:p>
         </p:txBody>
@@ -3415,7 +3414,7 @@
             <a:avLst/>
           </a:prstGeom>
           <a:solidFill>
-            <a:srgbClr val="1E293B"/>
+            <a:srgbClr val="151E2E"/>
           </a:solidFill>
           <a:ln w="19050">
             <a:solidFill>
@@ -3495,39 +3494,39 @@
               </a:defRPr>
             </a:pPr>
             <a:r>
-              <a:t>• 100+ Simultaneous Stations: Scalable high-density fleet support per single server node.</a:t>
-            </a:r>
-          </a:p>
-          <a:p>
-            <a:pPr>
-              <a:spcAft>
-                <a:spcPts val="600"/>
-              </a:spcAft>
-              <a:defRPr sz="1100">
-                <a:solidFill>
-                  <a:srgbClr val="CBD5E1"/>
-                </a:solidFill>
-                <a:latin typeface="Segoe UI"/>
-              </a:defRPr>
-            </a:pPr>
-            <a:r>
-              <a:t>• &lt; 1% Workstation CPU Overhead: Complete GPU acceleration leaves operator PCs unburdened.</a:t>
-            </a:r>
-          </a:p>
-          <a:p>
-            <a:pPr>
-              <a:spcAft>
-                <a:spcPts val="600"/>
-              </a:spcAft>
-              <a:defRPr sz="1100">
-                <a:solidFill>
-                  <a:srgbClr val="CBD5E1"/>
-                </a:solidFill>
-                <a:latin typeface="Segoe UI"/>
-              </a:defRPr>
-            </a:pPr>
-            <a:r>
-              <a:t>• &lt; 1 Second Live Latency: Sub-second situational awareness via WebRTC technology.</a:t>
+              <a:t>• 100+ Concurrent Stations: Scalable high-density fleet support per single server node.</a:t>
+            </a:r>
+          </a:p>
+          <a:p>
+            <a:pPr>
+              <a:spcAft>
+                <a:spcPts val="600"/>
+              </a:spcAft>
+              <a:defRPr sz="1100">
+                <a:solidFill>
+                  <a:srgbClr val="CBD5E1"/>
+                </a:solidFill>
+                <a:latin typeface="Segoe UI"/>
+              </a:defRPr>
+            </a:pPr>
+            <a:r>
+              <a:t>• &lt; 1% Workstation CPU Overhead: Direct GPU hardware acceleration leaves operator PCs unburdened.</a:t>
+            </a:r>
+          </a:p>
+          <a:p>
+            <a:pPr>
+              <a:spcAft>
+                <a:spcPts val="600"/>
+              </a:spcAft>
+              <a:defRPr sz="1100">
+                <a:solidFill>
+                  <a:srgbClr val="CBD5E1"/>
+                </a:solidFill>
+                <a:latin typeface="Segoe UI"/>
+              </a:defRPr>
+            </a:pPr>
+            <a:r>
+              <a:t>• &lt; 300ms Live Stream Latency: Glass-to-glass situational awareness via WebRTC WHEP streaming.</a:t>
             </a:r>
           </a:p>
           <a:p>
@@ -3559,7 +3558,7 @@
               </a:defRPr>
             </a:pPr>
             <a:r>
-              <a:t>• 100% On-Premises Compliance: Zero external cloud data leakage or subscription traps.</a:t>
+              <a:t>• 100% On-Premises Compliance: Zero external cloud data leakage, subscription fees, or license servers.</a:t>
             </a:r>
           </a:p>
         </p:txBody>
@@ -3597,7 +3596,7 @@
             <a:avLst/>
           </a:prstGeom>
           <a:solidFill>
-            <a:srgbClr val="0A1128"/>
+            <a:srgbClr val="070A10"/>
           </a:solidFill>
           <a:ln>
             <a:noFill/>
@@ -3656,7 +3655,7 @@
               </a:defRPr>
             </a:pPr>
             <a:r>
-              <a:t>INFRASTRUCTURE EFFICIENCY</a:t>
+              <a:t>COMPETITIVE ADVANTAGE</a:t>
             </a:r>
           </a:p>
         </p:txBody>
@@ -3692,7 +3691,7 @@
               </a:defRPr>
             </a:pPr>
             <a:r>
-              <a:t>Enterprise Storage Economics &amp; Intelligent Retention</a:t>
+              <a:t>The Competitive Superiority Scorecard</a:t>
             </a:r>
           </a:p>
         </p:txBody>
@@ -3728,7 +3727,7 @@
               </a:defRPr>
             </a:pPr>
             <a:r>
-              <a:t>Predictable storage consumption with automated lifecycle policies.</a:t>
+              <a:t>How ITB-SCREEN-RECORDER outperforms conventional enterprise and defense alternatives.</a:t>
             </a:r>
           </a:p>
         </p:txBody>
@@ -3748,155 +3747,7 @@
             <a:avLst/>
           </a:prstGeom>
           <a:solidFill>
-            <a:srgbClr val="1E293B"/>
-          </a:solidFill>
-          <a:ln w="19050">
-            <a:solidFill>
-              <a:srgbClr val="334155"/>
-            </a:solidFill>
-          </a:ln>
-        </p:spPr>
-        <p:style>
-          <a:lnRef idx="1">
-            <a:schemeClr val="accent1"/>
-          </a:lnRef>
-          <a:fillRef idx="3">
-            <a:schemeClr val="accent1"/>
-          </a:fillRef>
-          <a:effectRef idx="2">
-            <a:schemeClr val="accent1"/>
-          </a:effectRef>
-          <a:fontRef idx="minor">
-            <a:schemeClr val="lt1"/>
-          </a:fontRef>
-        </p:style>
-        <p:txBody>
-          <a:bodyPr rtlCol="0" anchor="ctr"/>
-          <a:lstStyle/>
-          <a:p>
-            <a:pPr algn="ctr"/>
-          </a:p>
-        </p:txBody>
-      </p:sp>
-      <p:sp>
-        <p:nvSpPr>
-          <p:cNvPr id="7" name="TextBox 6"/>
-          <p:cNvSpPr txBox="1"/>
-          <p:nvPr/>
-        </p:nvSpPr>
-        <p:spPr>
-          <a:xfrm>
-            <a:off x="914400" y="2103120"/>
-            <a:ext cx="4754880" cy="3931920"/>
-          </a:xfrm>
-          <a:prstGeom prst="rect">
-            <a:avLst/>
-          </a:prstGeom>
-          <a:noFill/>
-        </p:spPr>
-        <p:txBody>
-          <a:bodyPr wrap="square">
-            <a:spAutoFit/>
-          </a:bodyPr>
-          <a:lstStyle/>
-          <a:p>
-            <a:pPr>
-              <a:spcAft>
-                <a:spcPts val="800"/>
-              </a:spcAft>
-              <a:defRPr sz="1400" b="1">
-                <a:solidFill>
-                  <a:srgbClr val="FFFFFF"/>
-                </a:solidFill>
-                <a:latin typeface="Segoe UI"/>
-              </a:defRPr>
-            </a:pPr>
-            <a:r>
-              <a:t>📦 Deterministic 5-Minute Chunks</a:t>
-            </a:r>
-          </a:p>
-          <a:p>
-            <a:pPr>
-              <a:spcAft>
-                <a:spcPts val="600"/>
-              </a:spcAft>
-              <a:defRPr sz="1100">
-                <a:solidFill>
-                  <a:srgbClr val="CBD5E1"/>
-                </a:solidFill>
-                <a:latin typeface="Segoe UI"/>
-              </a:defRPr>
-            </a:pPr>
-            <a:r>
-              <a:t>• Recordings are segmented precisely every 5 minutes on the clock (e.g. 10:00, 10:05).</a:t>
-            </a:r>
-          </a:p>
-          <a:p>
-            <a:pPr>
-              <a:spcAft>
-                <a:spcPts val="600"/>
-              </a:spcAft>
-              <a:defRPr sz="1100">
-                <a:solidFill>
-                  <a:srgbClr val="CBD5E1"/>
-                </a:solidFill>
-                <a:latin typeface="Segoe UI"/>
-              </a:defRPr>
-            </a:pPr>
-            <a:r>
-              <a:t>• Prevents massive, single-file recordings that are vulnerable to corruption.</a:t>
-            </a:r>
-          </a:p>
-          <a:p>
-            <a:pPr>
-              <a:spcAft>
-                <a:spcPts val="600"/>
-              </a:spcAft>
-              <a:defRPr sz="1100">
-                <a:solidFill>
-                  <a:srgbClr val="CBD5E1"/>
-                </a:solidFill>
-                <a:latin typeface="Segoe UI"/>
-              </a:defRPr>
-            </a:pPr>
-            <a:r>
-              <a:t>• Enables instant extraction of any 10-minute incident without scanning gigabytes of irrelevant video.</a:t>
-            </a:r>
-          </a:p>
-          <a:p>
-            <a:pPr>
-              <a:spcAft>
-                <a:spcPts val="600"/>
-              </a:spcAft>
-              <a:defRPr sz="1100">
-                <a:solidFill>
-                  <a:srgbClr val="CBD5E1"/>
-                </a:solidFill>
-                <a:latin typeface="Segoe UI"/>
-              </a:defRPr>
-            </a:pPr>
-            <a:r>
-              <a:t>• Facilitates fast, parallel file transfers and backups.</a:t>
-            </a:r>
-          </a:p>
-        </p:txBody>
-      </p:sp>
-      <p:sp>
-        <p:nvSpPr>
-          <p:cNvPr id="8" name="Rounded Rectangle 7"/>
-          <p:cNvSpPr/>
-          <p:nvPr/>
-        </p:nvSpPr>
-        <p:spPr>
-          <a:xfrm>
-            <a:off x="6217920" y="1920240"/>
-            <a:ext cx="5212080" cy="4297680"/>
-          </a:xfrm>
-          <a:prstGeom prst="roundRect">
-            <a:avLst/>
-          </a:prstGeom>
-          <a:solidFill>
-            <a:srgbClr val="1E293B"/>
+            <a:srgbClr val="151E2E"/>
           </a:solidFill>
           <a:ln w="19050">
             <a:solidFill>
@@ -3928,14 +3779,14 @@
       </p:sp>
       <p:sp>
         <p:nvSpPr>
-          <p:cNvPr id="9" name="TextBox 8"/>
+          <p:cNvPr id="7" name="TextBox 6"/>
           <p:cNvSpPr txBox="1"/>
           <p:nvPr/>
         </p:nvSpPr>
         <p:spPr>
           <a:xfrm>
-            <a:off x="6400800" y="2103120"/>
-            <a:ext cx="4846320" cy="3931920"/>
+            <a:off x="914400" y="2103120"/>
+            <a:ext cx="4754880" cy="3931920"/>
           </a:xfrm>
           <a:prstGeom prst="rect">
             <a:avLst/>
@@ -3960,71 +3811,267 @@
               </a:defRPr>
             </a:pPr>
             <a:r>
-              <a:t>🧹 Automated Retention Policies</a:t>
-            </a:r>
-          </a:p>
-          <a:p>
-            <a:pPr>
-              <a:spcAft>
-                <a:spcPts val="600"/>
-              </a:spcAft>
-              <a:defRPr sz="1100">
-                <a:solidFill>
-                  <a:srgbClr val="CBD5E1"/>
-                </a:solidFill>
-                <a:latin typeface="Segoe UI"/>
-              </a:defRPr>
-            </a:pPr>
-            <a:r>
-              <a:t>• Automatic Lifecycle Management: Recordings older than the configured policy (e.g. 30 days) are automatically deleted.</a:t>
-            </a:r>
-          </a:p>
-          <a:p>
-            <a:pPr>
-              <a:spcAft>
-                <a:spcPts val="600"/>
-              </a:spcAft>
-              <a:defRPr sz="1100">
-                <a:solidFill>
-                  <a:srgbClr val="CBD5E1"/>
-                </a:solidFill>
-                <a:latin typeface="Segoe UI"/>
-              </a:defRPr>
-            </a:pPr>
-            <a:r>
-              <a:t>• Zero Manual File Maintenance: Storage space is reclaimed continuously without IT overhead.</a:t>
-            </a:r>
-          </a:p>
-          <a:p>
-            <a:pPr>
-              <a:spcAft>
-                <a:spcPts val="600"/>
-              </a:spcAft>
-              <a:defRPr sz="1100">
-                <a:solidFill>
-                  <a:srgbClr val="CBD5E1"/>
-                </a:solidFill>
-                <a:latin typeface="Segoe UI"/>
-              </a:defRPr>
-            </a:pPr>
-            <a:r>
-              <a:t>• Active Recording Shield: Live sessions are protected from premature eviction during high-capacity events.</a:t>
-            </a:r>
-          </a:p>
-          <a:p>
-            <a:pPr>
-              <a:spcAft>
-                <a:spcPts val="600"/>
-              </a:spcAft>
-              <a:defRPr sz="1100">
-                <a:solidFill>
-                  <a:srgbClr val="CBD5E1"/>
-                </a:solidFill>
-                <a:latin typeface="Segoe UI"/>
-              </a:defRPr>
-            </a:pPr>
-            <a:r>
-              <a:t>• Predictable Capacity Planning: Consistent compression ensures accurate long-term storage budgeting.</a:t>
+              <a:t>🏆 ITB Screen Recorder Strengths</a:t>
+            </a:r>
+          </a:p>
+          <a:p>
+            <a:pPr>
+              <a:spcAft>
+                <a:spcPts val="600"/>
+              </a:spcAft>
+              <a:defRPr sz="1100">
+                <a:solidFill>
+                  <a:srgbClr val="CBD5E1"/>
+                </a:solidFill>
+                <a:latin typeface="Segoe UI"/>
+              </a:defRPr>
+            </a:pPr>
+            <a:r>
+              <a:t>• Endpoint CPU Impact: &lt; 1% (Dedicated GPU Silicon NVENC/QSV).</a:t>
+            </a:r>
+          </a:p>
+          <a:p>
+            <a:pPr>
+              <a:spcAft>
+                <a:spcPts val="600"/>
+              </a:spcAft>
+              <a:defRPr sz="1100">
+                <a:solidFill>
+                  <a:srgbClr val="CBD5E1"/>
+                </a:solidFill>
+                <a:latin typeface="Segoe UI"/>
+              </a:defRPr>
+            </a:pPr>
+            <a:r>
+              <a:t>• Air-Gapped Sovereignty: 100% Offline (Zero Cloud Dependencies).</a:t>
+            </a:r>
+          </a:p>
+          <a:p>
+            <a:pPr>
+              <a:spcAft>
+                <a:spcPts val="600"/>
+              </a:spcAft>
+              <a:defRPr sz="1100">
+                <a:solidFill>
+                  <a:srgbClr val="CBD5E1"/>
+                </a:solidFill>
+                <a:latin typeface="Segoe UI"/>
+              </a:defRPr>
+            </a:pPr>
+            <a:r>
+              <a:t>• Auto-Director Multi-Monitor: Yes (Activity Tracking / Split / PiP).</a:t>
+            </a:r>
+          </a:p>
+          <a:p>
+            <a:pPr>
+              <a:spcAft>
+                <a:spcPts val="600"/>
+              </a:spcAft>
+              <a:defRPr sz="1100">
+                <a:solidFill>
+                  <a:srgbClr val="CBD5E1"/>
+                </a:solidFill>
+                <a:latin typeface="Segoe UI"/>
+              </a:defRPr>
+            </a:pPr>
+            <a:r>
+              <a:t>• Synchronized Keystrokes: Yes (Millisecond-Accurate SRT/ASS).</a:t>
+            </a:r>
+          </a:p>
+          <a:p>
+            <a:pPr>
+              <a:spcAft>
+                <a:spcPts val="600"/>
+              </a:spcAft>
+              <a:defRPr sz="1100">
+                <a:solidFill>
+                  <a:srgbClr val="CBD5E1"/>
+                </a:solidFill>
+                <a:latin typeface="Segoe UI"/>
+              </a:defRPr>
+            </a:pPr>
+            <a:r>
+              <a:t>• Cross-Station Synchronicity: Guaranteed (No-Signal Slate Engine).</a:t>
+            </a:r>
+          </a:p>
+          <a:p>
+            <a:pPr>
+              <a:spcAft>
+                <a:spcPts val="600"/>
+              </a:spcAft>
+              <a:defRPr sz="1100">
+                <a:solidFill>
+                  <a:srgbClr val="CBD5E1"/>
+                </a:solidFill>
+                <a:latin typeface="Segoe UI"/>
+              </a:defRPr>
+            </a:pPr>
+            <a:r>
+              <a:t>• Live Fleet Wall Latency: &lt; 300ms (WebRTC WHEP Streaming).</a:t>
+            </a:r>
+          </a:p>
+          <a:p>
+            <a:pPr>
+              <a:spcAft>
+                <a:spcPts val="600"/>
+              </a:spcAft>
+              <a:defRPr sz="1100">
+                <a:solidFill>
+                  <a:srgbClr val="CBD5E1"/>
+                </a:solidFill>
+                <a:latin typeface="Segoe UI"/>
+              </a:defRPr>
+            </a:pPr>
+            <a:r>
+              <a:t>• Enterprise SSO: Silent Windows Integrated Authentication.</a:t>
+            </a:r>
+          </a:p>
+        </p:txBody>
+      </p:sp>
+      <p:sp>
+        <p:nvSpPr>
+          <p:cNvPr id="8" name="Rounded Rectangle 7"/>
+          <p:cNvSpPr/>
+          <p:nvPr/>
+        </p:nvSpPr>
+        <p:spPr>
+          <a:xfrm>
+            <a:off x="6217920" y="1920240"/>
+            <a:ext cx="5212080" cy="4297680"/>
+          </a:xfrm>
+          <a:prstGeom prst="roundRect">
+            <a:avLst/>
+          </a:prstGeom>
+          <a:solidFill>
+            <a:srgbClr val="151E2E"/>
+          </a:solidFill>
+          <a:ln w="19050">
+            <a:solidFill>
+              <a:srgbClr val="243248"/>
+            </a:solidFill>
+          </a:ln>
+        </p:spPr>
+        <p:style>
+          <a:lnRef idx="1">
+            <a:schemeClr val="accent1"/>
+          </a:lnRef>
+          <a:fillRef idx="3">
+            <a:schemeClr val="accent1"/>
+          </a:fillRef>
+          <a:effectRef idx="2">
+            <a:schemeClr val="accent1"/>
+          </a:effectRef>
+          <a:fontRef idx="minor">
+            <a:schemeClr val="lt1"/>
+          </a:fontRef>
+        </p:style>
+        <p:txBody>
+          <a:bodyPr rtlCol="0" anchor="ctr"/>
+          <a:lstStyle/>
+          <a:p>
+            <a:pPr algn="ctr"/>
+          </a:p>
+        </p:txBody>
+      </p:sp>
+      <p:sp>
+        <p:nvSpPr>
+          <p:cNvPr id="9" name="TextBox 8"/>
+          <p:cNvSpPr txBox="1"/>
+          <p:nvPr/>
+        </p:nvSpPr>
+        <p:spPr>
+          <a:xfrm>
+            <a:off x="6400800" y="2103120"/>
+            <a:ext cx="4846320" cy="3931920"/>
+          </a:xfrm>
+          <a:prstGeom prst="rect">
+            <a:avLst/>
+          </a:prstGeom>
+          <a:noFill/>
+        </p:spPr>
+        <p:txBody>
+          <a:bodyPr wrap="square">
+            <a:spAutoFit/>
+          </a:bodyPr>
+          <a:lstStyle/>
+          <a:p>
+            <a:pPr>
+              <a:spcAft>
+                <a:spcPts val="800"/>
+              </a:spcAft>
+              <a:defRPr sz="1400" b="1">
+                <a:solidFill>
+                  <a:srgbClr val="FFFFFF"/>
+                </a:solidFill>
+                <a:latin typeface="Segoe UI"/>
+              </a:defRPr>
+            </a:pPr>
+            <a:r>
+              <a:t>❌ Commercial Alternatives Deficiencies</a:t>
+            </a:r>
+          </a:p>
+          <a:p>
+            <a:pPr>
+              <a:spcAft>
+                <a:spcPts val="600"/>
+              </a:spcAft>
+              <a:defRPr sz="1100">
+                <a:solidFill>
+                  <a:srgbClr val="CBD5E1"/>
+                </a:solidFill>
+                <a:latin typeface="Segoe UI"/>
+              </a:defRPr>
+            </a:pPr>
+            <a:r>
+              <a:t>• Commercial VMS (Genetec/Milestone): High CPU (15-25%), 2-5s RTSP latency, no keystrokes, no auto-director.</a:t>
+            </a:r>
+          </a:p>
+          <a:p>
+            <a:pPr>
+              <a:spcAft>
+                <a:spcPts val="600"/>
+              </a:spcAft>
+              <a:defRPr sz="1100">
+                <a:solidFill>
+                  <a:srgbClr val="CBD5E1"/>
+                </a:solidFill>
+                <a:latin typeface="Segoe UI"/>
+              </a:defRPr>
+            </a:pPr>
+            <a:r>
+              <a:t>• Desktop Recorders (OBS/Camtasia): Heavy CPU (35-60%), local files only, unaligned clips, no live fleet wall.</a:t>
+            </a:r>
+          </a:p>
+          <a:p>
+            <a:pPr>
+              <a:spcAft>
+                <a:spcPts val="600"/>
+              </a:spcAft>
+              <a:defRPr sz="1100">
+                <a:solidFill>
+                  <a:srgbClr val="CBD5E1"/>
+                </a:solidFill>
+                <a:latin typeface="Segoe UI"/>
+              </a:defRPr>
+            </a:pPr>
+            <a:r>
+              <a:t>• Meeting Tools (Zoom/Teams): Cloud mandatory, high latency, privacy risks, zero multicam forensic synchronization.</a:t>
+            </a:r>
+          </a:p>
+          <a:p>
+            <a:pPr>
+              <a:spcAft>
+                <a:spcPts val="600"/>
+              </a:spcAft>
+              <a:defRPr sz="1100">
+                <a:solidFill>
+                  <a:srgbClr val="CBD5E1"/>
+                </a:solidFill>
+                <a:latin typeface="Segoe UI"/>
+              </a:defRPr>
+            </a:pPr>
+            <a:r>
+              <a:t>• Cost Structure: Commercial tools demand expensive recurring licenses; ITB offers low TCO perpetual deployment.</a:t>
             </a:r>
           </a:p>
         </p:txBody>
@@ -4062,7 +4109,7 @@
             <a:avLst/>
           </a:prstGeom>
           <a:solidFill>
-            <a:srgbClr val="0A1128"/>
+            <a:srgbClr val="070A10"/>
           </a:solidFill>
           <a:ln>
             <a:noFill/>
@@ -4115,13 +4162,13 @@
             <a:pPr>
               <a:defRPr sz="1000" b="1">
                 <a:solidFill>
-                  <a:srgbClr val="F59E0B"/>
+                  <a:srgbClr val="10B981"/>
                 </a:solidFill>
                 <a:latin typeface="Arial"/>
               </a:defRPr>
             </a:pPr>
             <a:r>
-              <a:t>SECURITY &amp; COMPLIANCE</a:t>
+              <a:t>BUSINESS CASE</a:t>
             </a:r>
           </a:p>
         </p:txBody>
@@ -4157,7 +4204,7 @@
               </a:defRPr>
             </a:pPr>
             <a:r>
-              <a:t>Security, Air-Gap Sovereignty &amp; Role-Based Access</a:t>
+              <a:t>Measurable Business &amp; Operational ROI</a:t>
             </a:r>
           </a:p>
         </p:txBody>
@@ -4193,7 +4240,7 @@
               </a:defRPr>
             </a:pPr>
             <a:r>
-              <a:t>Purpose-built for zero-trust, highly compartmentalized facilities.</a:t>
+              <a:t>Delivering high-value compliance, rapid incident defense, and unmatched infrastructure efficiency.</a:t>
             </a:r>
           </a:p>
         </p:txBody>
@@ -4213,11 +4260,11 @@
             <a:avLst/>
           </a:prstGeom>
           <a:solidFill>
-            <a:srgbClr val="1E293B"/>
+            <a:srgbClr val="151E2E"/>
           </a:solidFill>
           <a:ln w="19050">
             <a:solidFill>
-              <a:srgbClr val="334155"/>
+              <a:srgbClr val="10B981"/>
             </a:solidFill>
           </a:ln>
         </p:spPr>
@@ -4271,77 +4318,77 @@
               </a:spcAft>
               <a:defRPr sz="1400" b="1">
                 <a:solidFill>
-                  <a:srgbClr val="FFFFFF"/>
-                </a:solidFill>
-                <a:latin typeface="Segoe UI"/>
-              </a:defRPr>
-            </a:pPr>
-            <a:r>
-              <a:t>🏰 100% Air-Gapped</a:t>
-            </a:r>
-          </a:p>
-          <a:p>
-            <a:pPr>
-              <a:spcAft>
-                <a:spcPts val="600"/>
-              </a:spcAft>
-              <a:defRPr sz="1100">
-                <a:solidFill>
-                  <a:srgbClr val="CBD5E1"/>
-                </a:solidFill>
-                <a:latin typeface="Segoe UI"/>
-              </a:defRPr>
-            </a:pPr>
-            <a:r>
-              <a:t>• Operates completely inside your isolated network perimeter.</a:t>
-            </a:r>
-          </a:p>
-          <a:p>
-            <a:pPr>
-              <a:spcAft>
-                <a:spcPts val="600"/>
-              </a:spcAft>
-              <a:defRPr sz="1100">
-                <a:solidFill>
-                  <a:srgbClr val="CBD5E1"/>
-                </a:solidFill>
-                <a:latin typeface="Segoe UI"/>
-              </a:defRPr>
-            </a:pPr>
-            <a:r>
-              <a:t>• Zero external internet connections.</a:t>
-            </a:r>
-          </a:p>
-          <a:p>
-            <a:pPr>
-              <a:spcAft>
-                <a:spcPts val="600"/>
-              </a:spcAft>
-              <a:defRPr sz="1100">
-                <a:solidFill>
-                  <a:srgbClr val="CBD5E1"/>
-                </a:solidFill>
-                <a:latin typeface="Segoe UI"/>
-              </a:defRPr>
-            </a:pPr>
-            <a:r>
-              <a:t>• Zero reliance on external cloud servers.</a:t>
-            </a:r>
-          </a:p>
-          <a:p>
-            <a:pPr>
-              <a:spcAft>
-                <a:spcPts val="600"/>
-              </a:spcAft>
-              <a:defRPr sz="1100">
-                <a:solidFill>
-                  <a:srgbClr val="CBD5E1"/>
-                </a:solidFill>
-                <a:latin typeface="Segoe UI"/>
-              </a:defRPr>
-            </a:pPr>
-            <a:r>
-              <a:t>• No external licensing or phone-home beacons.</a:t>
+                  <a:srgbClr val="10B981"/>
+                </a:solidFill>
+                <a:latin typeface="Segoe UI"/>
+              </a:defRPr>
+            </a:pPr>
+            <a:r>
+              <a:t>⏱️ Operational Agility</a:t>
+            </a:r>
+          </a:p>
+          <a:p>
+            <a:pPr>
+              <a:spcAft>
+                <a:spcPts val="600"/>
+              </a:spcAft>
+              <a:defRPr sz="1100">
+                <a:solidFill>
+                  <a:srgbClr val="CBD5E1"/>
+                </a:solidFill>
+                <a:latin typeface="Segoe UI"/>
+              </a:defRPr>
+            </a:pPr>
+            <a:r>
+              <a:t>• 90% faster debriefing turnarounds.</a:t>
+            </a:r>
+          </a:p>
+          <a:p>
+            <a:pPr>
+              <a:spcAft>
+                <a:spcPts val="600"/>
+              </a:spcAft>
+              <a:defRPr sz="1100">
+                <a:solidFill>
+                  <a:srgbClr val="CBD5E1"/>
+                </a:solidFill>
+                <a:latin typeface="Segoe UI"/>
+              </a:defRPr>
+            </a:pPr>
+            <a:r>
+              <a:t>• Multi-station investigations in minutes.</a:t>
+            </a:r>
+          </a:p>
+          <a:p>
+            <a:pPr>
+              <a:spcAft>
+                <a:spcPts val="600"/>
+              </a:spcAft>
+              <a:defRPr sz="1100">
+                <a:solidFill>
+                  <a:srgbClr val="CBD5E1"/>
+                </a:solidFill>
+                <a:latin typeface="Segoe UI"/>
+              </a:defRPr>
+            </a:pPr>
+            <a:r>
+              <a:t>• Realistic training from real recorded events.</a:t>
+            </a:r>
+          </a:p>
+          <a:p>
+            <a:pPr>
+              <a:spcAft>
+                <a:spcPts val="600"/>
+              </a:spcAft>
+              <a:defRPr sz="1100">
+                <a:solidFill>
+                  <a:srgbClr val="CBD5E1"/>
+                </a:solidFill>
+                <a:latin typeface="Segoe UI"/>
+              </a:defRPr>
+            </a:pPr>
+            <a:r>
+              <a:t>• Workstations stay at 100% capacity.</a:t>
             </a:r>
           </a:p>
         </p:txBody>
@@ -4361,7 +4408,155 @@
             <a:avLst/>
           </a:prstGeom>
           <a:solidFill>
-            <a:srgbClr val="1E293B"/>
+            <a:srgbClr val="151E2E"/>
+          </a:solidFill>
+          <a:ln w="19050">
+            <a:solidFill>
+              <a:srgbClr val="243248"/>
+            </a:solidFill>
+          </a:ln>
+        </p:spPr>
+        <p:style>
+          <a:lnRef idx="1">
+            <a:schemeClr val="accent1"/>
+          </a:lnRef>
+          <a:fillRef idx="3">
+            <a:schemeClr val="accent1"/>
+          </a:fillRef>
+          <a:effectRef idx="2">
+            <a:schemeClr val="accent1"/>
+          </a:effectRef>
+          <a:fontRef idx="minor">
+            <a:schemeClr val="lt1"/>
+          </a:fontRef>
+        </p:style>
+        <p:txBody>
+          <a:bodyPr rtlCol="0" anchor="ctr"/>
+          <a:lstStyle/>
+          <a:p>
+            <a:pPr algn="ctr"/>
+          </a:p>
+        </p:txBody>
+      </p:sp>
+      <p:sp>
+        <p:nvSpPr>
+          <p:cNvPr id="9" name="TextBox 8"/>
+          <p:cNvSpPr txBox="1"/>
+          <p:nvPr/>
+        </p:nvSpPr>
+        <p:spPr>
+          <a:xfrm>
+            <a:off x="4572000" y="2103120"/>
+            <a:ext cx="3017520" cy="3931920"/>
+          </a:xfrm>
+          <a:prstGeom prst="rect">
+            <a:avLst/>
+          </a:prstGeom>
+          <a:noFill/>
+        </p:spPr>
+        <p:txBody>
+          <a:bodyPr wrap="square">
+            <a:spAutoFit/>
+          </a:bodyPr>
+          <a:lstStyle/>
+          <a:p>
+            <a:pPr>
+              <a:spcAft>
+                <a:spcPts val="800"/>
+              </a:spcAft>
+              <a:defRPr sz="1400" b="1">
+                <a:solidFill>
+                  <a:srgbClr val="FFFFFF"/>
+                </a:solidFill>
+                <a:latin typeface="Segoe UI"/>
+              </a:defRPr>
+            </a:pPr>
+            <a:r>
+              <a:t>⚖️ Compliance &amp; Defense</a:t>
+            </a:r>
+          </a:p>
+          <a:p>
+            <a:pPr>
+              <a:spcAft>
+                <a:spcPts val="600"/>
+              </a:spcAft>
+              <a:defRPr sz="1100">
+                <a:solidFill>
+                  <a:srgbClr val="CBD5E1"/>
+                </a:solidFill>
+                <a:latin typeface="Segoe UI"/>
+              </a:defRPr>
+            </a:pPr>
+            <a:r>
+              <a:t>• Indisputable, time-certified video logs.</a:t>
+            </a:r>
+          </a:p>
+          <a:p>
+            <a:pPr>
+              <a:spcAft>
+                <a:spcPts val="600"/>
+              </a:spcAft>
+              <a:defRPr sz="1100">
+                <a:solidFill>
+                  <a:srgbClr val="CBD5E1"/>
+                </a:solidFill>
+                <a:latin typeface="Segoe UI"/>
+              </a:defRPr>
+            </a:pPr>
+            <a:r>
+              <a:t>• Defends against liability and audit fines.</a:t>
+            </a:r>
+          </a:p>
+          <a:p>
+            <a:pPr>
+              <a:spcAft>
+                <a:spcPts val="600"/>
+              </a:spcAft>
+              <a:defRPr sz="1100">
+                <a:solidFill>
+                  <a:srgbClr val="CBD5E1"/>
+                </a:solidFill>
+                <a:latin typeface="Segoe UI"/>
+              </a:defRPr>
+            </a:pPr>
+            <a:r>
+              <a:t>• Court-admissible forensic archives.</a:t>
+            </a:r>
+          </a:p>
+          <a:p>
+            <a:pPr>
+              <a:spcAft>
+                <a:spcPts val="600"/>
+              </a:spcAft>
+              <a:defRPr sz="1100">
+                <a:solidFill>
+                  <a:srgbClr val="CBD5E1"/>
+                </a:solidFill>
+                <a:latin typeface="Segoe UI"/>
+              </a:defRPr>
+            </a:pPr>
+            <a:r>
+              <a:t>• Automated 30-day retention policies.</a:t>
+            </a:r>
+          </a:p>
+        </p:txBody>
+      </p:sp>
+      <p:sp>
+        <p:nvSpPr>
+          <p:cNvPr id="10" name="Rounded Rectangle 9"/>
+          <p:cNvSpPr/>
+          <p:nvPr/>
+        </p:nvSpPr>
+        <p:spPr>
+          <a:xfrm>
+            <a:off x="8046720" y="1920240"/>
+            <a:ext cx="3383280" cy="4297680"/>
+          </a:xfrm>
+          <a:prstGeom prst="roundRect">
+            <a:avLst/>
+          </a:prstGeom>
+          <a:solidFill>
+            <a:srgbClr val="151E2E"/>
           </a:solidFill>
           <a:ln w="19050">
             <a:solidFill>
@@ -4393,13 +4588,13 @@
       </p:sp>
       <p:sp>
         <p:nvSpPr>
-          <p:cNvPr id="9" name="TextBox 8"/>
+          <p:cNvPr id="11" name="TextBox 10"/>
           <p:cNvSpPr txBox="1"/>
           <p:nvPr/>
         </p:nvSpPr>
         <p:spPr>
           <a:xfrm>
-            <a:off x="4572000" y="2103120"/>
+            <a:off x="8229600" y="2103120"/>
             <a:ext cx="3017520" cy="3931920"/>
           </a:xfrm>
           <a:prstGeom prst="rect">
@@ -4425,219 +4620,71 @@
               </a:defRPr>
             </a:pPr>
             <a:r>
-              <a:t>🔑 Active Directory Integration</a:t>
-            </a:r>
-          </a:p>
-          <a:p>
-            <a:pPr>
-              <a:spcAft>
-                <a:spcPts val="600"/>
-              </a:spcAft>
-              <a:defRPr sz="1100">
-                <a:solidFill>
-                  <a:srgbClr val="CBD5E1"/>
-                </a:solidFill>
-                <a:latin typeface="Segoe UI"/>
-              </a:defRPr>
-            </a:pPr>
-            <a:r>
-              <a:t>• Seamless integration with on-premises LDAP / Active Directory.</a:t>
-            </a:r>
-          </a:p>
-          <a:p>
-            <a:pPr>
-              <a:spcAft>
-                <a:spcPts val="600"/>
-              </a:spcAft>
-              <a:defRPr sz="1100">
-                <a:solidFill>
-                  <a:srgbClr val="CBD5E1"/>
-                </a:solidFill>
-                <a:latin typeface="Segoe UI"/>
-              </a:defRPr>
-            </a:pPr>
-            <a:r>
-              <a:t>• Users sign in with their existing enterprise credentials.</a:t>
-            </a:r>
-          </a:p>
-          <a:p>
-            <a:pPr>
-              <a:spcAft>
-                <a:spcPts val="600"/>
-              </a:spcAft>
-              <a:defRPr sz="1100">
-                <a:solidFill>
-                  <a:srgbClr val="CBD5E1"/>
-                </a:solidFill>
-                <a:latin typeface="Segoe UI"/>
-              </a:defRPr>
-            </a:pPr>
-            <a:r>
-              <a:t>• Centralized user lifecycle management aligned with IT policies.</a:t>
-            </a:r>
-          </a:p>
-        </p:txBody>
-      </p:sp>
-      <p:sp>
-        <p:nvSpPr>
-          <p:cNvPr id="10" name="Rounded Rectangle 9"/>
-          <p:cNvSpPr/>
-          <p:nvPr/>
-        </p:nvSpPr>
-        <p:spPr>
-          <a:xfrm>
-            <a:off x="8046720" y="1920240"/>
-            <a:ext cx="3383280" cy="4297680"/>
-          </a:xfrm>
-          <a:prstGeom prst="roundRect">
-            <a:avLst/>
-          </a:prstGeom>
-          <a:solidFill>
-            <a:srgbClr val="1E293B"/>
-          </a:solidFill>
-          <a:ln w="19050">
-            <a:solidFill>
-              <a:srgbClr val="10B981"/>
-            </a:solidFill>
-          </a:ln>
-        </p:spPr>
-        <p:style>
-          <a:lnRef idx="1">
-            <a:schemeClr val="accent1"/>
-          </a:lnRef>
-          <a:fillRef idx="3">
-            <a:schemeClr val="accent1"/>
-          </a:fillRef>
-          <a:effectRef idx="2">
-            <a:schemeClr val="accent1"/>
-          </a:effectRef>
-          <a:fontRef idx="minor">
-            <a:schemeClr val="lt1"/>
-          </a:fontRef>
-        </p:style>
-        <p:txBody>
-          <a:bodyPr rtlCol="0" anchor="ctr"/>
-          <a:lstStyle/>
-          <a:p>
-            <a:pPr algn="ctr"/>
-          </a:p>
-        </p:txBody>
-      </p:sp>
-      <p:sp>
-        <p:nvSpPr>
-          <p:cNvPr id="11" name="TextBox 10"/>
-          <p:cNvSpPr txBox="1"/>
-          <p:nvPr/>
-        </p:nvSpPr>
-        <p:spPr>
-          <a:xfrm>
-            <a:off x="8229600" y="2103120"/>
-            <a:ext cx="3017520" cy="3931920"/>
-          </a:xfrm>
-          <a:prstGeom prst="rect">
-            <a:avLst/>
-          </a:prstGeom>
-          <a:noFill/>
-        </p:spPr>
-        <p:txBody>
-          <a:bodyPr wrap="square">
-            <a:spAutoFit/>
-          </a:bodyPr>
-          <a:lstStyle/>
-          <a:p>
-            <a:pPr>
-              <a:spcAft>
-                <a:spcPts val="800"/>
-              </a:spcAft>
-              <a:defRPr sz="1400" b="1">
-                <a:solidFill>
-                  <a:srgbClr val="10B981"/>
-                </a:solidFill>
-                <a:latin typeface="Segoe UI"/>
-              </a:defRPr>
-            </a:pPr>
-            <a:r>
-              <a:t>🛡️ Role-Based Access (RBAC)</a:t>
-            </a:r>
-          </a:p>
-          <a:p>
-            <a:pPr>
-              <a:spcAft>
-                <a:spcPts val="600"/>
-              </a:spcAft>
-              <a:defRPr sz="1100">
-                <a:solidFill>
-                  <a:srgbClr val="CBD5E1"/>
-                </a:solidFill>
-                <a:latin typeface="Segoe UI"/>
-              </a:defRPr>
-            </a:pPr>
-            <a:r>
-              <a:t>• Granular permission controls:</a:t>
-            </a:r>
-          </a:p>
-          <a:p>
-            <a:pPr>
-              <a:spcAft>
-                <a:spcPts val="600"/>
-              </a:spcAft>
-              <a:defRPr sz="1100">
-                <a:solidFill>
-                  <a:srgbClr val="CBD5E1"/>
-                </a:solidFill>
-                <a:latin typeface="Segoe UI"/>
-              </a:defRPr>
-            </a:pPr>
-            <a:r>
-              <a:t>•  • Live Viewers (Monitoring only)</a:t>
-            </a:r>
-          </a:p>
-          <a:p>
-            <a:pPr>
-              <a:spcAft>
-                <a:spcPts val="600"/>
-              </a:spcAft>
-              <a:defRPr sz="1100">
-                <a:solidFill>
-                  <a:srgbClr val="CBD5E1"/>
-                </a:solidFill>
-                <a:latin typeface="Segoe UI"/>
-              </a:defRPr>
-            </a:pPr>
-            <a:r>
-              <a:t>•  • Forensic Investigators (Export access)</a:t>
-            </a:r>
-          </a:p>
-          <a:p>
-            <a:pPr>
-              <a:spcAft>
-                <a:spcPts val="600"/>
-              </a:spcAft>
-              <a:defRPr sz="1100">
-                <a:solidFill>
-                  <a:srgbClr val="CBD5E1"/>
-                </a:solidFill>
-                <a:latin typeface="Segoe UI"/>
-              </a:defRPr>
-            </a:pPr>
-            <a:r>
-              <a:t>•  • System Administrators (Full control)</a:t>
-            </a:r>
-          </a:p>
-          <a:p>
-            <a:pPr>
-              <a:spcAft>
-                <a:spcPts val="600"/>
-              </a:spcAft>
-              <a:defRPr sz="1100">
-                <a:solidFill>
-                  <a:srgbClr val="CBD5E1"/>
-                </a:solidFill>
-                <a:latin typeface="Segoe UI"/>
-              </a:defRPr>
-            </a:pPr>
-            <a:r>
-              <a:t>• Prevents unauthorized video leakage.</a:t>
+              <a:t>💰 Infrastructure Economics</a:t>
+            </a:r>
+          </a:p>
+          <a:p>
+            <a:pPr>
+              <a:spcAft>
+                <a:spcPts val="600"/>
+              </a:spcAft>
+              <a:defRPr sz="1100">
+                <a:solidFill>
+                  <a:srgbClr val="CBD5E1"/>
+                </a:solidFill>
+                <a:latin typeface="Segoe UI"/>
+              </a:defRPr>
+            </a:pPr>
+            <a:r>
+              <a:t>• 100+ stations per standard COTS server.</a:t>
+            </a:r>
+          </a:p>
+          <a:p>
+            <a:pPr>
+              <a:spcAft>
+                <a:spcPts val="600"/>
+              </a:spcAft>
+              <a:defRPr sz="1100">
+                <a:solidFill>
+                  <a:srgbClr val="CBD5E1"/>
+                </a:solidFill>
+                <a:latin typeface="Segoe UI"/>
+              </a:defRPr>
+            </a:pPr>
+            <a:r>
+              <a:t>• Zero datacenter GPU costs.</a:t>
+            </a:r>
+          </a:p>
+          <a:p>
+            <a:pPr>
+              <a:spcAft>
+                <a:spcPts val="600"/>
+              </a:spcAft>
+              <a:defRPr sz="1100">
+                <a:solidFill>
+                  <a:srgbClr val="CBD5E1"/>
+                </a:solidFill>
+                <a:latin typeface="Segoe UI"/>
+              </a:defRPr>
+            </a:pPr>
+            <a:r>
+              <a:t>• Zero recurring SaaS subscription traps.</a:t>
+            </a:r>
+          </a:p>
+          <a:p>
+            <a:pPr>
+              <a:spcAft>
+                <a:spcPts val="600"/>
+              </a:spcAft>
+              <a:defRPr sz="1100">
+                <a:solidFill>
+                  <a:srgbClr val="CBD5E1"/>
+                </a:solidFill>
+                <a:latin typeface="Segoe UI"/>
+              </a:defRPr>
+            </a:pPr>
+            <a:r>
+              <a:t>• Total perpetual platform sovereignty.</a:t>
             </a:r>
           </a:p>
         </p:txBody>
@@ -4675,7 +4722,7 @@
             <a:avLst/>
           </a:prstGeom>
           <a:solidFill>
-            <a:srgbClr val="0A1128"/>
+            <a:srgbClr val="070A10"/>
           </a:solidFill>
           <a:ln>
             <a:noFill/>
@@ -4734,7 +4781,7 @@
               </a:defRPr>
             </a:pPr>
             <a:r>
-              <a:t>SCALE &amp; DEPLOYMENT</a:t>
+              <a:t>PRESENTER'S PLAYBOOK</a:t>
             </a:r>
           </a:p>
         </p:txBody>
@@ -4770,7 +4817,7 @@
               </a:defRPr>
             </a:pPr>
             <a:r>
-              <a:t>Scalability &amp; Low Total Cost of Ownership (TCO)</a:t>
+              <a:t>Live Demonstration Script: What to Show Management</a:t>
             </a:r>
           </a:p>
         </p:txBody>
@@ -4806,7 +4853,7 @@
               </a:defRPr>
             </a:pPr>
             <a:r>
-              <a:t>Effortless deployment from small command cells to large enterprise operations.</a:t>
+              <a:t>Step-by-step interactive demonstration flow for tomorrow's executive showcase.</a:t>
             </a:r>
           </a:p>
         </p:txBody>
@@ -4826,7 +4873,7 @@
             <a:avLst/>
           </a:prstGeom>
           <a:solidFill>
-            <a:srgbClr val="1E293B"/>
+            <a:srgbClr val="151E2E"/>
           </a:solidFill>
           <a:ln w="19050">
             <a:solidFill>
@@ -4890,55 +4937,71 @@
               </a:defRPr>
             </a:pPr>
             <a:r>
-              <a:t>📈 High Density per Server Node</a:t>
-            </a:r>
-          </a:p>
-          <a:p>
-            <a:pPr>
-              <a:spcAft>
-                <a:spcPts val="600"/>
-              </a:spcAft>
-              <a:defRPr sz="1100">
-                <a:solidFill>
-                  <a:srgbClr val="CBD5E1"/>
-                </a:solidFill>
-                <a:latin typeface="Segoe UI"/>
-              </a:defRPr>
-            </a:pPr>
-            <a:r>
-              <a:t>• Workstation GPU Offloading: Because video compression happens on endpoint GPUs, the central server only handles stream routing.</a:t>
-            </a:r>
-          </a:p>
-          <a:p>
-            <a:pPr>
-              <a:spcAft>
-                <a:spcPts val="600"/>
-              </a:spcAft>
-              <a:defRPr sz="1100">
-                <a:solidFill>
-                  <a:srgbClr val="CBD5E1"/>
-                </a:solidFill>
-                <a:latin typeface="Segoe UI"/>
-              </a:defRPr>
-            </a:pPr>
-            <a:r>
-              <a:t>• 100+ Endpoints per Server: A single standard server node manages over 100 simultaneous recording streams.</a:t>
-            </a:r>
-          </a:p>
-          <a:p>
-            <a:pPr>
-              <a:spcAft>
-                <a:spcPts val="600"/>
-              </a:spcAft>
-              <a:defRPr sz="1100">
-                <a:solidFill>
-                  <a:srgbClr val="CBD5E1"/>
-                </a:solidFill>
-                <a:latin typeface="Segoe UI"/>
-              </a:defRPr>
-            </a:pPr>
-            <a:r>
-              <a:t>• COTS Hardware Compatibility: Runs on standard off-the-shelf enterprise server hardware without requiring expensive data center GPUs.</a:t>
+              <a:t>1. Live Fleet Wall &amp; Silent SSO</a:t>
+            </a:r>
+          </a:p>
+          <a:p>
+            <a:pPr>
+              <a:spcAft>
+                <a:spcPts val="600"/>
+              </a:spcAft>
+              <a:defRPr sz="1100">
+                <a:solidFill>
+                  <a:srgbClr val="CBD5E1"/>
+                </a:solidFill>
+                <a:latin typeface="Segoe UI"/>
+              </a:defRPr>
+            </a:pPr>
+            <a:r>
+              <a:t>• Action: Open browser to dashboard. Show instant login without typing username/password.</a:t>
+            </a:r>
+          </a:p>
+          <a:p>
+            <a:pPr>
+              <a:spcAft>
+                <a:spcPts val="600"/>
+              </a:spcAft>
+              <a:defRPr sz="1100">
+                <a:solidFill>
+                  <a:srgbClr val="CBD5E1"/>
+                </a:solidFill>
+                <a:latin typeface="Segoe UI"/>
+              </a:defRPr>
+            </a:pPr>
+            <a:r>
+              <a:t>• Say: 'Notice how the system authenticated my Windows domain credentials silently. We are looking at live fleet streaming in real-time under 300ms latency.'</a:t>
+            </a:r>
+          </a:p>
+          <a:p>
+            <a:pPr>
+              <a:spcAft>
+                <a:spcPts val="600"/>
+              </a:spcAft>
+              <a:defRPr sz="1100">
+                <a:solidFill>
+                  <a:srgbClr val="CBD5E1"/>
+                </a:solidFill>
+                <a:latin typeface="Segoe UI"/>
+              </a:defRPr>
+            </a:pPr>
+            <a:r>
+              <a:t>• Action: Highlight station cards and toggle audio solo listening.</a:t>
+            </a:r>
+          </a:p>
+          <a:p>
+            <a:pPr>
+              <a:spcAft>
+                <a:spcPts val="600"/>
+              </a:spcAft>
+              <a:defRPr sz="1100">
+                <a:solidFill>
+                  <a:srgbClr val="CBD5E1"/>
+                </a:solidFill>
+                <a:latin typeface="Segoe UI"/>
+              </a:defRPr>
+            </a:pPr>
+            <a:r>
+              <a:t>• Say: 'With 100 stations, operators experience zero lag and zero browser memory issues.'</a:t>
             </a:r>
           </a:p>
         </p:txBody>
@@ -4958,11 +5021,11 @@
             <a:avLst/>
           </a:prstGeom>
           <a:solidFill>
-            <a:srgbClr val="1E293B"/>
+            <a:srgbClr val="151E2E"/>
           </a:solidFill>
           <a:ln w="19050">
             <a:solidFill>
-              <a:srgbClr val="334155"/>
+              <a:srgbClr val="06B6D4"/>
             </a:solidFill>
           </a:ln>
         </p:spPr>
@@ -5016,61 +5079,77 @@
               </a:spcAft>
               <a:defRPr sz="1400" b="1">
                 <a:solidFill>
-                  <a:srgbClr val="FFFFFF"/>
-                </a:solidFill>
-                <a:latin typeface="Segoe UI"/>
-              </a:defRPr>
-            </a:pPr>
-            <a:r>
-              <a:t>⚙️ Silent &amp; Centralized Deployment</a:t>
-            </a:r>
-          </a:p>
-          <a:p>
-            <a:pPr>
-              <a:spcAft>
-                <a:spcPts val="600"/>
-              </a:spcAft>
-              <a:defRPr sz="1100">
-                <a:solidFill>
-                  <a:srgbClr val="CBD5E1"/>
-                </a:solidFill>
-                <a:latin typeface="Segoe UI"/>
-              </a:defRPr>
-            </a:pPr>
-            <a:r>
-              <a:t>• Automated Silent Install: Rapidly deployed across hundreds of workstations using standard IT software distribution tools.</a:t>
-            </a:r>
-          </a:p>
-          <a:p>
-            <a:pPr>
-              <a:spcAft>
-                <a:spcPts val="600"/>
-              </a:spcAft>
-              <a:defRPr sz="1100">
-                <a:solidFill>
-                  <a:srgbClr val="CBD5E1"/>
-                </a:solidFill>
-                <a:latin typeface="Segoe UI"/>
-              </a:defRPr>
-            </a:pPr>
-            <a:r>
-              <a:t>• Zero Desktop Maintenance: Agents update and operate autonomously without user intervention.</a:t>
-            </a:r>
-          </a:p>
-          <a:p>
-            <a:pPr>
-              <a:spcAft>
-                <a:spcPts val="600"/>
-              </a:spcAft>
-              <a:defRPr sz="1100">
-                <a:solidFill>
-                  <a:srgbClr val="CBD5E1"/>
-                </a:solidFill>
-                <a:latin typeface="Segoe UI"/>
-              </a:defRPr>
-            </a:pPr>
-            <a:r>
-              <a:t>• Centralized Management: Configure recording bitrates, frame rates, and policies fleet-wide from the web dashboard.</a:t>
+                  <a:srgbClr val="06B6D4"/>
+                </a:solidFill>
+                <a:latin typeface="Segoe UI"/>
+              </a:defRPr>
+            </a:pPr>
+            <a:r>
+              <a:t>2. Auto-Director, Keystrokes &amp; Sync</a:t>
+            </a:r>
+          </a:p>
+          <a:p>
+            <a:pPr>
+              <a:spcAft>
+                <a:spcPts val="600"/>
+              </a:spcAft>
+              <a:defRPr sz="1100">
+                <a:solidFill>
+                  <a:srgbClr val="CBD5E1"/>
+                </a:solidFill>
+                <a:latin typeface="Segoe UI"/>
+              </a:defRPr>
+            </a:pPr>
+            <a:r>
+              <a:t>• Action: Open multi-screen station in Studio. Toggle Split Screen and PiP modes.</a:t>
+            </a:r>
+          </a:p>
+          <a:p>
+            <a:pPr>
+              <a:spcAft>
+                <a:spcPts val="600"/>
+              </a:spcAft>
+              <a:defRPr sz="1100">
+                <a:solidFill>
+                  <a:srgbClr val="CBD5E1"/>
+                </a:solidFill>
+                <a:latin typeface="Segoe UI"/>
+              </a:defRPr>
+            </a:pPr>
+            <a:r>
+              <a:t>• Say: 'The Auto-Director automatically tracks operator focus between screens. We can split, override, or view side-by-side.'</a:t>
+            </a:r>
+          </a:p>
+          <a:p>
+            <a:pPr>
+              <a:spcAft>
+                <a:spcPts val="600"/>
+              </a:spcAft>
+              <a:defRPr sz="1100">
+                <a:solidFill>
+                  <a:srgbClr val="CBD5E1"/>
+                </a:solidFill>
+                <a:latin typeface="Segoe UI"/>
+              </a:defRPr>
+            </a:pPr>
+            <a:r>
+              <a:t>• Action: Show keystroke subtitle overlay and scrub multiple synchronized stations.</a:t>
+            </a:r>
+          </a:p>
+          <a:p>
+            <a:pPr>
+              <a:spcAft>
+                <a:spcPts val="600"/>
+              </a:spcAft>
+              <a:defRPr sz="1100">
+                <a:solidFill>
+                  <a:srgbClr val="CBD5E1"/>
+                </a:solidFill>
+                <a:latin typeface="Segoe UI"/>
+              </a:defRPr>
+            </a:pPr>
+            <a:r>
+              <a:t>• Say: 'Every keystroke is correlated to the millisecond. All stations are locked to the exact wall clock with No-Signal gap protection.'</a:t>
             </a:r>
           </a:p>
         </p:txBody>
@@ -5108,7 +5187,7 @@
             <a:avLst/>
           </a:prstGeom>
           <a:solidFill>
-            <a:srgbClr val="0A1128"/>
+            <a:srgbClr val="070A10"/>
           </a:solidFill>
           <a:ln>
             <a:noFill/>
@@ -5161,13 +5240,13 @@
             <a:pPr>
               <a:defRPr sz="1000" b="1">
                 <a:solidFill>
-                  <a:srgbClr val="F59E0B"/>
+                  <a:srgbClr val="06B6D4"/>
                 </a:solidFill>
                 <a:latin typeface="Arial"/>
               </a:defRPr>
             </a:pPr>
             <a:r>
-              <a:t>VALUE PROPOSITION</a:t>
+              <a:t>EXECUTIVE CONCLUSION</a:t>
             </a:r>
           </a:p>
         </p:txBody>
@@ -5203,7 +5282,7 @@
               </a:defRPr>
             </a:pPr>
             <a:r>
-              <a:t>Measurable Business &amp; Operational ROI</a:t>
+              <a:t>Conclusion: Ready for Mission Deployment</a:t>
             </a:r>
           </a:p>
         </p:txBody>
@@ -5239,7 +5318,7 @@
               </a:defRPr>
             </a:pPr>
             <a:r>
-              <a:t>Transforming mission debriefing, compliance posture, and operational efficiency.</a:t>
+              <a:t>A mature, battle-tested, high-density platform ready to deliver complete operational assurance.</a:t>
             </a:r>
           </a:p>
         </p:txBody>
@@ -5253,17 +5332,17 @@
         <p:spPr>
           <a:xfrm>
             <a:off x="731520" y="1920240"/>
-            <a:ext cx="3383280" cy="4297680"/>
+            <a:ext cx="5120640" cy="4297680"/>
           </a:xfrm>
           <a:prstGeom prst="roundRect">
             <a:avLst/>
           </a:prstGeom>
           <a:solidFill>
-            <a:srgbClr val="1E293B"/>
+            <a:srgbClr val="151E2E"/>
           </a:solidFill>
           <a:ln w="19050">
             <a:solidFill>
-              <a:srgbClr val="F59E0B"/>
+              <a:srgbClr val="06B6D4"/>
             </a:solidFill>
           </a:ln>
         </p:spPr>
@@ -5298,7 +5377,7 @@
         <p:spPr>
           <a:xfrm>
             <a:off x="914400" y="2103120"/>
-            <a:ext cx="3017520" cy="3931920"/>
+            <a:ext cx="4754880" cy="3931920"/>
           </a:xfrm>
           <a:prstGeom prst="rect">
             <a:avLst/>
@@ -5317,61 +5396,93 @@
               </a:spcAft>
               <a:defRPr sz="1400" b="1">
                 <a:solidFill>
-                  <a:srgbClr val="F59E0B"/>
-                </a:solidFill>
-                <a:latin typeface="Segoe UI"/>
-              </a:defRPr>
-            </a:pPr>
-            <a:r>
-              <a:t>⏱️ 90% Faster Debriefs</a:t>
-            </a:r>
-          </a:p>
-          <a:p>
-            <a:pPr>
-              <a:spcAft>
-                <a:spcPts val="600"/>
-              </a:spcAft>
-              <a:defRPr sz="1100">
-                <a:solidFill>
-                  <a:srgbClr val="CBD5E1"/>
-                </a:solidFill>
-                <a:latin typeface="Segoe UI"/>
-              </a:defRPr>
-            </a:pPr>
-            <a:r>
-              <a:t>• Incident debriefs reduced from multiple days of interviews to minutes of verified multi-screen playback.</a:t>
-            </a:r>
-          </a:p>
-          <a:p>
-            <a:pPr>
-              <a:spcAft>
-                <a:spcPts val="600"/>
-              </a:spcAft>
-              <a:defRPr sz="1100">
-                <a:solidFill>
-                  <a:srgbClr val="CBD5E1"/>
-                </a:solidFill>
-                <a:latin typeface="Segoe UI"/>
-              </a:defRPr>
-            </a:pPr>
-            <a:r>
-              <a:t>• Immediate identification of root causes across complex team interactions.</a:t>
-            </a:r>
-          </a:p>
-          <a:p>
-            <a:pPr>
-              <a:spcAft>
-                <a:spcPts val="600"/>
-              </a:spcAft>
-              <a:defRPr sz="1100">
-                <a:solidFill>
-                  <a:srgbClr val="CBD5E1"/>
-                </a:solidFill>
-                <a:latin typeface="Segoe UI"/>
-              </a:defRPr>
-            </a:pPr>
-            <a:r>
-              <a:t>• Accelerates operational lessons learned.</a:t>
+                  <a:srgbClr val="06B6D4"/>
+                </a:solidFill>
+                <a:latin typeface="Segoe UI"/>
+              </a:defRPr>
+            </a:pPr>
+            <a:r>
+              <a:t>🌟 Key Strategic Takeaways</a:t>
+            </a:r>
+          </a:p>
+          <a:p>
+            <a:pPr>
+              <a:spcAft>
+                <a:spcPts val="600"/>
+              </a:spcAft>
+              <a:defRPr sz="1100">
+                <a:solidFill>
+                  <a:srgbClr val="CBD5E1"/>
+                </a:solidFill>
+                <a:latin typeface="Segoe UI"/>
+              </a:defRPr>
+            </a:pPr>
+            <a:r>
+              <a:t>• High-Density Fleet Recording: 100+ workstations recorded with &lt; 1% CPU overhead.</a:t>
+            </a:r>
+          </a:p>
+          <a:p>
+            <a:pPr>
+              <a:spcAft>
+                <a:spcPts val="600"/>
+              </a:spcAft>
+              <a:defRPr sz="1100">
+                <a:solidFill>
+                  <a:srgbClr val="CBD5E1"/>
+                </a:solidFill>
+                <a:latin typeface="Segoe UI"/>
+              </a:defRPr>
+            </a:pPr>
+            <a:r>
+              <a:t>• Unrivaled Forensic Power: Auto-Director, millisecond keystroke correlation, and gap-proof synchronicity.</a:t>
+            </a:r>
+          </a:p>
+          <a:p>
+            <a:pPr>
+              <a:spcAft>
+                <a:spcPts val="600"/>
+              </a:spcAft>
+              <a:defRPr sz="1100">
+                <a:solidFill>
+                  <a:srgbClr val="CBD5E1"/>
+                </a:solidFill>
+                <a:latin typeface="Segoe UI"/>
+              </a:defRPr>
+            </a:pPr>
+            <a:r>
+              <a:t>• Total Sovereignty: 100% air-gapped, zero cloud exposure, and silent Active Directory integration.</a:t>
+            </a:r>
+          </a:p>
+          <a:p>
+            <a:pPr>
+              <a:spcAft>
+                <a:spcPts val="600"/>
+              </a:spcAft>
+              <a:defRPr sz="1100">
+                <a:solidFill>
+                  <a:srgbClr val="CBD5E1"/>
+                </a:solidFill>
+                <a:latin typeface="Segoe UI"/>
+              </a:defRPr>
+            </a:pPr>
+            <a:r>
+              <a:t>• Immediate ROI: 90% faster debriefs and permanent defense against compliance penalties.</a:t>
+            </a:r>
+          </a:p>
+          <a:p>
+            <a:pPr>
+              <a:spcAft>
+                <a:spcPts val="600"/>
+              </a:spcAft>
+              <a:defRPr sz="1100">
+                <a:solidFill>
+                  <a:srgbClr val="CBD5E1"/>
+                </a:solidFill>
+                <a:latin typeface="Segoe UI"/>
+              </a:defRPr>
+            </a:pPr>
+            <a:r>
+              <a:t>• Production Readiness: Fully verified and ready for operational deployment.</a:t>
             </a:r>
           </a:p>
         </p:txBody>
@@ -5384,146 +5495,14 @@
         </p:nvSpPr>
         <p:spPr>
           <a:xfrm>
-            <a:off x="4389120" y="1920240"/>
-            <a:ext cx="3383280" cy="4297680"/>
+            <a:off x="6217920" y="1920240"/>
+            <a:ext cx="5212080" cy="4297680"/>
           </a:xfrm>
           <a:prstGeom prst="roundRect">
             <a:avLst/>
           </a:prstGeom>
           <a:solidFill>
-            <a:srgbClr val="1E293B"/>
-          </a:solidFill>
-          <a:ln w="19050">
-            <a:solidFill>
-              <a:srgbClr val="334155"/>
-            </a:solidFill>
-          </a:ln>
-        </p:spPr>
-        <p:style>
-          <a:lnRef idx="1">
-            <a:schemeClr val="accent1"/>
-          </a:lnRef>
-          <a:fillRef idx="3">
-            <a:schemeClr val="accent1"/>
-          </a:fillRef>
-          <a:effectRef idx="2">
-            <a:schemeClr val="accent1"/>
-          </a:effectRef>
-          <a:fontRef idx="minor">
-            <a:schemeClr val="lt1"/>
-          </a:fontRef>
-        </p:style>
-        <p:txBody>
-          <a:bodyPr rtlCol="0" anchor="ctr"/>
-          <a:lstStyle/>
-          <a:p>
-            <a:pPr algn="ctr"/>
-          </a:p>
-        </p:txBody>
-      </p:sp>
-      <p:sp>
-        <p:nvSpPr>
-          <p:cNvPr id="9" name="TextBox 8"/>
-          <p:cNvSpPr txBox="1"/>
-          <p:nvPr/>
-        </p:nvSpPr>
-        <p:spPr>
-          <a:xfrm>
-            <a:off x="4572000" y="2103120"/>
-            <a:ext cx="3017520" cy="3931920"/>
-          </a:xfrm>
-          <a:prstGeom prst="rect">
-            <a:avLst/>
-          </a:prstGeom>
-          <a:noFill/>
-        </p:spPr>
-        <p:txBody>
-          <a:bodyPr wrap="square">
-            <a:spAutoFit/>
-          </a:bodyPr>
-          <a:lstStyle/>
-          <a:p>
-            <a:pPr>
-              <a:spcAft>
-                <a:spcPts val="800"/>
-              </a:spcAft>
-              <a:defRPr sz="1400" b="1">
-                <a:solidFill>
-                  <a:srgbClr val="FFFFFF"/>
-                </a:solidFill>
-                <a:latin typeface="Segoe UI"/>
-              </a:defRPr>
-            </a:pPr>
-            <a:r>
-              <a:t>⚖️ Total Compliance &amp; Defense</a:t>
-            </a:r>
-          </a:p>
-          <a:p>
-            <a:pPr>
-              <a:spcAft>
-                <a:spcPts val="600"/>
-              </a:spcAft>
-              <a:defRPr sz="1100">
-                <a:solidFill>
-                  <a:srgbClr val="CBD5E1"/>
-                </a:solidFill>
-                <a:latin typeface="Segoe UI"/>
-              </a:defRPr>
-            </a:pPr>
-            <a:r>
-              <a:t>• Indisputable, time-certified video and keystroke logs.</a:t>
-            </a:r>
-          </a:p>
-          <a:p>
-            <a:pPr>
-              <a:spcAft>
-                <a:spcPts val="600"/>
-              </a:spcAft>
-              <a:defRPr sz="1100">
-                <a:solidFill>
-                  <a:srgbClr val="CBD5E1"/>
-                </a:solidFill>
-                <a:latin typeface="Segoe UI"/>
-              </a:defRPr>
-            </a:pPr>
-            <a:r>
-              <a:t>• Eliminates liability ambiguities and regulatory audit penalties.</a:t>
-            </a:r>
-          </a:p>
-          <a:p>
-            <a:pPr>
-              <a:spcAft>
-                <a:spcPts val="600"/>
-              </a:spcAft>
-              <a:defRPr sz="1100">
-                <a:solidFill>
-                  <a:srgbClr val="CBD5E1"/>
-                </a:solidFill>
-                <a:latin typeface="Segoe UI"/>
-              </a:defRPr>
-            </a:pPr>
-            <a:r>
-              <a:t>• Provides certified forensic evidence for legal reviews.</a:t>
-            </a:r>
-          </a:p>
-        </p:txBody>
-      </p:sp>
-      <p:sp>
-        <p:nvSpPr>
-          <p:cNvPr id="10" name="Rounded Rectangle 9"/>
-          <p:cNvSpPr/>
-          <p:nvPr/>
-        </p:nvSpPr>
-        <p:spPr>
-          <a:xfrm>
-            <a:off x="8046720" y="1920240"/>
-            <a:ext cx="3383280" cy="4297680"/>
-          </a:xfrm>
-          <a:prstGeom prst="roundRect">
-            <a:avLst/>
-          </a:prstGeom>
-          <a:solidFill>
-            <a:srgbClr val="1E293B"/>
+            <a:srgbClr val="151E2E"/>
           </a:solidFill>
           <a:ln w="19050">
             <a:solidFill>
@@ -5555,14 +5534,14 @@
       </p:sp>
       <p:sp>
         <p:nvSpPr>
-          <p:cNvPr id="11" name="TextBox 10"/>
+          <p:cNvPr id="9" name="TextBox 8"/>
           <p:cNvSpPr txBox="1"/>
           <p:nvPr/>
         </p:nvSpPr>
         <p:spPr>
           <a:xfrm>
-            <a:off x="8229600" y="2103120"/>
-            <a:ext cx="3017520" cy="3931920"/>
+            <a:off x="6400800" y="2103120"/>
+            <a:ext cx="4846320" cy="3931920"/>
           </a:xfrm>
           <a:prstGeom prst="rect">
             <a:avLst/>
@@ -5587,536 +5566,71 @@
               </a:defRPr>
             </a:pPr>
             <a:r>
-              <a:t>💼 Operator Productivity</a:t>
-            </a:r>
-          </a:p>
-          <a:p>
-            <a:pPr>
-              <a:spcAft>
-                <a:spcPts val="600"/>
-              </a:spcAft>
-              <a:defRPr sz="1100">
-                <a:solidFill>
-                  <a:srgbClr val="CBD5E1"/>
-                </a:solidFill>
-                <a:latin typeface="Segoe UI"/>
-              </a:defRPr>
-            </a:pPr>
-            <a:r>
-              <a:t>• Workstations remain completely responsive with zero CPU lag.</a:t>
-            </a:r>
-          </a:p>
-          <a:p>
-            <a:pPr>
-              <a:spcAft>
-                <a:spcPts val="600"/>
-              </a:spcAft>
-              <a:defRPr sz="1100">
-                <a:solidFill>
-                  <a:srgbClr val="CBD5E1"/>
-                </a:solidFill>
-                <a:latin typeface="Segoe UI"/>
-              </a:defRPr>
-            </a:pPr>
-            <a:r>
-              <a:t>• Eliminates software crashes caused by bulky recording tools.</a:t>
-            </a:r>
-          </a:p>
-          <a:p>
-            <a:pPr>
-              <a:spcAft>
-                <a:spcPts val="600"/>
-              </a:spcAft>
-              <a:defRPr sz="1100">
-                <a:solidFill>
-                  <a:srgbClr val="CBD5E1"/>
-                </a:solidFill>
-                <a:latin typeface="Segoe UI"/>
-              </a:defRPr>
-            </a:pPr>
-            <a:r>
-              <a:t>• Operators stay focused on mission-critical responsibilities.</a:t>
-            </a:r>
-          </a:p>
-        </p:txBody>
-      </p:sp>
-    </p:spTree>
-  </p:cSld>
-  <p:clrMapOvr>
-    <a:masterClrMapping/>
-  </p:clrMapOvr>
-</p:sld>
-</file>
-
-<file path=ppt/slides/slide14.xml><?xml version="1.0" encoding="utf-8"?>
-<p:sld xmlns:a="http://schemas.openxmlformats.org/drawingml/2006/main" xmlns:p="http://schemas.openxmlformats.org/presentationml/2006/main" xmlns:r="http://schemas.openxmlformats.org/officeDocument/2006/relationships">
-  <p:cSld>
-    <p:spTree>
-      <p:nvGrpSpPr>
-        <p:cNvPr id="1" name=""/>
-        <p:cNvGrpSpPr/>
-        <p:nvPr/>
-      </p:nvGrpSpPr>
-      <p:grpSpPr/>
-      <p:sp>
-        <p:nvSpPr>
-          <p:cNvPr id="2" name="Rectangle 1"/>
-          <p:cNvSpPr/>
-          <p:nvPr/>
-        </p:nvSpPr>
-        <p:spPr>
-          <a:xfrm>
-            <a:off x="0" y="0"/>
-            <a:ext cx="12191695" cy="6858000"/>
-          </a:xfrm>
-          <a:prstGeom prst="rect">
-            <a:avLst/>
-          </a:prstGeom>
-          <a:solidFill>
-            <a:srgbClr val="0A1128"/>
-          </a:solidFill>
-          <a:ln>
-            <a:noFill/>
-          </a:ln>
-        </p:spPr>
-        <p:style>
-          <a:lnRef idx="1">
-            <a:schemeClr val="accent1"/>
-          </a:lnRef>
-          <a:fillRef idx="3">
-            <a:schemeClr val="accent1"/>
-          </a:fillRef>
-          <a:effectRef idx="2">
-            <a:schemeClr val="accent1"/>
-          </a:effectRef>
-          <a:fontRef idx="minor">
-            <a:schemeClr val="lt1"/>
-          </a:fontRef>
-        </p:style>
-        <p:txBody>
-          <a:bodyPr rtlCol="0" anchor="ctr"/>
-          <a:lstStyle/>
-          <a:p>
-            <a:pPr algn="ctr"/>
-          </a:p>
-        </p:txBody>
-      </p:sp>
-      <p:sp>
-        <p:nvSpPr>
-          <p:cNvPr id="3" name="TextBox 2"/>
-          <p:cNvSpPr txBox="1"/>
-          <p:nvPr/>
-        </p:nvSpPr>
-        <p:spPr>
-          <a:xfrm>
-            <a:off x="731520" y="365760"/>
-            <a:ext cx="3657600" cy="365760"/>
-          </a:xfrm>
-          <a:prstGeom prst="rect">
-            <a:avLst/>
-          </a:prstGeom>
-          <a:noFill/>
-        </p:spPr>
-        <p:txBody>
-          <a:bodyPr wrap="square">
-            <a:spAutoFit/>
-          </a:bodyPr>
-          <a:lstStyle/>
-          <a:p>
-            <a:pPr>
-              <a:defRPr sz="1000" b="1">
-                <a:solidFill>
-                  <a:srgbClr val="F59E0B"/>
-                </a:solidFill>
-                <a:latin typeface="Arial"/>
-              </a:defRPr>
-            </a:pPr>
-            <a:r>
-              <a:t>EXECUTIVE SUMMARY</a:t>
-            </a:r>
-          </a:p>
-        </p:txBody>
-      </p:sp>
-      <p:sp>
-        <p:nvSpPr>
-          <p:cNvPr id="4" name="TextBox 3"/>
-          <p:cNvSpPr txBox="1"/>
-          <p:nvPr/>
-        </p:nvSpPr>
-        <p:spPr>
-          <a:xfrm>
-            <a:off x="731520" y="640080"/>
-            <a:ext cx="10698480" cy="548640"/>
-          </a:xfrm>
-          <a:prstGeom prst="rect">
-            <a:avLst/>
-          </a:prstGeom>
-          <a:noFill/>
-        </p:spPr>
-        <p:txBody>
-          <a:bodyPr wrap="square">
-            <a:spAutoFit/>
-          </a:bodyPr>
-          <a:lstStyle/>
-          <a:p>
-            <a:pPr>
-              <a:defRPr sz="2400" b="1">
-                <a:solidFill>
-                  <a:srgbClr val="FFFFFF"/>
-                </a:solidFill>
-                <a:latin typeface="Segoe UI"/>
-              </a:defRPr>
-            </a:pPr>
-            <a:r>
-              <a:t>Strategic Readiness: The Visual Defense Foundation</a:t>
-            </a:r>
-          </a:p>
-        </p:txBody>
-      </p:sp>
-      <p:sp>
-        <p:nvSpPr>
-          <p:cNvPr id="5" name="TextBox 4"/>
-          <p:cNvSpPr txBox="1"/>
-          <p:nvPr/>
-        </p:nvSpPr>
-        <p:spPr>
-          <a:xfrm>
-            <a:off x="731520" y="1188720"/>
-            <a:ext cx="10698480" cy="457200"/>
-          </a:xfrm>
-          <a:prstGeom prst="rect">
-            <a:avLst/>
-          </a:prstGeom>
-          <a:noFill/>
-        </p:spPr>
-        <p:txBody>
-          <a:bodyPr wrap="square">
-            <a:spAutoFit/>
-          </a:bodyPr>
-          <a:lstStyle/>
-          <a:p>
-            <a:pPr>
-              <a:defRPr sz="1200">
-                <a:solidFill>
-                  <a:srgbClr val="94A3B8"/>
-                </a:solidFill>
-                <a:latin typeface="Segoe UI"/>
-              </a:defRPr>
-            </a:pPr>
-            <a:r>
-              <a:t>Comprehensive, air-gapped operational assurance ready for enterprise deployment.</a:t>
-            </a:r>
-          </a:p>
-        </p:txBody>
-      </p:sp>
-      <p:sp>
-        <p:nvSpPr>
-          <p:cNvPr id="6" name="Rounded Rectangle 5"/>
-          <p:cNvSpPr/>
-          <p:nvPr/>
-        </p:nvSpPr>
-        <p:spPr>
-          <a:xfrm>
-            <a:off x="731520" y="1920240"/>
-            <a:ext cx="5120640" cy="4297680"/>
-          </a:xfrm>
-          <a:prstGeom prst="roundRect">
-            <a:avLst/>
-          </a:prstGeom>
-          <a:solidFill>
-            <a:srgbClr val="1E293B"/>
-          </a:solidFill>
-          <a:ln w="19050">
-            <a:solidFill>
-              <a:srgbClr val="F59E0B"/>
-            </a:solidFill>
-          </a:ln>
-        </p:spPr>
-        <p:style>
-          <a:lnRef idx="1">
-            <a:schemeClr val="accent1"/>
-          </a:lnRef>
-          <a:fillRef idx="3">
-            <a:schemeClr val="accent1"/>
-          </a:fillRef>
-          <a:effectRef idx="2">
-            <a:schemeClr val="accent1"/>
-          </a:effectRef>
-          <a:fontRef idx="minor">
-            <a:schemeClr val="lt1"/>
-          </a:fontRef>
-        </p:style>
-        <p:txBody>
-          <a:bodyPr rtlCol="0" anchor="ctr"/>
-          <a:lstStyle/>
-          <a:p>
-            <a:pPr algn="ctr"/>
-          </a:p>
-        </p:txBody>
-      </p:sp>
-      <p:sp>
-        <p:nvSpPr>
-          <p:cNvPr id="7" name="TextBox 6"/>
-          <p:cNvSpPr txBox="1"/>
-          <p:nvPr/>
-        </p:nvSpPr>
-        <p:spPr>
-          <a:xfrm>
-            <a:off x="914400" y="2103120"/>
-            <a:ext cx="4754880" cy="3931920"/>
-          </a:xfrm>
-          <a:prstGeom prst="rect">
-            <a:avLst/>
-          </a:prstGeom>
-          <a:noFill/>
-        </p:spPr>
-        <p:txBody>
-          <a:bodyPr wrap="square">
-            <a:spAutoFit/>
-          </a:bodyPr>
-          <a:lstStyle/>
-          <a:p>
-            <a:pPr>
-              <a:spcAft>
-                <a:spcPts val="800"/>
-              </a:spcAft>
-              <a:defRPr sz="1400" b="1">
-                <a:solidFill>
-                  <a:srgbClr val="F59E0B"/>
-                </a:solidFill>
-                <a:latin typeface="Segoe UI"/>
-              </a:defRPr>
-            </a:pPr>
-            <a:r>
-              <a:t>🌟 Key Strategic Takeaways</a:t>
-            </a:r>
-          </a:p>
-          <a:p>
-            <a:pPr>
-              <a:spcAft>
-                <a:spcPts val="600"/>
-              </a:spcAft>
-              <a:defRPr sz="1100">
-                <a:solidFill>
-                  <a:srgbClr val="CBD5E1"/>
-                </a:solidFill>
-                <a:latin typeface="Segoe UI"/>
-              </a:defRPr>
-            </a:pPr>
-            <a:r>
-              <a:t>• High-Density Fleet Recording: 100+ workstations recorded with &lt; 1% CPU overhead.</a:t>
-            </a:r>
-          </a:p>
-          <a:p>
-            <a:pPr>
-              <a:spcAft>
-                <a:spcPts val="600"/>
-              </a:spcAft>
-              <a:defRPr sz="1100">
-                <a:solidFill>
-                  <a:srgbClr val="CBD5E1"/>
-                </a:solidFill>
-                <a:latin typeface="Segoe UI"/>
-              </a:defRPr>
-            </a:pPr>
-            <a:r>
-              <a:t>• Synchronized Multi-Screen NLE: Reconstruct operational events with millisecond precision.</a:t>
-            </a:r>
-          </a:p>
-          <a:p>
-            <a:pPr>
-              <a:spcAft>
-                <a:spcPts val="600"/>
-              </a:spcAft>
-              <a:defRPr sz="1100">
-                <a:solidFill>
-                  <a:srgbClr val="CBD5E1"/>
-                </a:solidFill>
-                <a:latin typeface="Segoe UI"/>
-              </a:defRPr>
-            </a:pPr>
-            <a:r>
-              <a:t>• 100% Air-Gapped Security: Complete data sovereignty with zero cloud risk.</a:t>
-            </a:r>
-          </a:p>
-          <a:p>
-            <a:pPr>
-              <a:spcAft>
-                <a:spcPts val="600"/>
-              </a:spcAft>
-              <a:defRPr sz="1100">
-                <a:solidFill>
-                  <a:srgbClr val="CBD5E1"/>
-                </a:solidFill>
-                <a:latin typeface="Segoe UI"/>
-              </a:defRPr>
-            </a:pPr>
-            <a:r>
-              <a:t>• Continuous Resilience: Offline buffering, dual storage targets, and self-healing architecture.</a:t>
-            </a:r>
-          </a:p>
-          <a:p>
-            <a:pPr>
-              <a:spcAft>
-                <a:spcPts val="600"/>
-              </a:spcAft>
-              <a:defRPr sz="1100">
-                <a:solidFill>
-                  <a:srgbClr val="CBD5E1"/>
-                </a:solidFill>
-                <a:latin typeface="Segoe UI"/>
-              </a:defRPr>
-            </a:pPr>
-            <a:r>
-              <a:t>• Immediate Value: Drastic reduction in incident investigation time and guaranteed compliance.</a:t>
-            </a:r>
-          </a:p>
-        </p:txBody>
-      </p:sp>
-      <p:sp>
-        <p:nvSpPr>
-          <p:cNvPr id="8" name="Rounded Rectangle 7"/>
-          <p:cNvSpPr/>
-          <p:nvPr/>
-        </p:nvSpPr>
-        <p:spPr>
-          <a:xfrm>
-            <a:off x="6217920" y="1920240"/>
-            <a:ext cx="5212080" cy="4297680"/>
-          </a:xfrm>
-          <a:prstGeom prst="roundRect">
-            <a:avLst/>
-          </a:prstGeom>
-          <a:solidFill>
-            <a:srgbClr val="1E293B"/>
-          </a:solidFill>
-          <a:ln w="19050">
-            <a:solidFill>
-              <a:srgbClr val="38BDF8"/>
-            </a:solidFill>
-          </a:ln>
-        </p:spPr>
-        <p:style>
-          <a:lnRef idx="1">
-            <a:schemeClr val="accent1"/>
-          </a:lnRef>
-          <a:fillRef idx="3">
-            <a:schemeClr val="accent1"/>
-          </a:fillRef>
-          <a:effectRef idx="2">
-            <a:schemeClr val="accent1"/>
-          </a:effectRef>
-          <a:fontRef idx="minor">
-            <a:schemeClr val="lt1"/>
-          </a:fontRef>
-        </p:style>
-        <p:txBody>
-          <a:bodyPr rtlCol="0" anchor="ctr"/>
-          <a:lstStyle/>
-          <a:p>
-            <a:pPr algn="ctr"/>
-          </a:p>
-        </p:txBody>
-      </p:sp>
-      <p:sp>
-        <p:nvSpPr>
-          <p:cNvPr id="9" name="TextBox 8"/>
-          <p:cNvSpPr txBox="1"/>
-          <p:nvPr/>
-        </p:nvSpPr>
-        <p:spPr>
-          <a:xfrm>
-            <a:off x="6400800" y="2103120"/>
-            <a:ext cx="4846320" cy="3931920"/>
-          </a:xfrm>
-          <a:prstGeom prst="rect">
-            <a:avLst/>
-          </a:prstGeom>
-          <a:noFill/>
-        </p:spPr>
-        <p:txBody>
-          <a:bodyPr wrap="square">
-            <a:spAutoFit/>
-          </a:bodyPr>
-          <a:lstStyle/>
-          <a:p>
-            <a:pPr>
-              <a:spcAft>
-                <a:spcPts val="800"/>
-              </a:spcAft>
-              <a:defRPr sz="1400" b="1">
-                <a:solidFill>
-                  <a:srgbClr val="38BDF8"/>
-                </a:solidFill>
-                <a:latin typeface="Segoe UI"/>
-              </a:defRPr>
-            </a:pPr>
-            <a:r>
-              <a:t>🚀 Deployment Roadmap</a:t>
-            </a:r>
-          </a:p>
-          <a:p>
-            <a:pPr>
-              <a:spcAft>
-                <a:spcPts val="600"/>
-              </a:spcAft>
-              <a:defRPr sz="1100">
-                <a:solidFill>
-                  <a:srgbClr val="CBD5E1"/>
-                </a:solidFill>
-                <a:latin typeface="Segoe UI"/>
-              </a:defRPr>
-            </a:pPr>
-            <a:r>
-              <a:t>• Phase 1: Pilot Cell (10–15 Stations) - Verify workstation performance and network throughput in a live operational cell.</a:t>
-            </a:r>
-          </a:p>
-          <a:p>
-            <a:pPr>
-              <a:spcAft>
-                <a:spcPts val="600"/>
-              </a:spcAft>
-              <a:defRPr sz="1100">
-                <a:solidFill>
-                  <a:srgbClr val="CBD5E1"/>
-                </a:solidFill>
-                <a:latin typeface="Segoe UI"/>
-              </a:defRPr>
-            </a:pPr>
-            <a:r>
-              <a:t>• Phase 2: Fleet Distribution - Automated silent deployment across all facility consoles via central IT tools.</a:t>
-            </a:r>
-          </a:p>
-          <a:p>
-            <a:pPr>
-              <a:spcAft>
-                <a:spcPts val="600"/>
-              </a:spcAft>
-              <a:defRPr sz="1100">
-                <a:solidFill>
-                  <a:srgbClr val="CBD5E1"/>
-                </a:solidFill>
-                <a:latin typeface="Segoe UI"/>
-              </a:defRPr>
-            </a:pPr>
-            <a:r>
-              <a:t>• Phase 3: Operational Integration - Connect with enterprise Active Directory groups and storage retention policies.</a:t>
-            </a:r>
-          </a:p>
-          <a:p>
-            <a:pPr>
-              <a:spcAft>
-                <a:spcPts val="600"/>
-              </a:spcAft>
-              <a:defRPr sz="1100">
-                <a:solidFill>
-                  <a:srgbClr val="CBD5E1"/>
-                </a:solidFill>
-                <a:latin typeface="Segoe UI"/>
-              </a:defRPr>
-            </a:pPr>
-            <a:r>
-              <a:t>• Status: Software is production-ready for immediate enterprise pilot.</a:t>
+              <a:t>🚀 Proposed Fleet Rollout Stages</a:t>
+            </a:r>
+          </a:p>
+          <a:p>
+            <a:pPr>
+              <a:spcAft>
+                <a:spcPts val="600"/>
+              </a:spcAft>
+              <a:defRPr sz="1100">
+                <a:solidFill>
+                  <a:srgbClr val="CBD5E1"/>
+                </a:solidFill>
+                <a:latin typeface="Segoe UI"/>
+              </a:defRPr>
+            </a:pPr>
+            <a:r>
+              <a:t>• Stage 1: Operational Pilot (Immediate) - Deploy to 15 key consoles in an operational cell to validate live tracking.</a:t>
+            </a:r>
+          </a:p>
+          <a:p>
+            <a:pPr>
+              <a:spcAft>
+                <a:spcPts val="600"/>
+              </a:spcAft>
+              <a:defRPr sz="1100">
+                <a:solidFill>
+                  <a:srgbClr val="CBD5E1"/>
+                </a:solidFill>
+                <a:latin typeface="Segoe UI"/>
+              </a:defRPr>
+            </a:pPr>
+            <a:r>
+              <a:t>• Stage 2: Enterprise Fleet Distribution - Automated silent deployment across 70–100+ workstations via central IT tools.</a:t>
+            </a:r>
+          </a:p>
+          <a:p>
+            <a:pPr>
+              <a:spcAft>
+                <a:spcPts val="600"/>
+              </a:spcAft>
+              <a:defRPr sz="1100">
+                <a:solidFill>
+                  <a:srgbClr val="CBD5E1"/>
+                </a:solidFill>
+                <a:latin typeface="Segoe UI"/>
+              </a:defRPr>
+            </a:pPr>
+            <a:r>
+              <a:t>• Stage 3: Full Governance Integration - Connect with enterprise Active Directory groups and storage retention policies.</a:t>
+            </a:r>
+          </a:p>
+          <a:p>
+            <a:pPr>
+              <a:spcAft>
+                <a:spcPts val="600"/>
+              </a:spcAft>
+              <a:defRPr sz="1100">
+                <a:solidFill>
+                  <a:srgbClr val="CBD5E1"/>
+                </a:solidFill>
+                <a:latin typeface="Segoe UI"/>
+              </a:defRPr>
+            </a:pPr>
+            <a:r>
+              <a:t>• Status: System is fully tested, certified, and ready for immediate deployment.</a:t>
             </a:r>
           </a:p>
         </p:txBody>
@@ -6154,7 +5668,7 @@
             <a:avLst/>
           </a:prstGeom>
           <a:solidFill>
-            <a:srgbClr val="0A1128"/>
+            <a:srgbClr val="070A10"/>
           </a:solidFill>
           <a:ln>
             <a:noFill/>
@@ -6213,7 +5727,7 @@
               </a:defRPr>
             </a:pPr>
             <a:r>
-              <a:t>OPERATIONAL NEED</a:t>
+              <a:t>OPERATIONAL REALITY</a:t>
             </a:r>
           </a:p>
         </p:txBody>
@@ -6249,7 +5763,7 @@
               </a:defRPr>
             </a:pPr>
             <a:r>
-              <a:t>The Operational Challenge in Mission-Critical Facilities</a:t>
+              <a:t>Why Commercial &amp; Open-Source Tools Fail in Operations</a:t>
             </a:r>
           </a:p>
         </p:txBody>
@@ -6285,7 +5799,7 @@
               </a:defRPr>
             </a:pPr>
             <a:r>
-              <a:t>Why conventional commercial screen recording and meeting tools cannot meet enterprise defense requirements.</a:t>
+              <a:t>Why conventional tools like Zoom, Teams, OBS, Camtasia, and standard VMS cannot meet defense standards.</a:t>
             </a:r>
           </a:p>
         </p:txBody>
@@ -6305,11 +5819,11 @@
             <a:avLst/>
           </a:prstGeom>
           <a:solidFill>
-            <a:srgbClr val="1E293B"/>
+            <a:srgbClr val="151E2E"/>
           </a:solidFill>
           <a:ln w="19050">
             <a:solidFill>
-              <a:srgbClr val="334155"/>
+              <a:srgbClr val="243248"/>
             </a:solidFill>
           </a:ln>
         </p:spPr>
@@ -6369,55 +5883,71 @@
               </a:defRPr>
             </a:pPr>
             <a:r>
-              <a:t>❌ Heavy Workstation Load</a:t>
-            </a:r>
-          </a:p>
-          <a:p>
-            <a:pPr>
-              <a:spcAft>
-                <a:spcPts val="600"/>
-              </a:spcAft>
-              <a:defRPr sz="1100">
-                <a:solidFill>
-                  <a:srgbClr val="CBD5E1"/>
-                </a:solidFill>
-                <a:latin typeface="Segoe UI"/>
-              </a:defRPr>
-            </a:pPr>
-            <a:r>
-              <a:t>• Commercial tools consume 25% to 50% of the CPU.</a:t>
-            </a:r>
-          </a:p>
-          <a:p>
-            <a:pPr>
-              <a:spcAft>
-                <a:spcPts val="600"/>
-              </a:spcAft>
-              <a:defRPr sz="1100">
-                <a:solidFill>
-                  <a:srgbClr val="CBD5E1"/>
-                </a:solidFill>
-                <a:latin typeface="Segoe UI"/>
-              </a:defRPr>
-            </a:pPr>
-            <a:r>
-              <a:t>• Degrades workstation responsiveness during intense operational missions.</a:t>
-            </a:r>
-          </a:p>
-          <a:p>
-            <a:pPr>
-              <a:spcAft>
-                <a:spcPts val="600"/>
-              </a:spcAft>
-              <a:defRPr sz="1100">
-                <a:solidFill>
-                  <a:srgbClr val="CBD5E1"/>
-                </a:solidFill>
-                <a:latin typeface="Segoe UI"/>
-              </a:defRPr>
-            </a:pPr>
-            <a:r>
-              <a:t>• Causes mouse lag, frozen applications, and operator frustration.</a:t>
+              <a:t>❌ Crippling CPU Overhead</a:t>
+            </a:r>
+          </a:p>
+          <a:p>
+            <a:pPr>
+              <a:spcAft>
+                <a:spcPts val="600"/>
+              </a:spcAft>
+              <a:defRPr sz="1100">
+                <a:solidFill>
+                  <a:srgbClr val="CBD5E1"/>
+                </a:solidFill>
+                <a:latin typeface="Segoe UI"/>
+              </a:defRPr>
+            </a:pPr>
+            <a:r>
+              <a:t>• Standard software recorders consume 25% to 50% CPU.</a:t>
+            </a:r>
+          </a:p>
+          <a:p>
+            <a:pPr>
+              <a:spcAft>
+                <a:spcPts val="600"/>
+              </a:spcAft>
+              <a:defRPr sz="1100">
+                <a:solidFill>
+                  <a:srgbClr val="CBD5E1"/>
+                </a:solidFill>
+                <a:latin typeface="Segoe UI"/>
+              </a:defRPr>
+            </a:pPr>
+            <a:r>
+              <a:t>• Workstations stutter during critical operational tasks.</a:t>
+            </a:r>
+          </a:p>
+          <a:p>
+            <a:pPr>
+              <a:spcAft>
+                <a:spcPts val="600"/>
+              </a:spcAft>
+              <a:defRPr sz="1100">
+                <a:solidFill>
+                  <a:srgbClr val="CBD5E1"/>
+                </a:solidFill>
+                <a:latin typeface="Segoe UI"/>
+              </a:defRPr>
+            </a:pPr>
+            <a:r>
+              <a:t>• Mouse lag frustrates operators during high-stress missions.</a:t>
+            </a:r>
+          </a:p>
+          <a:p>
+            <a:pPr>
+              <a:spcAft>
+                <a:spcPts val="600"/>
+              </a:spcAft>
+              <a:defRPr sz="1100">
+                <a:solidFill>
+                  <a:srgbClr val="CBD5E1"/>
+                </a:solidFill>
+                <a:latin typeface="Segoe UI"/>
+              </a:defRPr>
+            </a:pPr>
+            <a:r>
+              <a:t>• High risk of workstation crash during tactical events.</a:t>
             </a:r>
           </a:p>
         </p:txBody>
@@ -6437,11 +5967,11 @@
             <a:avLst/>
           </a:prstGeom>
           <a:solidFill>
-            <a:srgbClr val="1E293B"/>
+            <a:srgbClr val="151E2E"/>
           </a:solidFill>
           <a:ln w="19050">
             <a:solidFill>
-              <a:srgbClr val="334155"/>
+              <a:srgbClr val="243248"/>
             </a:solidFill>
           </a:ln>
         </p:spPr>
@@ -6517,39 +6047,55 @@
               </a:defRPr>
             </a:pPr>
             <a:r>
-              <a:t>• SaaS tools (Zoom, Teams, Cloud Recorders) require constant external internet connectivity.</a:t>
-            </a:r>
-          </a:p>
-          <a:p>
-            <a:pPr>
-              <a:spcAft>
-                <a:spcPts val="600"/>
-              </a:spcAft>
-              <a:defRPr sz="1100">
-                <a:solidFill>
-                  <a:srgbClr val="CBD5E1"/>
-                </a:solidFill>
-                <a:latin typeface="Segoe UI"/>
-              </a:defRPr>
-            </a:pPr>
-            <a:r>
-              <a:t>• Transmits sensitive operational data to external commercial servers.</a:t>
-            </a:r>
-          </a:p>
-          <a:p>
-            <a:pPr>
-              <a:spcAft>
-                <a:spcPts val="600"/>
-              </a:spcAft>
-              <a:defRPr sz="1100">
-                <a:solidFill>
-                  <a:srgbClr val="CBD5E1"/>
-                </a:solidFill>
-                <a:latin typeface="Segoe UI"/>
-              </a:defRPr>
-            </a:pPr>
-            <a:r>
-              <a:t>• Strictly prohibited in air-gapped and high-security defense environments.</a:t>
+              <a:t>• SaaS tools (Zoom, Teams, Cloud Recorders) demand internet.</a:t>
+            </a:r>
+          </a:p>
+          <a:p>
+            <a:pPr>
+              <a:spcAft>
+                <a:spcPts val="600"/>
+              </a:spcAft>
+              <a:defRPr sz="1100">
+                <a:solidFill>
+                  <a:srgbClr val="CBD5E1"/>
+                </a:solidFill>
+                <a:latin typeface="Segoe UI"/>
+              </a:defRPr>
+            </a:pPr>
+            <a:r>
+              <a:t>• Transmits sensitive operational data to external servers.</a:t>
+            </a:r>
+          </a:p>
+          <a:p>
+            <a:pPr>
+              <a:spcAft>
+                <a:spcPts val="600"/>
+              </a:spcAft>
+              <a:defRPr sz="1100">
+                <a:solidFill>
+                  <a:srgbClr val="CBD5E1"/>
+                </a:solidFill>
+                <a:latin typeface="Segoe UI"/>
+              </a:defRPr>
+            </a:pPr>
+            <a:r>
+              <a:t>• Strictly prohibited in air-gapped / classified enclaves.</a:t>
+            </a:r>
+          </a:p>
+          <a:p>
+            <a:pPr>
+              <a:spcAft>
+                <a:spcPts val="600"/>
+              </a:spcAft>
+              <a:defRPr sz="1100">
+                <a:solidFill>
+                  <a:srgbClr val="CBD5E1"/>
+                </a:solidFill>
+                <a:latin typeface="Segoe UI"/>
+              </a:defRPr>
+            </a:pPr>
+            <a:r>
+              <a:t>• Vulnerable to remote subscription license lockouts.</a:t>
             </a:r>
           </a:p>
         </p:txBody>
@@ -6569,11 +6115,11 @@
             <a:avLst/>
           </a:prstGeom>
           <a:solidFill>
-            <a:srgbClr val="1E293B"/>
+            <a:srgbClr val="151E2E"/>
           </a:solidFill>
           <a:ln w="19050">
             <a:solidFill>
-              <a:srgbClr val="334155"/>
+              <a:srgbClr val="243248"/>
             </a:solidFill>
           </a:ln>
         </p:spPr>
@@ -6633,55 +6179,71 @@
               </a:defRPr>
             </a:pPr>
             <a:r>
-              <a:t>❌ Desynchronized Investigations</a:t>
-            </a:r>
-          </a:p>
-          <a:p>
-            <a:pPr>
-              <a:spcAft>
-                <a:spcPts val="600"/>
-              </a:spcAft>
-              <a:defRPr sz="1100">
-                <a:solidFill>
-                  <a:srgbClr val="CBD5E1"/>
-                </a:solidFill>
-                <a:latin typeface="Segoe UI"/>
-              </a:defRPr>
-            </a:pPr>
-            <a:r>
-              <a:t>• Reviewing separate, unaligned video files makes it impossible to reconstruct team actions.</a:t>
-            </a:r>
-          </a:p>
-          <a:p>
-            <a:pPr>
-              <a:spcAft>
-                <a:spcPts val="600"/>
-              </a:spcAft>
-              <a:defRPr sz="1100">
-                <a:solidFill>
-                  <a:srgbClr val="CBD5E1"/>
-                </a:solidFill>
-                <a:latin typeface="Segoe UI"/>
-              </a:defRPr>
-            </a:pPr>
-            <a:r>
-              <a:t>• Reboots and power cycles break video alignment.</a:t>
-            </a:r>
-          </a:p>
-          <a:p>
-            <a:pPr>
-              <a:spcAft>
-                <a:spcPts val="600"/>
-              </a:spcAft>
-              <a:defRPr sz="1100">
-                <a:solidFill>
-                  <a:srgbClr val="CBD5E1"/>
-                </a:solidFill>
-                <a:latin typeface="Segoe UI"/>
-              </a:defRPr>
-            </a:pPr>
-            <a:r>
-              <a:t>• Debriefing complex incidents requires days of manual video editing.</a:t>
+              <a:t>❌ Broken Temporal Sync</a:t>
+            </a:r>
+          </a:p>
+          <a:p>
+            <a:pPr>
+              <a:spcAft>
+                <a:spcPts val="600"/>
+              </a:spcAft>
+              <a:defRPr sz="1100">
+                <a:solidFill>
+                  <a:srgbClr val="CBD5E1"/>
+                </a:solidFill>
+                <a:latin typeface="Segoe UI"/>
+              </a:defRPr>
+            </a:pPr>
+            <a:r>
+              <a:t>• Standard recorders generate unaligned, drifting clips.</a:t>
+            </a:r>
+          </a:p>
+          <a:p>
+            <a:pPr>
+              <a:spcAft>
+                <a:spcPts val="600"/>
+              </a:spcAft>
+              <a:defRPr sz="1100">
+                <a:solidFill>
+                  <a:srgbClr val="CBD5E1"/>
+                </a:solidFill>
+                <a:latin typeface="Segoe UI"/>
+              </a:defRPr>
+            </a:pPr>
+            <a:r>
+              <a:t>• When a station reboots, traditional players collapse the timeline.</a:t>
+            </a:r>
+          </a:p>
+          <a:p>
+            <a:pPr>
+              <a:spcAft>
+                <a:spcPts val="600"/>
+              </a:spcAft>
+              <a:defRPr sz="1100">
+                <a:solidFill>
+                  <a:srgbClr val="CBD5E1"/>
+                </a:solidFill>
+                <a:latin typeface="Segoe UI"/>
+              </a:defRPr>
+            </a:pPr>
+            <a:r>
+              <a:t>• Zero cross-station timeline correlation.</a:t>
+            </a:r>
+          </a:p>
+          <a:p>
+            <a:pPr>
+              <a:spcAft>
+                <a:spcPts val="600"/>
+              </a:spcAft>
+              <a:defRPr sz="1100">
+                <a:solidFill>
+                  <a:srgbClr val="CBD5E1"/>
+                </a:solidFill>
+                <a:latin typeface="Segoe UI"/>
+              </a:defRPr>
+            </a:pPr>
+            <a:r>
+              <a:t>• Recordings are legally inadmissible in formal debriefs.</a:t>
             </a:r>
           </a:p>
         </p:txBody>
@@ -6719,7 +6281,7 @@
             <a:avLst/>
           </a:prstGeom>
           <a:solidFill>
-            <a:srgbClr val="0A1128"/>
+            <a:srgbClr val="070A10"/>
           </a:solidFill>
           <a:ln>
             <a:noFill/>
@@ -6772,13 +6334,13 @@
             <a:pPr>
               <a:defRPr sz="1000" b="1">
                 <a:solidFill>
-                  <a:srgbClr val="F59E0B"/>
+                  <a:srgbClr val="06B6D4"/>
                 </a:solidFill>
                 <a:latin typeface="Arial"/>
               </a:defRPr>
             </a:pPr>
             <a:r>
-              <a:t>SOLUTION ARCHITECTURE</a:t>
+              <a:t>REAL-TIME OPERATIONS</a:t>
             </a:r>
           </a:p>
         </p:txBody>
@@ -6814,7 +6376,7 @@
               </a:defRPr>
             </a:pPr>
             <a:r>
-              <a:t>How the Solution Operates: 3-Tier Blueprint</a:t>
+              <a:t>Sub-Second Live Fleet Command Wall</a:t>
             </a:r>
           </a:p>
         </p:txBody>
@@ -6850,7 +6412,7 @@
               </a:defRPr>
             </a:pPr>
             <a:r>
-              <a:t>Clean architectural separation between endpoints, central hub, and operations consoles.</a:t>
+              <a:t>Glass-to-glass tactical monitoring across 70–100+ stations with zero browser decoder crash.</a:t>
             </a:r>
           </a:p>
         </p:txBody>
@@ -6864,17 +6426,17 @@
         <p:spPr>
           <a:xfrm>
             <a:off x="731520" y="1920240"/>
-            <a:ext cx="3383280" cy="4297680"/>
+            <a:ext cx="5120640" cy="4297680"/>
           </a:xfrm>
           <a:prstGeom prst="roundRect">
             <a:avLst/>
           </a:prstGeom>
           <a:solidFill>
-            <a:srgbClr val="1E293B"/>
+            <a:srgbClr val="151E2E"/>
           </a:solidFill>
           <a:ln w="19050">
             <a:solidFill>
-              <a:srgbClr val="38BDF8"/>
+              <a:srgbClr val="06B6D4"/>
             </a:solidFill>
           </a:ln>
         </p:spPr>
@@ -6909,7 +6471,7 @@
         <p:spPr>
           <a:xfrm>
             <a:off x="914400" y="2103120"/>
-            <a:ext cx="3017520" cy="3931920"/>
+            <a:ext cx="4754880" cy="3931920"/>
           </a:xfrm>
           <a:prstGeom prst="rect">
             <a:avLst/>
@@ -6928,109 +6490,93 @@
               </a:spcAft>
               <a:defRPr sz="1400" b="1">
                 <a:solidFill>
-                  <a:srgbClr val="38BDF8"/>
-                </a:solidFill>
-                <a:latin typeface="Segoe UI"/>
-              </a:defRPr>
-            </a:pPr>
-            <a:r>
-              <a:t>1. Endpoint Workstations</a:t>
-            </a:r>
-          </a:p>
-          <a:p>
-            <a:pPr>
-              <a:spcAft>
-                <a:spcPts val="600"/>
-              </a:spcAft>
-              <a:defRPr sz="1100">
-                <a:solidFill>
-                  <a:srgbClr val="CBD5E1"/>
-                </a:solidFill>
-                <a:latin typeface="Segoe UI"/>
-              </a:defRPr>
-            </a:pPr>
-            <a:r>
-              <a:t>• Continuous background capture agent.</a:t>
-            </a:r>
-          </a:p>
-          <a:p>
-            <a:pPr>
-              <a:spcAft>
-                <a:spcPts val="600"/>
-              </a:spcAft>
-              <a:defRPr sz="1100">
-                <a:solidFill>
-                  <a:srgbClr val="CBD5E1"/>
-                </a:solidFill>
-                <a:latin typeface="Segoe UI"/>
-              </a:defRPr>
-            </a:pPr>
-            <a:r>
-              <a:t>• GPU-accelerated video compression.</a:t>
-            </a:r>
-          </a:p>
-          <a:p>
-            <a:pPr>
-              <a:spcAft>
-                <a:spcPts val="600"/>
-              </a:spcAft>
-              <a:defRPr sz="1100">
-                <a:solidFill>
-                  <a:srgbClr val="CBD5E1"/>
-                </a:solidFill>
-                <a:latin typeface="Segoe UI"/>
-              </a:defRPr>
-            </a:pPr>
-            <a:r>
-              <a:t>• Dual audio capture (mic + speakers).</a:t>
-            </a:r>
-          </a:p>
-          <a:p>
-            <a:pPr>
-              <a:spcAft>
-                <a:spcPts val="600"/>
-              </a:spcAft>
-              <a:defRPr sz="1100">
-                <a:solidFill>
-                  <a:srgbClr val="CBD5E1"/>
-                </a:solidFill>
-                <a:latin typeface="Segoe UI"/>
-              </a:defRPr>
-            </a:pPr>
-            <a:r>
-              <a:t>• Keystroke audit logging.</a:t>
-            </a:r>
-          </a:p>
-          <a:p>
-            <a:pPr>
-              <a:spcAft>
-                <a:spcPts val="600"/>
-              </a:spcAft>
-              <a:defRPr sz="1100">
-                <a:solidFill>
-                  <a:srgbClr val="CBD5E1"/>
-                </a:solidFill>
-                <a:latin typeface="Segoe UI"/>
-              </a:defRPr>
-            </a:pPr>
-            <a:r>
-              <a:t>• Local failover buffer during network cuts.</a:t>
-            </a:r>
-          </a:p>
-          <a:p>
-            <a:pPr>
-              <a:spcAft>
-                <a:spcPts val="600"/>
-              </a:spcAft>
-              <a:defRPr sz="1100">
-                <a:solidFill>
-                  <a:srgbClr val="CBD5E1"/>
-                </a:solidFill>
-                <a:latin typeface="Segoe UI"/>
-              </a:defRPr>
-            </a:pPr>
-            <a:r>
-              <a:t>• Zero operator intervention required.</a:t>
+                  <a:srgbClr val="06B6D4"/>
+                </a:solidFill>
+                <a:latin typeface="Segoe UI"/>
+              </a:defRPr>
+            </a:pPr>
+            <a:r>
+              <a:t>📡 Ultra-Low Latency Streaming</a:t>
+            </a:r>
+          </a:p>
+          <a:p>
+            <a:pPr>
+              <a:spcAft>
+                <a:spcPts val="600"/>
+              </a:spcAft>
+              <a:defRPr sz="1100">
+                <a:solidFill>
+                  <a:srgbClr val="CBD5E1"/>
+                </a:solidFill>
+                <a:latin typeface="Segoe UI"/>
+              </a:defRPr>
+            </a:pPr>
+            <a:r>
+              <a:t>• Sub-Second WebRTC (WHEP) Ingestion: Glass-to-glass latency of 200–300ms over LAN.</a:t>
+            </a:r>
+          </a:p>
+          <a:p>
+            <a:pPr>
+              <a:spcAft>
+                <a:spcPts val="600"/>
+              </a:spcAft>
+              <a:defRPr sz="1100">
+                <a:solidFill>
+                  <a:srgbClr val="CBD5E1"/>
+                </a:solidFill>
+                <a:latin typeface="Segoe UI"/>
+              </a:defRPr>
+            </a:pPr>
+            <a:r>
+              <a:t>• Eliminates multi-second HLS buffering lag during live operational monitoring.</a:t>
+            </a:r>
+          </a:p>
+          <a:p>
+            <a:pPr>
+              <a:spcAft>
+                <a:spcPts val="600"/>
+              </a:spcAft>
+              <a:defRPr sz="1100">
+                <a:solidFill>
+                  <a:srgbClr val="CBD5E1"/>
+                </a:solidFill>
+                <a:latin typeface="Segoe UI"/>
+              </a:defRPr>
+            </a:pPr>
+            <a:r>
+              <a:t>• Crash-Proof Virtualization: Intersection Observer DOM virtualization ensures browser never crashes.</a:t>
+            </a:r>
+          </a:p>
+          <a:p>
+            <a:pPr>
+              <a:spcAft>
+                <a:spcPts val="600"/>
+              </a:spcAft>
+              <a:defRPr sz="1100">
+                <a:solidFill>
+                  <a:srgbClr val="CBD5E1"/>
+                </a:solidFill>
+                <a:latin typeface="Segoe UI"/>
+              </a:defRPr>
+            </a:pPr>
+            <a:r>
+              <a:t>• Exclusive Audio Solo Sink: 1-click audio dock enforces single-station solo listening to prevent feedback.</a:t>
+            </a:r>
+          </a:p>
+          <a:p>
+            <a:pPr>
+              <a:spcAft>
+                <a:spcPts val="600"/>
+              </a:spcAft>
+              <a:defRPr sz="1100">
+                <a:solidFill>
+                  <a:srgbClr val="CBD5E1"/>
+                </a:solidFill>
+                <a:latin typeface="Segoe UI"/>
+              </a:defRPr>
+            </a:pPr>
+            <a:r>
+              <a:t>• Dynamic Hot-Plug: Multi-monitor connect/disconnect adapts smoothly with zero stream interruption.</a:t>
             </a:r>
           </a:p>
         </p:txBody>
@@ -7043,18 +6589,18 @@
         </p:nvSpPr>
         <p:spPr>
           <a:xfrm>
-            <a:off x="4389120" y="1920240"/>
-            <a:ext cx="3383280" cy="4297680"/>
+            <a:off x="6217920" y="1920240"/>
+            <a:ext cx="5212080" cy="4297680"/>
           </a:xfrm>
           <a:prstGeom prst="roundRect">
             <a:avLst/>
           </a:prstGeom>
           <a:solidFill>
-            <a:srgbClr val="1E293B"/>
+            <a:srgbClr val="151E2E"/>
           </a:solidFill>
           <a:ln w="19050">
             <a:solidFill>
-              <a:srgbClr val="F59E0B"/>
+              <a:srgbClr val="243248"/>
             </a:solidFill>
           </a:ln>
         </p:spPr>
@@ -7088,8 +6634,8 @@
         </p:nvSpPr>
         <p:spPr>
           <a:xfrm>
-            <a:off x="4572000" y="2103120"/>
-            <a:ext cx="3017520" cy="3931920"/>
+            <a:off x="6400800" y="2103120"/>
+            <a:ext cx="4846320" cy="3931920"/>
           </a:xfrm>
           <a:prstGeom prst="rect">
             <a:avLst/>
@@ -7108,289 +6654,77 @@
               </a:spcAft>
               <a:defRPr sz="1400" b="1">
                 <a:solidFill>
-                  <a:srgbClr val="F59E0B"/>
-                </a:solidFill>
-                <a:latin typeface="Segoe UI"/>
-              </a:defRPr>
-            </a:pPr>
-            <a:r>
-              <a:t>2. Central C2 &amp; Storage</a:t>
-            </a:r>
-          </a:p>
-          <a:p>
-            <a:pPr>
-              <a:spcAft>
-                <a:spcPts val="600"/>
-              </a:spcAft>
-              <a:defRPr sz="1100">
-                <a:solidFill>
-                  <a:srgbClr val="CBD5E1"/>
-                </a:solidFill>
-                <a:latin typeface="Segoe UI"/>
-              </a:defRPr>
-            </a:pPr>
-            <a:r>
-              <a:t>• High-density video ingestion hub.</a:t>
-            </a:r>
-          </a:p>
-          <a:p>
-            <a:pPr>
-              <a:spcAft>
-                <a:spcPts val="600"/>
-              </a:spcAft>
-              <a:defRPr sz="1100">
-                <a:solidFill>
-                  <a:srgbClr val="CBD5E1"/>
-                </a:solidFill>
-                <a:latin typeface="Segoe UI"/>
-              </a:defRPr>
-            </a:pPr>
-            <a:r>
-              <a:t>• Deterministic 5-minute chunking.</a:t>
-            </a:r>
-          </a:p>
-          <a:p>
-            <a:pPr>
-              <a:spcAft>
-                <a:spcPts val="600"/>
-              </a:spcAft>
-              <a:defRPr sz="1100">
-                <a:solidFill>
-                  <a:srgbClr val="CBD5E1"/>
-                </a:solidFill>
-                <a:latin typeface="Segoe UI"/>
-              </a:defRPr>
-            </a:pPr>
-            <a:r>
-              <a:t>• Primary NetApp storage integration.</a:t>
-            </a:r>
-          </a:p>
-          <a:p>
-            <a:pPr>
-              <a:spcAft>
-                <a:spcPts val="600"/>
-              </a:spcAft>
-              <a:defRPr sz="1100">
-                <a:solidFill>
-                  <a:srgbClr val="CBD5E1"/>
-                </a:solidFill>
-                <a:latin typeface="Segoe UI"/>
-              </a:defRPr>
-            </a:pPr>
-            <a:r>
-              <a:t>• Automated 3-second local failover.</a:t>
-            </a:r>
-          </a:p>
-          <a:p>
-            <a:pPr>
-              <a:spcAft>
-                <a:spcPts val="600"/>
-              </a:spcAft>
-              <a:defRPr sz="1100">
-                <a:solidFill>
-                  <a:srgbClr val="CBD5E1"/>
-                </a:solidFill>
-                <a:latin typeface="Segoe UI"/>
-              </a:defRPr>
-            </a:pPr>
-            <a:r>
-              <a:t>• Self-healing background workers.</a:t>
-            </a:r>
-          </a:p>
-          <a:p>
-            <a:pPr>
-              <a:spcAft>
-                <a:spcPts val="600"/>
-              </a:spcAft>
-              <a:defRPr sz="1100">
-                <a:solidFill>
-                  <a:srgbClr val="CBD5E1"/>
-                </a:solidFill>
-                <a:latin typeface="Segoe UI"/>
-              </a:defRPr>
-            </a:pPr>
-            <a:r>
-              <a:t>• Fast catalog search database.</a:t>
-            </a:r>
-          </a:p>
-        </p:txBody>
-      </p:sp>
-      <p:sp>
-        <p:nvSpPr>
-          <p:cNvPr id="10" name="Rounded Rectangle 9"/>
-          <p:cNvSpPr/>
-          <p:nvPr/>
-        </p:nvSpPr>
-        <p:spPr>
-          <a:xfrm>
-            <a:off x="8046720" y="1920240"/>
-            <a:ext cx="3383280" cy="4297680"/>
-          </a:xfrm>
-          <a:prstGeom prst="roundRect">
-            <a:avLst/>
-          </a:prstGeom>
-          <a:solidFill>
-            <a:srgbClr val="1E293B"/>
-          </a:solidFill>
-          <a:ln w="19050">
-            <a:solidFill>
-              <a:srgbClr val="10B981"/>
-            </a:solidFill>
-          </a:ln>
-        </p:spPr>
-        <p:style>
-          <a:lnRef idx="1">
-            <a:schemeClr val="accent1"/>
-          </a:lnRef>
-          <a:fillRef idx="3">
-            <a:schemeClr val="accent1"/>
-          </a:fillRef>
-          <a:effectRef idx="2">
-            <a:schemeClr val="accent1"/>
-          </a:effectRef>
-          <a:fontRef idx="minor">
-            <a:schemeClr val="lt1"/>
-          </a:fontRef>
-        </p:style>
-        <p:txBody>
-          <a:bodyPr rtlCol="0" anchor="ctr"/>
-          <a:lstStyle/>
-          <a:p>
-            <a:pPr algn="ctr"/>
-          </a:p>
-        </p:txBody>
-      </p:sp>
-      <p:sp>
-        <p:nvSpPr>
-          <p:cNvPr id="11" name="TextBox 10"/>
-          <p:cNvSpPr txBox="1"/>
-          <p:nvPr/>
-        </p:nvSpPr>
-        <p:spPr>
-          <a:xfrm>
-            <a:off x="8229600" y="2103120"/>
-            <a:ext cx="3017520" cy="3931920"/>
-          </a:xfrm>
-          <a:prstGeom prst="rect">
-            <a:avLst/>
-          </a:prstGeom>
-          <a:noFill/>
-        </p:spPr>
-        <p:txBody>
-          <a:bodyPr wrap="square">
-            <a:spAutoFit/>
-          </a:bodyPr>
-          <a:lstStyle/>
-          <a:p>
-            <a:pPr>
-              <a:spcAft>
-                <a:spcPts val="800"/>
-              </a:spcAft>
-              <a:defRPr sz="1400" b="1">
-                <a:solidFill>
-                  <a:srgbClr val="10B981"/>
-                </a:solidFill>
-                <a:latin typeface="Segoe UI"/>
-              </a:defRPr>
-            </a:pPr>
-            <a:r>
-              <a:t>3. Operations Command</a:t>
-            </a:r>
-          </a:p>
-          <a:p>
-            <a:pPr>
-              <a:spcAft>
-                <a:spcPts val="600"/>
-              </a:spcAft>
-              <a:defRPr sz="1100">
-                <a:solidFill>
-                  <a:srgbClr val="CBD5E1"/>
-                </a:solidFill>
-                <a:latin typeface="Segoe UI"/>
-              </a:defRPr>
-            </a:pPr>
-            <a:r>
-              <a:t>• Browser-based command center.</a:t>
-            </a:r>
-          </a:p>
-          <a:p>
-            <a:pPr>
-              <a:spcAft>
-                <a:spcPts val="600"/>
-              </a:spcAft>
-              <a:defRPr sz="1100">
-                <a:solidFill>
-                  <a:srgbClr val="CBD5E1"/>
-                </a:solidFill>
-                <a:latin typeface="Segoe UI"/>
-              </a:defRPr>
-            </a:pPr>
-            <a:r>
-              <a:t>• Sub-second live fleet monitoring wall.</a:t>
-            </a:r>
-          </a:p>
-          <a:p>
-            <a:pPr>
-              <a:spcAft>
-                <a:spcPts val="600"/>
-              </a:spcAft>
-              <a:defRPr sz="1100">
-                <a:solidFill>
-                  <a:srgbClr val="CBD5E1"/>
-                </a:solidFill>
-                <a:latin typeface="Segoe UI"/>
-              </a:defRPr>
-            </a:pPr>
-            <a:r>
-              <a:t>• Synchronized multi-station replay.</a:t>
-            </a:r>
-          </a:p>
-          <a:p>
-            <a:pPr>
-              <a:spcAft>
-                <a:spcPts val="600"/>
-              </a:spcAft>
-              <a:defRPr sz="1100">
-                <a:solidFill>
-                  <a:srgbClr val="CBD5E1"/>
-                </a:solidFill>
-                <a:latin typeface="Segoe UI"/>
-              </a:defRPr>
-            </a:pPr>
-            <a:r>
-              <a:t>• Forensic video export with subtitles.</a:t>
-            </a:r>
-          </a:p>
-          <a:p>
-            <a:pPr>
-              <a:spcAft>
-                <a:spcPts val="600"/>
-              </a:spcAft>
-              <a:defRPr sz="1100">
-                <a:solidFill>
-                  <a:srgbClr val="CBD5E1"/>
-                </a:solidFill>
-                <a:latin typeface="Segoe UI"/>
-              </a:defRPr>
-            </a:pPr>
-            <a:r>
-              <a:t>• Active Directory role-based access.</a:t>
-            </a:r>
-          </a:p>
-          <a:p>
-            <a:pPr>
-              <a:spcAft>
-                <a:spcPts val="600"/>
-              </a:spcAft>
-              <a:defRPr sz="1100">
-                <a:solidFill>
-                  <a:srgbClr val="CBD5E1"/>
-                </a:solidFill>
-                <a:latin typeface="Segoe UI"/>
-              </a:defRPr>
-            </a:pPr>
-            <a:r>
-              <a:t>• Instant incident debriefing.</a:t>
+                  <a:srgbClr val="FFFFFF"/>
+                </a:solidFill>
+                <a:latin typeface="Segoe UI"/>
+              </a:defRPr>
+            </a:pPr>
+            <a:r>
+              <a:t>🖥️ Command Center Situational Awareness</a:t>
+            </a:r>
+          </a:p>
+          <a:p>
+            <a:pPr>
+              <a:spcAft>
+                <a:spcPts val="600"/>
+              </a:spcAft>
+              <a:defRPr sz="1100">
+                <a:solidFill>
+                  <a:srgbClr val="CBD5E1"/>
+                </a:solidFill>
+                <a:latin typeface="Segoe UI"/>
+              </a:defRPr>
+            </a:pPr>
+            <a:r>
+              <a:t>• High-Density Fleet Wall: Monitor 16 to 100 stations on a single massive tactical display.</a:t>
+            </a:r>
+          </a:p>
+          <a:p>
+            <a:pPr>
+              <a:spcAft>
+                <a:spcPts val="600"/>
+              </a:spcAft>
+              <a:defRPr sz="1100">
+                <a:solidFill>
+                  <a:srgbClr val="CBD5E1"/>
+                </a:solidFill>
+                <a:latin typeface="Segoe UI"/>
+              </a:defRPr>
+            </a:pPr>
+            <a:r>
+              <a:t>• Custom Operational Rooms: Organize consoles into mission cells, control rooms, or shift groups.</a:t>
+            </a:r>
+          </a:p>
+          <a:p>
+            <a:pPr>
+              <a:spcAft>
+                <a:spcPts val="600"/>
+              </a:spcAft>
+              <a:defRPr sz="1100">
+                <a:solidFill>
+                  <a:srgbClr val="CBD5E1"/>
+                </a:solidFill>
+                <a:latin typeface="Segoe UI"/>
+              </a:defRPr>
+            </a:pPr>
+            <a:r>
+              <a:t>• Real-Time Health Telemetry: Continuous monitoring of FPS, audio presence, bitrates, and hardware status.</a:t>
+            </a:r>
+          </a:p>
+          <a:p>
+            <a:pPr>
+              <a:spcAft>
+                <a:spcPts val="600"/>
+              </a:spcAft>
+              <a:defRPr sz="1100">
+                <a:solidFill>
+                  <a:srgbClr val="CBD5E1"/>
+                </a:solidFill>
+                <a:latin typeface="Segoe UI"/>
+              </a:defRPr>
+            </a:pPr>
+            <a:r>
+              <a:t>• Instant Full-Screen Inspection: 1-click zoom into any station with interactive display minimap navigation.</a:t>
             </a:r>
           </a:p>
         </p:txBody>
@@ -7428,7 +6762,7 @@
             <a:avLst/>
           </a:prstGeom>
           <a:solidFill>
-            <a:srgbClr val="0A1128"/>
+            <a:srgbClr val="070A10"/>
           </a:solidFill>
           <a:ln>
             <a:noFill/>
@@ -7481,13 +6815,13 @@
             <a:pPr>
               <a:defRPr sz="1000" b="1">
                 <a:solidFill>
-                  <a:srgbClr val="F59E0B"/>
+                  <a:srgbClr val="10B981"/>
                 </a:solidFill>
                 <a:latin typeface="Arial"/>
               </a:defRPr>
             </a:pPr>
             <a:r>
-              <a:t>WORKSTATION INTEGRITY</a:t>
+              <a:t>UNIQUE DIFFERENTIATOR #1</a:t>
             </a:r>
           </a:p>
         </p:txBody>
@@ -7523,7 +6857,7 @@
               </a:defRPr>
             </a:pPr>
             <a:r>
-              <a:t>Zero Workstation Impact: Hardware-Accelerated Performance</a:t>
+              <a:t>Auto-Director: Multi-Screen Intelligent Focal Routing</a:t>
             </a:r>
           </a:p>
         </p:txBody>
@@ -7559,7 +6893,7 @@
               </a:defRPr>
             </a:pPr>
             <a:r>
-              <a:t>Ensuring mission software runs at peak speed while video is captured in real-time.</a:t>
+              <a:t>Automating visual focus across multi-monitor stations with manual overrides and Split/PiP view modes.</a:t>
             </a:r>
           </a:p>
         </p:txBody>
@@ -7579,11 +6913,11 @@
             <a:avLst/>
           </a:prstGeom>
           <a:solidFill>
-            <a:srgbClr val="1E293B"/>
+            <a:srgbClr val="151E2E"/>
           </a:solidFill>
           <a:ln w="19050">
             <a:solidFill>
-              <a:srgbClr val="F59E0B"/>
+              <a:srgbClr val="10B981"/>
             </a:solidFill>
           </a:ln>
         </p:spPr>
@@ -7637,77 +6971,77 @@
               </a:spcAft>
               <a:defRPr sz="1400" b="1">
                 <a:solidFill>
-                  <a:srgbClr val="F59E0B"/>
-                </a:solidFill>
-                <a:latin typeface="Segoe UI"/>
-              </a:defRPr>
-            </a:pPr>
-            <a:r>
-              <a:t>🚀 Intelligent GPU Offloading</a:t>
-            </a:r>
-          </a:p>
-          <a:p>
-            <a:pPr>
-              <a:spcAft>
-                <a:spcPts val="600"/>
-              </a:spcAft>
-              <a:defRPr sz="1100">
-                <a:solidFill>
-                  <a:srgbClr val="CBD5E1"/>
-                </a:solidFill>
-                <a:latin typeface="Segoe UI"/>
-              </a:defRPr>
-            </a:pPr>
-            <a:r>
-              <a:t>• Automatic Hardware Probing: Tests workstation capabilities upon startup.</a:t>
-            </a:r>
-          </a:p>
-          <a:p>
-            <a:pPr>
-              <a:spcAft>
-                <a:spcPts val="600"/>
-              </a:spcAft>
-              <a:defRPr sz="1100">
-                <a:solidFill>
-                  <a:srgbClr val="CBD5E1"/>
-                </a:solidFill>
-                <a:latin typeface="Segoe UI"/>
-              </a:defRPr>
-            </a:pPr>
-            <a:r>
-              <a:t>• NVIDIA NVENC Offloading: Directs compression to dedicated GPU chip; workstation CPU remains completely free (&lt;1%).</a:t>
-            </a:r>
-          </a:p>
-          <a:p>
-            <a:pPr>
-              <a:spcAft>
-                <a:spcPts val="600"/>
-              </a:spcAft>
-              <a:defRPr sz="1100">
-                <a:solidFill>
-                  <a:srgbClr val="CBD5E1"/>
-                </a:solidFill>
-                <a:latin typeface="Segoe UI"/>
-              </a:defRPr>
-            </a:pPr>
-            <a:r>
-              <a:t>• Intel QuickSync (QSV) Optimization: Delivers ~37% lower CPU load than standard software recorders on typical office PCs.</a:t>
-            </a:r>
-          </a:p>
-          <a:p>
-            <a:pPr>
-              <a:spcAft>
-                <a:spcPts val="600"/>
-              </a:spcAft>
-              <a:defRPr sz="1100">
-                <a:solidFill>
-                  <a:srgbClr val="CBD5E1"/>
-                </a:solidFill>
-                <a:latin typeface="Segoe UI"/>
-              </a:defRPr>
-            </a:pPr>
-            <a:r>
-              <a:t>• Seamless Across Mixed Fleets: Operates automatically across laptops, desktop PCs, and specialized workstations with zero manual configuration.</a:t>
+                  <a:srgbClr val="10B981"/>
+                </a:solidFill>
+                <a:latin typeface="Segoe UI"/>
+              </a:defRPr>
+            </a:pPr>
+            <a:r>
+              <a:t>🎬 Activity-Based Director Track</a:t>
+            </a:r>
+          </a:p>
+          <a:p>
+            <a:pPr>
+              <a:spcAft>
+                <a:spcPts val="600"/>
+              </a:spcAft>
+              <a:defRPr sz="1100">
+                <a:solidFill>
+                  <a:srgbClr val="CBD5E1"/>
+                </a:solidFill>
+                <a:latin typeface="Segoe UI"/>
+              </a:defRPr>
+            </a:pPr>
+            <a:r>
+              <a:t>• Dynamic Activity Focus: Detects keyboard strokes and mouse activity to automatically cut to the active monitor.</a:t>
+            </a:r>
+          </a:p>
+          <a:p>
+            <a:pPr>
+              <a:spcAft>
+                <a:spcPts val="600"/>
+              </a:spcAft>
+              <a:defRPr sz="1100">
+                <a:solidFill>
+                  <a:srgbClr val="CBD5E1"/>
+                </a:solidFill>
+                <a:latin typeface="Segoe UI"/>
+              </a:defRPr>
+            </a:pPr>
+            <a:r>
+              <a:t>• Live Screen Orientation HUD: Always know which screen is shown: [⚡ MON-0 (AUTO)] vs [✋ MON-1 (OVERRIDE)].</a:t>
+            </a:r>
+          </a:p>
+          <a:p>
+            <a:pPr>
+              <a:spcAft>
+                <a:spcPts val="600"/>
+              </a:spcAft>
+              <a:defRPr sz="1100">
+                <a:solidFill>
+                  <a:srgbClr val="CBD5E1"/>
+                </a:solidFill>
+                <a:latin typeface="Segoe UI"/>
+              </a:defRPr>
+            </a:pPr>
+            <a:r>
+              <a:t>• Tactical Overrides &amp; Splitting: Split any segment at the playhead (✂️ Split / hotkey 'S') to lock focus manually.</a:t>
+            </a:r>
+          </a:p>
+          <a:p>
+            <a:pPr>
+              <a:spcAft>
+                <a:spcPts val="600"/>
+              </a:spcAft>
+              <a:defRPr sz="1100">
+                <a:solidFill>
+                  <a:srgbClr val="CBD5E1"/>
+                </a:solidFill>
+                <a:latin typeface="Segoe UI"/>
+              </a:defRPr>
+            </a:pPr>
+            <a:r>
+              <a:t>• Zero-Time-Drift Transitions: Smooth millisecond fades and persistent Minimap keep investigators oriented.</a:t>
             </a:r>
           </a:p>
         </p:txBody>
@@ -7727,11 +7061,11 @@
             <a:avLst/>
           </a:prstGeom>
           <a:solidFill>
-            <a:srgbClr val="1E293B"/>
+            <a:srgbClr val="151E2E"/>
           </a:solidFill>
           <a:ln w="19050">
             <a:solidFill>
-              <a:srgbClr val="334155"/>
+              <a:srgbClr val="243248"/>
             </a:solidFill>
           </a:ln>
         </p:spPr>
@@ -7791,71 +7125,87 @@
               </a:defRPr>
             </a:pPr>
             <a:r>
-              <a:t>📈 Workstation Resource Overhead Comparison</a:t>
-            </a:r>
-          </a:p>
-          <a:p>
-            <a:pPr>
-              <a:spcAft>
-                <a:spcPts val="600"/>
-              </a:spcAft>
-              <a:defRPr sz="1100">
-                <a:solidFill>
-                  <a:srgbClr val="CBD5E1"/>
-                </a:solidFill>
-                <a:latin typeface="Segoe UI"/>
-              </a:defRPr>
-            </a:pPr>
-            <a:r>
-              <a:t>• Commercial Recorders (Software CPU): 35% - 60% CPU consumption -&gt; High risk of system freeze.</a:t>
-            </a:r>
-          </a:p>
-          <a:p>
-            <a:pPr>
-              <a:spcAft>
-                <a:spcPts val="600"/>
-              </a:spcAft>
-              <a:defRPr sz="1100">
-                <a:solidFill>
-                  <a:srgbClr val="CBD5E1"/>
-                </a:solidFill>
-                <a:latin typeface="Segoe UI"/>
-              </a:defRPr>
-            </a:pPr>
-            <a:r>
-              <a:t>• Standard Desktop (Intel QuickSync): ~2.5% CPU consumption -&gt; Lightweight and reliable.</a:t>
-            </a:r>
-          </a:p>
-          <a:p>
-            <a:pPr>
-              <a:spcAft>
-                <a:spcPts val="600"/>
-              </a:spcAft>
-              <a:defRPr sz="1100">
-                <a:solidFill>
-                  <a:srgbClr val="CBD5E1"/>
-                </a:solidFill>
-                <a:latin typeface="Segoe UI"/>
-              </a:defRPr>
-            </a:pPr>
-            <a:r>
-              <a:t>• Command Workstation (NVIDIA GPU): &lt; 0.8% CPU consumption -&gt; True zero-impact recording.</a:t>
-            </a:r>
-          </a:p>
-          <a:p>
-            <a:pPr>
-              <a:spcAft>
-                <a:spcPts val="600"/>
-              </a:spcAft>
-              <a:defRPr sz="1100">
-                <a:solidFill>
-                  <a:srgbClr val="CBD5E1"/>
-                </a:solidFill>
-                <a:latin typeface="Segoe UI"/>
-              </a:defRPr>
-            </a:pPr>
-            <a:r>
-              <a:t>• Outcome: Operators experience smooth mouse movement, responsive controls, and zero slowdown.</a:t>
+              <a:t>🎛️ Tactical View Modes</a:t>
+            </a:r>
+          </a:p>
+          <a:p>
+            <a:pPr>
+              <a:spcAft>
+                <a:spcPts val="600"/>
+              </a:spcAft>
+              <a:defRPr sz="1100">
+                <a:solidFill>
+                  <a:srgbClr val="CBD5E1"/>
+                </a:solidFill>
+                <a:latin typeface="Segoe UI"/>
+              </a:defRPr>
+            </a:pPr>
+            <a:r>
+              <a:t>• 🎬 DIRECTOR: Standard automated focal tracking following operator workflow.</a:t>
+            </a:r>
+          </a:p>
+          <a:p>
+            <a:pPr>
+              <a:spcAft>
+                <a:spcPts val="600"/>
+              </a:spcAft>
+              <a:defRPr sz="1100">
+                <a:solidFill>
+                  <a:srgbClr val="CBD5E1"/>
+                </a:solidFill>
+                <a:latin typeface="Segoe UI"/>
+              </a:defRPr>
+            </a:pPr>
+            <a:r>
+              <a:t>• 🔲 SPLIT SCREEN: Dual side-by-side synchronized monitors for simultaneous multi-screen analysis.</a:t>
+            </a:r>
+          </a:p>
+          <a:p>
+            <a:pPr>
+              <a:spcAft>
+                <a:spcPts val="600"/>
+              </a:spcAft>
+              <a:defRPr sz="1100">
+                <a:solidFill>
+                  <a:srgbClr val="CBD5E1"/>
+                </a:solidFill>
+                <a:latin typeface="Segoe UI"/>
+              </a:defRPr>
+            </a:pPr>
+            <a:r>
+              <a:t>• 🪟 PiP (Picture-in-Picture): Secondary monitor in floating inset with 1-click instant display swap.</a:t>
+            </a:r>
+          </a:p>
+          <a:p>
+            <a:pPr>
+              <a:spcAft>
+                <a:spcPts val="600"/>
+              </a:spcAft>
+              <a:defRPr sz="1100">
+                <a:solidFill>
+                  <a:srgbClr val="CBD5E1"/>
+                </a:solidFill>
+                <a:latin typeface="Segoe UI"/>
+              </a:defRPr>
+            </a:pPr>
+            <a:r>
+              <a:t>• 🖥️ Monitor Pins: Lock playback exclusively to a specific monitor (mon-0, mon-1).</a:t>
+            </a:r>
+          </a:p>
+          <a:p>
+            <a:pPr>
+              <a:spcAft>
+                <a:spcPts val="600"/>
+              </a:spcAft>
+              <a:defRPr sz="1100">
+                <a:solidFill>
+                  <a:srgbClr val="CBD5E1"/>
+                </a:solidFill>
+                <a:latin typeface="Segoe UI"/>
+              </a:defRPr>
+            </a:pPr>
+            <a:r>
+              <a:t>• Market Exclusivity: No commercial VMS or screen recorder provides automated multi-screen director tracks.</a:t>
             </a:r>
           </a:p>
         </p:txBody>
@@ -7893,7 +7243,7 @@
             <a:avLst/>
           </a:prstGeom>
           <a:solidFill>
-            <a:srgbClr val="0A1128"/>
+            <a:srgbClr val="070A10"/>
           </a:solidFill>
           <a:ln>
             <a:noFill/>
@@ -7952,7 +7302,7 @@
               </a:defRPr>
             </a:pPr>
             <a:r>
-              <a:t>OPERATIONAL RELIABILITY</a:t>
+              <a:t>UNIQUE DIFFERENTIATOR #2</a:t>
             </a:r>
           </a:p>
         </p:txBody>
@@ -7988,7 +7338,7 @@
               </a:defRPr>
             </a:pPr>
             <a:r>
-              <a:t>24/7 High Availability &amp; Offline Resiliency</a:t>
+              <a:t>Forensic Keystroke Intelligence &amp; Synchronized Subtitles</a:t>
             </a:r>
           </a:p>
         </p:txBody>
@@ -8024,7 +7374,7 @@
               </a:defRPr>
             </a:pPr>
             <a:r>
-              <a:t>Engineered to guarantee zero gap in security audits even during network cuts or storage outages.</a:t>
+              <a:t>Correlating operator intent with screen outcomes with millisecond precision.</a:t>
             </a:r>
           </a:p>
         </p:txBody>
@@ -8038,145 +7388,13 @@
         <p:spPr>
           <a:xfrm>
             <a:off x="731520" y="1920240"/>
-            <a:ext cx="3383280" cy="4297680"/>
+            <a:ext cx="5120640" cy="4297680"/>
           </a:xfrm>
           <a:prstGeom prst="roundRect">
             <a:avLst/>
           </a:prstGeom>
           <a:solidFill>
-            <a:srgbClr val="1E293B"/>
-          </a:solidFill>
-          <a:ln w="19050">
-            <a:solidFill>
-              <a:srgbClr val="334155"/>
-            </a:solidFill>
-          </a:ln>
-        </p:spPr>
-        <p:style>
-          <a:lnRef idx="1">
-            <a:schemeClr val="accent1"/>
-          </a:lnRef>
-          <a:fillRef idx="3">
-            <a:schemeClr val="accent1"/>
-          </a:fillRef>
-          <a:effectRef idx="2">
-            <a:schemeClr val="accent1"/>
-          </a:effectRef>
-          <a:fontRef idx="minor">
-            <a:schemeClr val="lt1"/>
-          </a:fontRef>
-        </p:style>
-        <p:txBody>
-          <a:bodyPr rtlCol="0" anchor="ctr"/>
-          <a:lstStyle/>
-          <a:p>
-            <a:pPr algn="ctr"/>
-          </a:p>
-        </p:txBody>
-      </p:sp>
-      <p:sp>
-        <p:nvSpPr>
-          <p:cNvPr id="7" name="TextBox 6"/>
-          <p:cNvSpPr txBox="1"/>
-          <p:nvPr/>
-        </p:nvSpPr>
-        <p:spPr>
-          <a:xfrm>
-            <a:off x="914400" y="2103120"/>
-            <a:ext cx="3017520" cy="3931920"/>
-          </a:xfrm>
-          <a:prstGeom prst="rect">
-            <a:avLst/>
-          </a:prstGeom>
-          <a:noFill/>
-        </p:spPr>
-        <p:txBody>
-          <a:bodyPr wrap="square">
-            <a:spAutoFit/>
-          </a:bodyPr>
-          <a:lstStyle/>
-          <a:p>
-            <a:pPr>
-              <a:spcAft>
-                <a:spcPts val="800"/>
-              </a:spcAft>
-              <a:defRPr sz="1400" b="1">
-                <a:solidFill>
-                  <a:srgbClr val="FFFFFF"/>
-                </a:solidFill>
-                <a:latin typeface="Segoe UI"/>
-              </a:defRPr>
-            </a:pPr>
-            <a:r>
-              <a:t>🔌 Network Disconnect Guard</a:t>
-            </a:r>
-          </a:p>
-          <a:p>
-            <a:pPr>
-              <a:spcAft>
-                <a:spcPts val="600"/>
-              </a:spcAft>
-              <a:defRPr sz="1100">
-                <a:solidFill>
-                  <a:srgbClr val="CBD5E1"/>
-                </a:solidFill>
-                <a:latin typeface="Segoe UI"/>
-              </a:defRPr>
-            </a:pPr>
-            <a:r>
-              <a:t>• If LAN connectivity to the server is lost, the agent automatically switches to local encrypted caching.</a:t>
-            </a:r>
-          </a:p>
-          <a:p>
-            <a:pPr>
-              <a:spcAft>
-                <a:spcPts val="600"/>
-              </a:spcAft>
-              <a:defRPr sz="1100">
-                <a:solidFill>
-                  <a:srgbClr val="CBD5E1"/>
-                </a:solidFill>
-                <a:latin typeface="Segoe UI"/>
-              </a:defRPr>
-            </a:pPr>
-            <a:r>
-              <a:t>• When the network is restored, buffered video is safely synced to the central server.</a:t>
-            </a:r>
-          </a:p>
-          <a:p>
-            <a:pPr>
-              <a:spcAft>
-                <a:spcPts val="600"/>
-              </a:spcAft>
-              <a:defRPr sz="1100">
-                <a:solidFill>
-                  <a:srgbClr val="CBD5E1"/>
-                </a:solidFill>
-                <a:latin typeface="Segoe UI"/>
-              </a:defRPr>
-            </a:pPr>
-            <a:r>
-              <a:t>• Zero recorded data is lost during network maintenance.</a:t>
-            </a:r>
-          </a:p>
-        </p:txBody>
-      </p:sp>
-      <p:sp>
-        <p:nvSpPr>
-          <p:cNvPr id="8" name="Rounded Rectangle 7"/>
-          <p:cNvSpPr/>
-          <p:nvPr/>
-        </p:nvSpPr>
-        <p:spPr>
-          <a:xfrm>
-            <a:off x="4389120" y="1920240"/>
-            <a:ext cx="3383280" cy="4297680"/>
-          </a:xfrm>
-          <a:prstGeom prst="roundRect">
-            <a:avLst/>
-          </a:prstGeom>
-          <a:solidFill>
-            <a:srgbClr val="1E293B"/>
+            <a:srgbClr val="151E2E"/>
           </a:solidFill>
           <a:ln w="19050">
             <a:solidFill>
@@ -8208,14 +7426,14 @@
       </p:sp>
       <p:sp>
         <p:nvSpPr>
-          <p:cNvPr id="9" name="TextBox 8"/>
+          <p:cNvPr id="7" name="TextBox 6"/>
           <p:cNvSpPr txBox="1"/>
           <p:nvPr/>
         </p:nvSpPr>
         <p:spPr>
           <a:xfrm>
-            <a:off x="4572000" y="2103120"/>
-            <a:ext cx="3017520" cy="3931920"/>
+            <a:off x="914400" y="2103120"/>
+            <a:ext cx="4754880" cy="3931920"/>
           </a:xfrm>
           <a:prstGeom prst="rect">
             <a:avLst/>
@@ -8240,79 +7458,95 @@
               </a:defRPr>
             </a:pPr>
             <a:r>
-              <a:t>💾 Dual Storage Safeguard</a:t>
-            </a:r>
-          </a:p>
-          <a:p>
-            <a:pPr>
-              <a:spcAft>
-                <a:spcPts val="600"/>
-              </a:spcAft>
-              <a:defRPr sz="1100">
-                <a:solidFill>
-                  <a:srgbClr val="CBD5E1"/>
-                </a:solidFill>
-                <a:latin typeface="Segoe UI"/>
-              </a:defRPr>
-            </a:pPr>
-            <a:r>
-              <a:t>• Primary recordings write directly to enterprise NetApp storage.</a:t>
-            </a:r>
-          </a:p>
-          <a:p>
-            <a:pPr>
-              <a:spcAft>
-                <a:spcPts val="600"/>
-              </a:spcAft>
-              <a:defRPr sz="1100">
-                <a:solidFill>
-                  <a:srgbClr val="CBD5E1"/>
-                </a:solidFill>
-                <a:latin typeface="Segoe UI"/>
-              </a:defRPr>
-            </a:pPr>
-            <a:r>
-              <a:t>• If NetApp becomes unreachable, the server auto-diverts recordings to local high-speed disk within 3 seconds.</a:t>
-            </a:r>
-          </a:p>
-          <a:p>
-            <a:pPr>
-              <a:spcAft>
-                <a:spcPts val="600"/>
-              </a:spcAft>
-              <a:defRPr sz="1100">
-                <a:solidFill>
-                  <a:srgbClr val="CBD5E1"/>
-                </a:solidFill>
-                <a:latin typeface="Segoe UI"/>
-              </a:defRPr>
-            </a:pPr>
-            <a:r>
-              <a:t>• Transitions back to NetApp automatically once reachable.</a:t>
-            </a:r>
-          </a:p>
-        </p:txBody>
-      </p:sp>
-      <p:sp>
-        <p:nvSpPr>
-          <p:cNvPr id="10" name="Rounded Rectangle 9"/>
+              <a:t>⌨️ Low-Level Input Capture</a:t>
+            </a:r>
+          </a:p>
+          <a:p>
+            <a:pPr>
+              <a:spcAft>
+                <a:spcPts val="600"/>
+              </a:spcAft>
+              <a:defRPr sz="1100">
+                <a:solidFill>
+                  <a:srgbClr val="CBD5E1"/>
+                </a:solidFill>
+                <a:latin typeface="Segoe UI"/>
+              </a:defRPr>
+            </a:pPr>
+            <a:r>
+              <a:t>• Low-Level OS Hooking: Captures shortcuts, command executions, and hotkeys with millisecond UTC timestamps.</a:t>
+            </a:r>
+          </a:p>
+          <a:p>
+            <a:pPr>
+              <a:spcAft>
+                <a:spcPts val="600"/>
+              </a:spcAft>
+              <a:defRPr sz="1100">
+                <a:solidFill>
+                  <a:srgbClr val="CBD5E1"/>
+                </a:solidFill>
+                <a:latin typeface="Segoe UI"/>
+              </a:defRPr>
+            </a:pPr>
+            <a:r>
+              <a:t>• Indisputable Audit Proof: Proves exactly who executed what command, when, and in what sequence.</a:t>
+            </a:r>
+          </a:p>
+          <a:p>
+            <a:pPr>
+              <a:spcAft>
+                <a:spcPts val="600"/>
+              </a:spcAft>
+              <a:defRPr sz="1100">
+                <a:solidFill>
+                  <a:srgbClr val="CBD5E1"/>
+                </a:solidFill>
+                <a:latin typeface="Segoe UI"/>
+              </a:defRPr>
+            </a:pPr>
+            <a:r>
+              <a:t>• Privacy Protection Gate: Automatically pauses keyboard logging outside active recording or in lock screen.</a:t>
+            </a:r>
+          </a:p>
+          <a:p>
+            <a:pPr>
+              <a:spcAft>
+                <a:spcPts val="600"/>
+              </a:spcAft>
+              <a:defRPr sz="1100">
+                <a:solidFill>
+                  <a:srgbClr val="CBD5E1"/>
+                </a:solidFill>
+                <a:latin typeface="Segoe UI"/>
+              </a:defRPr>
+            </a:pPr>
+            <a:r>
+              <a:t>• Forensic Search Engine: Search central catalog for specific commands (reboot, launch, authorize) to jump to video.</a:t>
+            </a:r>
+          </a:p>
+        </p:txBody>
+      </p:sp>
+      <p:sp>
+        <p:nvSpPr>
+          <p:cNvPr id="8" name="Rounded Rectangle 7"/>
           <p:cNvSpPr/>
           <p:nvPr/>
         </p:nvSpPr>
         <p:spPr>
           <a:xfrm>
-            <a:off x="8046720" y="1920240"/>
-            <a:ext cx="3383280" cy="4297680"/>
+            <a:off x="6217920" y="1920240"/>
+            <a:ext cx="5212080" cy="4297680"/>
           </a:xfrm>
           <a:prstGeom prst="roundRect">
             <a:avLst/>
           </a:prstGeom>
           <a:solidFill>
-            <a:srgbClr val="1E293B"/>
+            <a:srgbClr val="151E2E"/>
           </a:solidFill>
           <a:ln w="19050">
             <a:solidFill>
-              <a:srgbClr val="334155"/>
+              <a:srgbClr val="243248"/>
             </a:solidFill>
           </a:ln>
         </p:spPr>
@@ -8340,14 +7574,14 @@
       </p:sp>
       <p:sp>
         <p:nvSpPr>
-          <p:cNvPr id="11" name="TextBox 10"/>
+          <p:cNvPr id="9" name="TextBox 8"/>
           <p:cNvSpPr txBox="1"/>
           <p:nvPr/>
         </p:nvSpPr>
         <p:spPr>
           <a:xfrm>
-            <a:off x="8229600" y="2103120"/>
-            <a:ext cx="3017520" cy="3931920"/>
+            <a:off x="6400800" y="2103120"/>
+            <a:ext cx="4846320" cy="3931920"/>
           </a:xfrm>
           <a:prstGeom prst="rect">
             <a:avLst/>
@@ -8372,55 +7606,71 @@
               </a:defRPr>
             </a:pPr>
             <a:r>
-              <a:t>🔄 Self-Healing Automation</a:t>
-            </a:r>
-          </a:p>
-          <a:p>
-            <a:pPr>
-              <a:spcAft>
-                <a:spcPts val="600"/>
-              </a:spcAft>
-              <a:defRPr sz="1100">
-                <a:solidFill>
-                  <a:srgbClr val="CBD5E1"/>
-                </a:solidFill>
-                <a:latin typeface="Segoe UI"/>
-              </a:defRPr>
-            </a:pPr>
-            <a:r>
-              <a:t>• Server supervisors continuously monitor streaming processes.</a:t>
-            </a:r>
-          </a:p>
-          <a:p>
-            <a:pPr>
-              <a:spcAft>
-                <a:spcPts val="600"/>
-              </a:spcAft>
-              <a:defRPr sz="1100">
-                <a:solidFill>
-                  <a:srgbClr val="CBD5E1"/>
-                </a:solidFill>
-                <a:latin typeface="Segoe UI"/>
-              </a:defRPr>
-            </a:pPr>
-            <a:r>
-              <a:t>• If a core process stops unexpectedly, it is automatically restarted within 5 seconds.</a:t>
-            </a:r>
-          </a:p>
-          <a:p>
-            <a:pPr>
-              <a:spcAft>
-                <a:spcPts val="600"/>
-              </a:spcAft>
-              <a:defRPr sz="1100">
-                <a:solidFill>
-                  <a:srgbClr val="CBD5E1"/>
-                </a:solidFill>
-                <a:latin typeface="Segoe UI"/>
-              </a:defRPr>
-            </a:pPr>
-            <a:r>
-              <a:t>• Requires zero manual IT intervention or emergency server reboots.</a:t>
+              <a:t>📄 Burned-in Subtitles (.SRT / .ASS)</a:t>
+            </a:r>
+          </a:p>
+          <a:p>
+            <a:pPr>
+              <a:spcAft>
+                <a:spcPts val="600"/>
+              </a:spcAft>
+              <a:defRPr sz="1100">
+                <a:solidFill>
+                  <a:srgbClr val="CBD5E1"/>
+                </a:solidFill>
+                <a:latin typeface="Segoe UI"/>
+              </a:defRPr>
+            </a:pPr>
+            <a:r>
+              <a:t>• Synchronized Subtitles: Exported incident videos include accurate SubRip (.srt) and Advanced SSA (.ass) subtitles.</a:t>
+            </a:r>
+          </a:p>
+          <a:p>
+            <a:pPr>
+              <a:spcAft>
+                <a:spcPts val="600"/>
+              </a:spcAft>
+              <a:defRPr sz="1100">
+                <a:solidFill>
+                  <a:srgbClr val="CBD5E1"/>
+                </a:solidFill>
+                <a:latin typeface="Segoe UI"/>
+              </a:defRPr>
+            </a:pPr>
+            <a:r>
+              <a:t>• Overlaid Input Telemetry: Keystrokes appear at the bottom of the video exactly when pressed.</a:t>
+            </a:r>
+          </a:p>
+          <a:p>
+            <a:pPr>
+              <a:spcAft>
+                <a:spcPts val="600"/>
+              </a:spcAft>
+              <a:defRPr sz="1100">
+                <a:solidFill>
+                  <a:srgbClr val="CBD5E1"/>
+                </a:solidFill>
+                <a:latin typeface="Segoe UI"/>
+              </a:defRPr>
+            </a:pPr>
+            <a:r>
+              <a:t>• Universal Playback: Playable in standard media players (VLC, Media Player, QuickTime) with zero plugins.</a:t>
+            </a:r>
+          </a:p>
+          <a:p>
+            <a:pPr>
+              <a:spcAft>
+                <a:spcPts val="600"/>
+              </a:spcAft>
+              <a:defRPr sz="1100">
+                <a:solidFill>
+                  <a:srgbClr val="CBD5E1"/>
+                </a:solidFill>
+                <a:latin typeface="Segoe UI"/>
+              </a:defRPr>
+            </a:pPr>
+            <a:r>
+              <a:t>• Certified Legal Compliance: Provides verified forensic packages for formal debriefs and regulatory inquiries.</a:t>
             </a:r>
           </a:p>
         </p:txBody>
@@ -8458,7 +7708,7 @@
             <a:avLst/>
           </a:prstGeom>
           <a:solidFill>
-            <a:srgbClr val="0A1128"/>
+            <a:srgbClr val="070A10"/>
           </a:solidFill>
           <a:ln>
             <a:noFill/>
@@ -8511,13 +7761,13 @@
             <a:pPr>
               <a:defRPr sz="1000" b="1">
                 <a:solidFill>
-                  <a:srgbClr val="F59E0B"/>
+                  <a:srgbClr val="A855F7"/>
                 </a:solidFill>
                 <a:latin typeface="Arial"/>
               </a:defRPr>
             </a:pPr>
             <a:r>
-              <a:t>OPERATIONS OVERSIGHT</a:t>
+              <a:t>UNIQUE DIFFERENTIATOR #3</a:t>
             </a:r>
           </a:p>
         </p:txBody>
@@ -8553,7 +7803,7 @@
               </a:defRPr>
             </a:pPr>
             <a:r>
-              <a:t>Live Command-and-Control Fleet Monitoring Wall</a:t>
+              <a:t>Multi-Station Unified Timeline &amp; Gap-Proof Integrity</a:t>
             </a:r>
           </a:p>
         </p:txBody>
@@ -8589,7 +7839,7 @@
               </a:defRPr>
             </a:pPr>
             <a:r>
-              <a:t>Real-time situational awareness across dozens of operational rooms and consoles.</a:t>
+              <a:t>Reconstructing complex multi-operator incidents across 70+ stations in absolute lockstep.</a:t>
             </a:r>
           </a:p>
         </p:txBody>
@@ -8609,11 +7859,11 @@
             <a:avLst/>
           </a:prstGeom>
           <a:solidFill>
-            <a:srgbClr val="1E293B"/>
+            <a:srgbClr val="151E2E"/>
           </a:solidFill>
           <a:ln w="19050">
             <a:solidFill>
-              <a:srgbClr val="38BDF8"/>
+              <a:srgbClr val="A855F7"/>
             </a:solidFill>
           </a:ln>
         </p:spPr>
@@ -8667,77 +7917,77 @@
               </a:spcAft>
               <a:defRPr sz="1400" b="1">
                 <a:solidFill>
-                  <a:srgbClr val="38BDF8"/>
-                </a:solidFill>
-                <a:latin typeface="Segoe UI"/>
-              </a:defRPr>
-            </a:pPr>
-            <a:r>
-              <a:t>📺 Sub-Second Live Monitoring</a:t>
-            </a:r>
-          </a:p>
-          <a:p>
-            <a:pPr>
-              <a:spcAft>
-                <a:spcPts val="600"/>
-              </a:spcAft>
-              <a:defRPr sz="1100">
-                <a:solidFill>
-                  <a:srgbClr val="CBD5E1"/>
-                </a:solidFill>
-                <a:latin typeface="Segoe UI"/>
-              </a:defRPr>
-            </a:pPr>
-            <a:r>
-              <a:t>• Sub-Second Live Video: WebRTC technology streams screens to commanders with less than 1 second delay.</a:t>
-            </a:r>
-          </a:p>
-          <a:p>
-            <a:pPr>
-              <a:spcAft>
-                <a:spcPts val="600"/>
-              </a:spcAft>
-              <a:defRPr sz="1100">
-                <a:solidFill>
-                  <a:srgbClr val="CBD5E1"/>
-                </a:solidFill>
-                <a:latin typeface="Segoe UI"/>
-              </a:defRPr>
-            </a:pPr>
-            <a:r>
-              <a:t>• Interactive Multi-Grid: View up to 16 live station screens simultaneously on a single display wall.</a:t>
-            </a:r>
-          </a:p>
-          <a:p>
-            <a:pPr>
-              <a:spcAft>
-                <a:spcPts val="600"/>
-              </a:spcAft>
-              <a:defRPr sz="1100">
-                <a:solidFill>
-                  <a:srgbClr val="CBD5E1"/>
-                </a:solidFill>
-                <a:latin typeface="Segoe UI"/>
-              </a:defRPr>
-            </a:pPr>
-            <a:r>
-              <a:t>• Instant Full-Screen Inspection: Click any station to instantly zoom into full resolution.</a:t>
-            </a:r>
-          </a:p>
-          <a:p>
-            <a:pPr>
-              <a:spcAft>
-                <a:spcPts val="600"/>
-              </a:spcAft>
-              <a:defRPr sz="1100">
-                <a:solidFill>
-                  <a:srgbClr val="CBD5E1"/>
-                </a:solidFill>
-                <a:latin typeface="Segoe UI"/>
-              </a:defRPr>
-            </a:pPr>
-            <a:r>
-              <a:t>• Custom Operational Rooms: Organize workstations into operational rooms, duty cells, or shift groups.</a:t>
+                  <a:srgbClr val="A855F7"/>
+                </a:solidFill>
+                <a:latin typeface="Segoe UI"/>
+              </a:defRPr>
+            </a:pPr>
+            <a:r>
+              <a:t>⏱️ Wall-Clock Aligned Chunking</a:t>
+            </a:r>
+          </a:p>
+          <a:p>
+            <a:pPr>
+              <a:spcAft>
+                <a:spcPts val="600"/>
+              </a:spcAft>
+              <a:defRPr sz="1100">
+                <a:solidFill>
+                  <a:srgbClr val="CBD5E1"/>
+                </a:solidFill>
+                <a:latin typeface="Segoe UI"/>
+              </a:defRPr>
+            </a:pPr>
+            <a:r>
+              <a:t>• Deterministic 5-Minute Slicing: Recordings are sliced on exact UTC wall-clock boundaries (14:00, 14:05).</a:t>
+            </a:r>
+          </a:p>
+          <a:p>
+            <a:pPr>
+              <a:spcAft>
+                <a:spcPts val="600"/>
+              </a:spcAft>
+              <a:defRPr sz="1100">
+                <a:solidFill>
+                  <a:srgbClr val="CBD5E1"/>
+                </a:solidFill>
+                <a:latin typeface="Segoe UI"/>
+              </a:defRPr>
+            </a:pPr>
+            <a:r>
+              <a:t>• Multicam Synchronized NLE: Up to 16 stations advance in absolute temporal lockstep.</a:t>
+            </a:r>
+          </a:p>
+          <a:p>
+            <a:pPr>
+              <a:spcAft>
+                <a:spcPts val="600"/>
+              </a:spcAft>
+              <a:defRPr sz="1100">
+                <a:solidFill>
+                  <a:srgbClr val="CBD5E1"/>
+                </a:solidFill>
+                <a:latin typeface="Segoe UI"/>
+              </a:defRPr>
+            </a:pPr>
+            <a:r>
+              <a:t>• Cross-Team Correlation: When Dispatch transmits, see Operator screen receive it at that exact second.</a:t>
+            </a:r>
+          </a:p>
+          <a:p>
+            <a:pPr>
+              <a:spcAft>
+                <a:spcPts val="600"/>
+              </a:spcAft>
+              <a:defRPr sz="1100">
+                <a:solidFill>
+                  <a:srgbClr val="CBD5E1"/>
+                </a:solidFill>
+                <a:latin typeface="Segoe UI"/>
+              </a:defRPr>
+            </a:pPr>
+            <a:r>
+              <a:t>• Eliminates Manual Alignment: No tedious video syncing in external video editors.</a:t>
             </a:r>
           </a:p>
         </p:txBody>
@@ -8757,11 +8007,11 @@
             <a:avLst/>
           </a:prstGeom>
           <a:solidFill>
-            <a:srgbClr val="1E293B"/>
+            <a:srgbClr val="151E2E"/>
           </a:solidFill>
           <a:ln w="19050">
             <a:solidFill>
-              <a:srgbClr val="334155"/>
+              <a:srgbClr val="243248"/>
             </a:solidFill>
           </a:ln>
         </p:spPr>
@@ -8821,71 +8071,71 @@
               </a:defRPr>
             </a:pPr>
             <a:r>
-              <a:t>📊 Real-Time Fleet Telemetry</a:t>
-            </a:r>
-          </a:p>
-          <a:p>
-            <a:pPr>
-              <a:spcAft>
-                <a:spcPts val="600"/>
-              </a:spcAft>
-              <a:defRPr sz="1100">
-                <a:solidFill>
-                  <a:srgbClr val="CBD5E1"/>
-                </a:solidFill>
-                <a:latin typeface="Segoe UI"/>
-              </a:defRPr>
-            </a:pPr>
-            <a:r>
-              <a:t>• Live Station Status: Immediate visibility into active recording and frame rate.</a:t>
-            </a:r>
-          </a:p>
-          <a:p>
-            <a:pPr>
-              <a:spcAft>
-                <a:spcPts val="600"/>
-              </a:spcAft>
-              <a:defRPr sz="1100">
-                <a:solidFill>
-                  <a:srgbClr val="CBD5E1"/>
-                </a:solidFill>
-                <a:latin typeface="Segoe UI"/>
-              </a:defRPr>
-            </a:pPr>
-            <a:r>
-              <a:t>• Audio Activity Indicators: Real-time visual alerts when speakers or microphones are active.</a:t>
-            </a:r>
-          </a:p>
-          <a:p>
-            <a:pPr>
-              <a:spcAft>
-                <a:spcPts val="600"/>
-              </a:spcAft>
-              <a:defRPr sz="1100">
-                <a:solidFill>
-                  <a:srgbClr val="CBD5E1"/>
-                </a:solidFill>
-                <a:latin typeface="Segoe UI"/>
-              </a:defRPr>
-            </a:pPr>
-            <a:r>
-              <a:t>• Network Bandwidth Monitoring: Proactive tracking of network throughput per station.</a:t>
-            </a:r>
-          </a:p>
-          <a:p>
-            <a:pPr>
-              <a:spcAft>
-                <a:spcPts val="600"/>
-              </a:spcAft>
-              <a:defRPr sz="1100">
-                <a:solidFill>
-                  <a:srgbClr val="CBD5E1"/>
-                </a:solidFill>
-                <a:latin typeface="Segoe UI"/>
-              </a:defRPr>
-            </a:pPr>
-            <a:r>
-              <a:t>• Centralized Configuration: Adjust video quality and frame rates fleet-wide with one click.</a:t>
+              <a:t>🛡️ The 'Time-Continuity Guarantee'</a:t>
+            </a:r>
+          </a:p>
+          <a:p>
+            <a:pPr>
+              <a:spcAft>
+                <a:spcPts val="600"/>
+              </a:spcAft>
+              <a:defRPr sz="1100">
+                <a:solidFill>
+                  <a:srgbClr val="CBD5E1"/>
+                </a:solidFill>
+                <a:latin typeface="Segoe UI"/>
+              </a:defRPr>
+            </a:pPr>
+            <a:r>
+              <a:t>• The Flaw in Other Tools: When Station B reboots for 5 minutes, normal players collapse the gap, breaking sync.</a:t>
+            </a:r>
+          </a:p>
+          <a:p>
+            <a:pPr>
+              <a:spcAft>
+                <a:spcPts val="600"/>
+              </a:spcAft>
+              <a:defRPr sz="1100">
+                <a:solidFill>
+                  <a:srgbClr val="CBD5E1"/>
+                </a:solidFill>
+                <a:latin typeface="Segoe UI"/>
+              </a:defRPr>
+            </a:pPr>
+            <a:r>
+              <a:t>• ITB Synthetic Slate Engine: Automatically detects offline gaps (&gt;500ms) and injects 'No Signal' test pattern video.</a:t>
+            </a:r>
+          </a:p>
+          <a:p>
+            <a:pPr>
+              <a:spcAft>
+                <a:spcPts val="600"/>
+              </a:spcAft>
+              <a:defRPr sz="1100">
+                <a:solidFill>
+                  <a:srgbClr val="CBD5E1"/>
+                </a:solidFill>
+                <a:latin typeface="Segoe UI"/>
+              </a:defRPr>
+            </a:pPr>
+            <a:r>
+              <a:t>• Zero Timeline Drift: Station A and Station B remain 100% time-locked down to the exact millisecond.</a:t>
+            </a:r>
+          </a:p>
+          <a:p>
+            <a:pPr>
+              <a:spcAft>
+                <a:spcPts val="600"/>
+              </a:spcAft>
+              <a:defRPr sz="1100">
+                <a:solidFill>
+                  <a:srgbClr val="CBD5E1"/>
+                </a:solidFill>
+                <a:latin typeface="Segoe UI"/>
+              </a:defRPr>
+            </a:pPr>
+            <a:r>
+              <a:t>• Court-Admissible Evidence: Clear visual indication of power cycles while preserving chronological truth.</a:t>
             </a:r>
           </a:p>
         </p:txBody>
@@ -8923,7 +8173,7 @@
             <a:avLst/>
           </a:prstGeom>
           <a:solidFill>
-            <a:srgbClr val="0A1128"/>
+            <a:srgbClr val="070A10"/>
           </a:solidFill>
           <a:ln>
             <a:noFill/>
@@ -8976,13 +8226,13 @@
             <a:pPr>
               <a:defRPr sz="1000" b="1">
                 <a:solidFill>
-                  <a:srgbClr val="F59E0B"/>
+                  <a:srgbClr val="06B6D4"/>
                 </a:solidFill>
                 <a:latin typeface="Arial"/>
               </a:defRPr>
             </a:pPr>
             <a:r>
-              <a:t>INVESTIGATION POWER</a:t>
+              <a:t>ENDPOINT PERFORMANCE</a:t>
             </a:r>
           </a:p>
         </p:txBody>
@@ -9018,7 +8268,7 @@
               </a:defRPr>
             </a:pPr>
             <a:r>
-              <a:t>Forensic Synchronized Replay &amp; Visual NLE Studio</a:t>
+              <a:t>Zero Workstation Impact: Hardware-Accelerated Performance</a:t>
             </a:r>
           </a:p>
         </p:txBody>
@@ -9054,7 +8304,7 @@
               </a:defRPr>
             </a:pPr>
             <a:r>
-              <a:t>Reconstructing complex multi-operator incidents in minutes rather than days.</a:t>
+              <a:t>Ensuring mission software runs at peak speed while video and audio are continuously captured.</a:t>
             </a:r>
           </a:p>
         </p:txBody>
@@ -9074,11 +8324,11 @@
             <a:avLst/>
           </a:prstGeom>
           <a:solidFill>
-            <a:srgbClr val="1E293B"/>
+            <a:srgbClr val="151E2E"/>
           </a:solidFill>
           <a:ln w="19050">
             <a:solidFill>
-              <a:srgbClr val="F59E0B"/>
+              <a:srgbClr val="06B6D4"/>
             </a:solidFill>
           </a:ln>
         </p:spPr>
@@ -9132,77 +8382,77 @@
               </a:spcAft>
               <a:defRPr sz="1400" b="1">
                 <a:solidFill>
-                  <a:srgbClr val="F59E0B"/>
-                </a:solidFill>
-                <a:latin typeface="Segoe UI"/>
-              </a:defRPr>
-            </a:pPr>
-            <a:r>
-              <a:t>🎬 Synchronized Multi-Screen Replay</a:t>
-            </a:r>
-          </a:p>
-          <a:p>
-            <a:pPr>
-              <a:spcAft>
-                <a:spcPts val="600"/>
-              </a:spcAft>
-              <a:defRPr sz="1100">
-                <a:solidFill>
-                  <a:srgbClr val="CBD5E1"/>
-                </a:solidFill>
-                <a:latin typeface="Segoe UI"/>
-              </a:defRPr>
-            </a:pPr>
-            <a:r>
-              <a:t>• Select up to 16 stations involved in an operational incident.</a:t>
-            </a:r>
-          </a:p>
-          <a:p>
-            <a:pPr>
-              <a:spcAft>
-                <a:spcPts val="600"/>
-              </a:spcAft>
-              <a:defRPr sz="1100">
-                <a:solidFill>
-                  <a:srgbClr val="CBD5E1"/>
-                </a:solidFill>
-                <a:latin typeface="Segoe UI"/>
-              </a:defRPr>
-            </a:pPr>
-            <a:r>
-              <a:t>• All video feeds advance in absolute lockstep on a single unified timeline.</a:t>
-            </a:r>
-          </a:p>
-          <a:p>
-            <a:pPr>
-              <a:spcAft>
-                <a:spcPts val="600"/>
-              </a:spcAft>
-              <a:defRPr sz="1100">
-                <a:solidFill>
-                  <a:srgbClr val="CBD5E1"/>
-                </a:solidFill>
-                <a:latin typeface="Segoe UI"/>
-              </a:defRPr>
-            </a:pPr>
-            <a:r>
-              <a:t>• When Operator A takes an action, see Operator B's screen reaction at the exact identical millisecond.</a:t>
-            </a:r>
-          </a:p>
-          <a:p>
-            <a:pPr>
-              <a:spcAft>
-                <a:spcPts val="600"/>
-              </a:spcAft>
-              <a:defRPr sz="1100">
-                <a:solidFill>
-                  <a:srgbClr val="CBD5E1"/>
-                </a:solidFill>
-                <a:latin typeface="Segoe UI"/>
-              </a:defRPr>
-            </a:pPr>
-            <a:r>
-              <a:t>• Eliminates guesswork and manual timeline alignment.</a:t>
+                  <a:srgbClr val="06B6D4"/>
+                </a:solidFill>
+                <a:latin typeface="Segoe UI"/>
+              </a:defRPr>
+            </a:pPr>
+            <a:r>
+              <a:t>🚀 Intelligent GPU Offloading</a:t>
+            </a:r>
+          </a:p>
+          <a:p>
+            <a:pPr>
+              <a:spcAft>
+                <a:spcPts val="600"/>
+              </a:spcAft>
+              <a:defRPr sz="1100">
+                <a:solidFill>
+                  <a:srgbClr val="CBD5E1"/>
+                </a:solidFill>
+                <a:latin typeface="Segoe UI"/>
+              </a:defRPr>
+            </a:pPr>
+            <a:r>
+              <a:t>• Automatic Hardware Probing: Tests workstation capabilities upon startup (NVENC -&gt; Intel QSV -&gt; CPU).</a:t>
+            </a:r>
+          </a:p>
+          <a:p>
+            <a:pPr>
+              <a:spcAft>
+                <a:spcPts val="600"/>
+              </a:spcAft>
+              <a:defRPr sz="1100">
+                <a:solidFill>
+                  <a:srgbClr val="CBD5E1"/>
+                </a:solidFill>
+                <a:latin typeface="Segoe UI"/>
+              </a:defRPr>
+            </a:pPr>
+            <a:r>
+              <a:t>• NVIDIA NVENC Silicon Offload: Compression runs on dedicated GPU silicon; workstation CPU load is &lt; 0.8%.</a:t>
+            </a:r>
+          </a:p>
+          <a:p>
+            <a:pPr>
+              <a:spcAft>
+                <a:spcPts val="600"/>
+              </a:spcAft>
+              <a:defRPr sz="1100">
+                <a:solidFill>
+                  <a:srgbClr val="CBD5E1"/>
+                </a:solidFill>
+                <a:latin typeface="Segoe UI"/>
+              </a:defRPr>
+            </a:pPr>
+            <a:r>
+              <a:t>• Intel QuickSync (QSV): Achieves ~2.0% CPU load on standard commercial desktop PCs.</a:t>
+            </a:r>
+          </a:p>
+          <a:p>
+            <a:pPr>
+              <a:spcAft>
+                <a:spcPts val="600"/>
+              </a:spcAft>
+              <a:defRPr sz="1100">
+                <a:solidFill>
+                  <a:srgbClr val="CBD5E1"/>
+                </a:solidFill>
+                <a:latin typeface="Segoe UI"/>
+              </a:defRPr>
+            </a:pPr>
+            <a:r>
+              <a:t>• Zero Mouse Stutter: Fast 3D radars, GIS mapping, and mission C2 apps experience zero frame drops or input lag.</a:t>
             </a:r>
           </a:p>
         </p:txBody>
@@ -9222,11 +8472,11 @@
             <a:avLst/>
           </a:prstGeom>
           <a:solidFill>
-            <a:srgbClr val="1E293B"/>
+            <a:srgbClr val="151E2E"/>
           </a:solidFill>
           <a:ln w="19050">
             <a:solidFill>
-              <a:srgbClr val="334155"/>
+              <a:srgbClr val="243248"/>
             </a:solidFill>
           </a:ln>
         </p:spPr>
@@ -9286,71 +8536,71 @@
               </a:defRPr>
             </a:pPr>
             <a:r>
-              <a:t>🔍 Visual Scrubbing &amp; Bookmarking</a:t>
-            </a:r>
-          </a:p>
-          <a:p>
-            <a:pPr>
-              <a:spcAft>
-                <a:spcPts val="600"/>
-              </a:spcAft>
-              <a:defRPr sz="1100">
-                <a:solidFill>
-                  <a:srgbClr val="CBD5E1"/>
-                </a:solidFill>
-                <a:latin typeface="Segoe UI"/>
-              </a:defRPr>
-            </a:pPr>
-            <a:r>
-              <a:t>• Rapid Timeline Scrubbing: Hover over the timeline to see instantaneous screen thumbnail previews.</a:t>
-            </a:r>
-          </a:p>
-          <a:p>
-            <a:pPr>
-              <a:spcAft>
-                <a:spcPts val="600"/>
-              </a:spcAft>
-              <a:defRPr sz="1100">
-                <a:solidFill>
-                  <a:srgbClr val="CBD5E1"/>
-                </a:solidFill>
-                <a:latin typeface="Segoe UI"/>
-              </a:defRPr>
-            </a:pPr>
-            <a:r>
-              <a:t>• Incident Bookmarking: Tag critical incident timestamps with descriptive notes.</a:t>
-            </a:r>
-          </a:p>
-          <a:p>
-            <a:pPr>
-              <a:spcAft>
-                <a:spcPts val="600"/>
-              </a:spcAft>
-              <a:defRPr sz="1100">
-                <a:solidFill>
-                  <a:srgbClr val="CBD5E1"/>
-                </a:solidFill>
-                <a:latin typeface="Segoe UI"/>
-              </a:defRPr>
-            </a:pPr>
-            <a:r>
-              <a:t>• Non-Destructive Project Drafts: Save investigation projects and share with peer analysts.</a:t>
-            </a:r>
-          </a:p>
-          <a:p>
-            <a:pPr>
-              <a:spcAft>
-                <a:spcPts val="600"/>
-              </a:spcAft>
-              <a:defRPr sz="1100">
-                <a:solidFill>
-                  <a:srgbClr val="CBD5E1"/>
-                </a:solidFill>
-                <a:latin typeface="Segoe UI"/>
-              </a:defRPr>
-            </a:pPr>
-            <a:r>
-              <a:t>• Asynchronous Export: Export multi-track videos in the background while continuing review.</a:t>
+              <a:t>📈 Workstation Resource Comparison</a:t>
+            </a:r>
+          </a:p>
+          <a:p>
+            <a:pPr>
+              <a:spcAft>
+                <a:spcPts val="600"/>
+              </a:spcAft>
+              <a:defRPr sz="1100">
+                <a:solidFill>
+                  <a:srgbClr val="CBD5E1"/>
+                </a:solidFill>
+                <a:latin typeface="Segoe UI"/>
+              </a:defRPr>
+            </a:pPr>
+            <a:r>
+              <a:t>• Commercial Recorders (Software CPU): 35% - 60% CPU -&gt; High risk of system freeze and sluggish UI.</a:t>
+            </a:r>
+          </a:p>
+          <a:p>
+            <a:pPr>
+              <a:spcAft>
+                <a:spcPts val="600"/>
+              </a:spcAft>
+              <a:defRPr sz="1100">
+                <a:solidFill>
+                  <a:srgbClr val="CBD5E1"/>
+                </a:solidFill>
+                <a:latin typeface="Segoe UI"/>
+              </a:defRPr>
+            </a:pPr>
+            <a:r>
+              <a:t>• ITB-SCREEN-RECORDER (Intel QuickSync): ~2.0% CPU -&gt; Lightweight, dependable capture.</a:t>
+            </a:r>
+          </a:p>
+          <a:p>
+            <a:pPr>
+              <a:spcAft>
+                <a:spcPts val="600"/>
+              </a:spcAft>
+              <a:defRPr sz="1100">
+                <a:solidFill>
+                  <a:srgbClr val="CBD5E1"/>
+                </a:solidFill>
+                <a:latin typeface="Segoe UI"/>
+              </a:defRPr>
+            </a:pPr>
+            <a:r>
+              <a:t>• ITB-SCREEN-RECORDER (NVIDIA GPU): &lt; 0.8% CPU -&gt; True zero-impact continuous recording.</a:t>
+            </a:r>
+          </a:p>
+          <a:p>
+            <a:pPr>
+              <a:spcAft>
+                <a:spcPts val="600"/>
+              </a:spcAft>
+              <a:defRPr sz="1100">
+                <a:solidFill>
+                  <a:srgbClr val="CBD5E1"/>
+                </a:solidFill>
+                <a:latin typeface="Segoe UI"/>
+              </a:defRPr>
+            </a:pPr>
+            <a:r>
+              <a:t>• Fleet Economics: Deploy across 100+ stations without requiring expensive PC hardware replacements.</a:t>
             </a:r>
           </a:p>
         </p:txBody>
@@ -9388,7 +8638,7 @@
             <a:avLst/>
           </a:prstGeom>
           <a:solidFill>
-            <a:srgbClr val="0A1128"/>
+            <a:srgbClr val="070A10"/>
           </a:solidFill>
           <a:ln>
             <a:noFill/>
@@ -9441,13 +8691,13 @@
             <a:pPr>
               <a:defRPr sz="1000" b="1">
                 <a:solidFill>
-                  <a:srgbClr val="F59E0B"/>
+                  <a:srgbClr val="10B981"/>
                 </a:solidFill>
                 <a:latin typeface="Arial"/>
               </a:defRPr>
             </a:pPr>
             <a:r>
-              <a:t>FORENSIC INTEGRITY</a:t>
+              <a:t>ENTERPRISE SECURITY</a:t>
             </a:r>
           </a:p>
         </p:txBody>
@@ -9483,7 +8733,7 @@
               </a:defRPr>
             </a:pPr>
             <a:r>
-              <a:t>The 'Time-Continuity Guarantee': Gap-Proof Audits</a:t>
+              <a:t>100% Air-Gapped Sovereignty &amp; Silent Active Directory SSO</a:t>
             </a:r>
           </a:p>
         </p:txBody>
@@ -9519,7 +8769,7 @@
               </a:defRPr>
             </a:pPr>
             <a:r>
-              <a:t>Overcoming station reboots and power outages without corrupting multi-station alignment.</a:t>
+              <a:t>Engineered from day one for isolated, zero-trust, closed defense networks.</a:t>
             </a:r>
           </a:p>
         </p:txBody>
@@ -9533,17 +8783,17 @@
         <p:spPr>
           <a:xfrm>
             <a:off x="731520" y="1920240"/>
-            <a:ext cx="5120640" cy="4297680"/>
+            <a:ext cx="3383280" cy="4297680"/>
           </a:xfrm>
           <a:prstGeom prst="roundRect">
             <a:avLst/>
           </a:prstGeom>
           <a:solidFill>
-            <a:srgbClr val="1E293B"/>
+            <a:srgbClr val="151E2E"/>
           </a:solidFill>
           <a:ln w="19050">
             <a:solidFill>
-              <a:srgbClr val="334155"/>
+              <a:srgbClr val="243248"/>
             </a:solidFill>
           </a:ln>
         </p:spPr>
@@ -9578,7 +8828,7 @@
         <p:spPr>
           <a:xfrm>
             <a:off x="914400" y="2103120"/>
-            <a:ext cx="4754880" cy="3931920"/>
+            <a:ext cx="3017520" cy="3931920"/>
           </a:xfrm>
           <a:prstGeom prst="rect">
             <a:avLst/>
@@ -9603,71 +8853,87 @@
               </a:defRPr>
             </a:pPr>
             <a:r>
-              <a:t>❓ The Flaw in Traditional Video</a:t>
-            </a:r>
-          </a:p>
-          <a:p>
-            <a:pPr>
-              <a:spcAft>
-                <a:spcPts val="600"/>
-              </a:spcAft>
-              <a:defRPr sz="1100">
-                <a:solidFill>
-                  <a:srgbClr val="CBD5E1"/>
-                </a:solidFill>
-                <a:latin typeface="Segoe UI"/>
-              </a:defRPr>
-            </a:pPr>
-            <a:r>
-              <a:t>• If Operator A worked for 30 minutes, but Operator B restarted their computer for 5 minutes:</a:t>
-            </a:r>
-          </a:p>
-          <a:p>
-            <a:pPr>
-              <a:spcAft>
-                <a:spcPts val="600"/>
-              </a:spcAft>
-              <a:defRPr sz="1100">
-                <a:solidFill>
-                  <a:srgbClr val="CBD5E1"/>
-                </a:solidFill>
-                <a:latin typeface="Segoe UI"/>
-              </a:defRPr>
-            </a:pPr>
-            <a:r>
-              <a:t>• Traditional video systems simply stitch Operator B's clips together.</a:t>
-            </a:r>
-          </a:p>
-          <a:p>
-            <a:pPr>
-              <a:spcAft>
-                <a:spcPts val="600"/>
-              </a:spcAft>
-              <a:defRPr sz="1100">
-                <a:solidFill>
-                  <a:srgbClr val="CBD5E1"/>
-                </a:solidFill>
-                <a:latin typeface="Segoe UI"/>
-              </a:defRPr>
-            </a:pPr>
-            <a:r>
-              <a:t>• The timeline collapses by 5 minutes, completely desynchronizing Operator B from Operator A.</a:t>
-            </a:r>
-          </a:p>
-          <a:p>
-            <a:pPr>
-              <a:spcAft>
-                <a:spcPts val="600"/>
-              </a:spcAft>
-              <a:defRPr sz="1100">
-                <a:solidFill>
-                  <a:srgbClr val="CBD5E1"/>
-                </a:solidFill>
-                <a:latin typeface="Segoe UI"/>
-              </a:defRPr>
-            </a:pPr>
-            <a:r>
-              <a:t>• The resulting video is misleading, distorted, and legally contestable.</a:t>
+              <a:t>🏰 100% Air-Gapped</a:t>
+            </a:r>
+          </a:p>
+          <a:p>
+            <a:pPr>
+              <a:spcAft>
+                <a:spcPts val="600"/>
+              </a:spcAft>
+              <a:defRPr sz="1100">
+                <a:solidFill>
+                  <a:srgbClr val="CBD5E1"/>
+                </a:solidFill>
+                <a:latin typeface="Segoe UI"/>
+              </a:defRPr>
+            </a:pPr>
+            <a:r>
+              <a:t>• 100% self-contained on internal LAN.</a:t>
+            </a:r>
+          </a:p>
+          <a:p>
+            <a:pPr>
+              <a:spcAft>
+                <a:spcPts val="600"/>
+              </a:spcAft>
+              <a:defRPr sz="1100">
+                <a:solidFill>
+                  <a:srgbClr val="CBD5E1"/>
+                </a:solidFill>
+                <a:latin typeface="Segoe UI"/>
+              </a:defRPr>
+            </a:pPr>
+            <a:r>
+              <a:t>• Zero external internet links or CDNs.</a:t>
+            </a:r>
+          </a:p>
+          <a:p>
+            <a:pPr>
+              <a:spcAft>
+                <a:spcPts val="600"/>
+              </a:spcAft>
+              <a:defRPr sz="1100">
+                <a:solidFill>
+                  <a:srgbClr val="CBD5E1"/>
+                </a:solidFill>
+                <a:latin typeface="Segoe UI"/>
+              </a:defRPr>
+            </a:pPr>
+            <a:r>
+              <a:t>• Zero remote license servers.</a:t>
+            </a:r>
+          </a:p>
+          <a:p>
+            <a:pPr>
+              <a:spcAft>
+                <a:spcPts val="600"/>
+              </a:spcAft>
+              <a:defRPr sz="1100">
+                <a:solidFill>
+                  <a:srgbClr val="CBD5E1"/>
+                </a:solidFill>
+                <a:latin typeface="Segoe UI"/>
+              </a:defRPr>
+            </a:pPr>
+            <a:r>
+              <a:t>• Zero cloud data leakage.</a:t>
+            </a:r>
+          </a:p>
+          <a:p>
+            <a:pPr>
+              <a:spcAft>
+                <a:spcPts val="600"/>
+              </a:spcAft>
+              <a:defRPr sz="1100">
+                <a:solidFill>
+                  <a:srgbClr val="CBD5E1"/>
+                </a:solidFill>
+                <a:latin typeface="Segoe UI"/>
+              </a:defRPr>
+            </a:pPr>
+            <a:r>
+              <a:t>• Compliant with highest defense rules.</a:t>
             </a:r>
           </a:p>
         </p:txBody>
@@ -9680,18 +8946,18 @@
         </p:nvSpPr>
         <p:spPr>
           <a:xfrm>
-            <a:off x="6217920" y="1920240"/>
-            <a:ext cx="5212080" cy="4297680"/>
+            <a:off x="4389120" y="1920240"/>
+            <a:ext cx="3383280" cy="4297680"/>
           </a:xfrm>
           <a:prstGeom prst="roundRect">
             <a:avLst/>
           </a:prstGeom>
           <a:solidFill>
-            <a:srgbClr val="1E293B"/>
+            <a:srgbClr val="151E2E"/>
           </a:solidFill>
           <a:ln w="19050">
             <a:solidFill>
-              <a:srgbClr val="F59E0B"/>
+              <a:srgbClr val="10B981"/>
             </a:solidFill>
           </a:ln>
         </p:spPr>
@@ -9725,8 +8991,8 @@
         </p:nvSpPr>
         <p:spPr>
           <a:xfrm>
-            <a:off x="6400800" y="2103120"/>
-            <a:ext cx="4846320" cy="3931920"/>
+            <a:off x="4572000" y="2103120"/>
+            <a:ext cx="3017520" cy="3931920"/>
           </a:xfrm>
           <a:prstGeom prst="rect">
             <a:avLst/>
@@ -9745,77 +9011,257 @@
               </a:spcAft>
               <a:defRPr sz="1400" b="1">
                 <a:solidFill>
-                  <a:srgbClr val="F59E0B"/>
-                </a:solidFill>
-                <a:latin typeface="Segoe UI"/>
-              </a:defRPr>
-            </a:pPr>
-            <a:r>
-              <a:t>🛡️ The ITB 'No-Signal' Assurance</a:t>
-            </a:r>
-          </a:p>
-          <a:p>
-            <a:pPr>
-              <a:spcAft>
-                <a:spcPts val="600"/>
-              </a:spcAft>
-              <a:defRPr sz="1100">
-                <a:solidFill>
-                  <a:srgbClr val="CBD5E1"/>
-                </a:solidFill>
-                <a:latin typeface="Segoe UI"/>
-              </a:defRPr>
-            </a:pPr>
-            <a:r>
-              <a:t>• ITB-SCREEN-RECORDER automatically detects station offline gaps.</a:t>
-            </a:r>
-          </a:p>
-          <a:p>
-            <a:pPr>
-              <a:spcAft>
-                <a:spcPts val="600"/>
-              </a:spcAft>
-              <a:defRPr sz="1100">
-                <a:solidFill>
-                  <a:srgbClr val="CBD5E1"/>
-                </a:solidFill>
-                <a:latin typeface="Segoe UI"/>
-              </a:defRPr>
-            </a:pPr>
-            <a:r>
-              <a:t>• Injects calibrated 'No-Signal' frames for the exact duration the workstation was powered down.</a:t>
-            </a:r>
-          </a:p>
-          <a:p>
-            <a:pPr>
-              <a:spcAft>
-                <a:spcPts val="600"/>
-              </a:spcAft>
-              <a:defRPr sz="1100">
-                <a:solidFill>
-                  <a:srgbClr val="CBD5E1"/>
-                </a:solidFill>
-                <a:latin typeface="Segoe UI"/>
-              </a:defRPr>
-            </a:pPr>
-            <a:r>
-              <a:t>• Maintains 100% time alignment across all station tracks down to the exact frame.</a:t>
-            </a:r>
-          </a:p>
-          <a:p>
-            <a:pPr>
-              <a:spcAft>
-                <a:spcPts val="600"/>
-              </a:spcAft>
-              <a:defRPr sz="1100">
-                <a:solidFill>
-                  <a:srgbClr val="CBD5E1"/>
-                </a:solidFill>
-                <a:latin typeface="Segoe UI"/>
-              </a:defRPr>
-            </a:pPr>
-            <a:r>
-              <a:t>• Provides an accredited, indisputable record for military debriefs and regulatory compliance.</a:t>
+                  <a:srgbClr val="10B981"/>
+                </a:solidFill>
+                <a:latin typeface="Segoe UI"/>
+              </a:defRPr>
+            </a:pPr>
+            <a:r>
+              <a:t>🔑 Silent AD / LDAP SSO</a:t>
+            </a:r>
+          </a:p>
+          <a:p>
+            <a:pPr>
+              <a:spcAft>
+                <a:spcPts val="600"/>
+              </a:spcAft>
+              <a:defRPr sz="1100">
+                <a:solidFill>
+                  <a:srgbClr val="CBD5E1"/>
+                </a:solidFill>
+                <a:latin typeface="Segoe UI"/>
+              </a:defRPr>
+            </a:pPr>
+            <a:r>
+              <a:t>• Windows Integrated Auth (Kerberos).</a:t>
+            </a:r>
+          </a:p>
+          <a:p>
+            <a:pPr>
+              <a:spcAft>
+                <a:spcPts val="600"/>
+              </a:spcAft>
+              <a:defRPr sz="1100">
+                <a:solidFill>
+                  <a:srgbClr val="CBD5E1"/>
+                </a:solidFill>
+                <a:latin typeface="Segoe UI"/>
+              </a:defRPr>
+            </a:pPr>
+            <a:r>
+              <a:t>• Zero credentials prompts or login forms.</a:t>
+            </a:r>
+          </a:p>
+          <a:p>
+            <a:pPr>
+              <a:spcAft>
+                <a:spcPts val="600"/>
+              </a:spcAft>
+              <a:defRPr sz="1100">
+                <a:solidFill>
+                  <a:srgbClr val="CBD5E1"/>
+                </a:solidFill>
+                <a:latin typeface="Segoe UI"/>
+              </a:defRPr>
+            </a:pPr>
+            <a:r>
+              <a:t>• AD groups map to operational roles.</a:t>
+            </a:r>
+          </a:p>
+          <a:p>
+            <a:pPr>
+              <a:spcAft>
+                <a:spcPts val="600"/>
+              </a:spcAft>
+              <a:defRPr sz="1100">
+                <a:solidFill>
+                  <a:srgbClr val="CBD5E1"/>
+                </a:solidFill>
+                <a:latin typeface="Segoe UI"/>
+              </a:defRPr>
+            </a:pPr>
+            <a:r>
+              <a:t>• Granular RBAC: Live Viewer vs Forensic.</a:t>
+            </a:r>
+          </a:p>
+          <a:p>
+            <a:pPr>
+              <a:spcAft>
+                <a:spcPts val="600"/>
+              </a:spcAft>
+              <a:defRPr sz="1100">
+                <a:solidFill>
+                  <a:srgbClr val="CBD5E1"/>
+                </a:solidFill>
+                <a:latin typeface="Segoe UI"/>
+              </a:defRPr>
+            </a:pPr>
+            <a:r>
+              <a:t>• Instant, seamless dashboard access.</a:t>
+            </a:r>
+          </a:p>
+        </p:txBody>
+      </p:sp>
+      <p:sp>
+        <p:nvSpPr>
+          <p:cNvPr id="10" name="Rounded Rectangle 9"/>
+          <p:cNvSpPr/>
+          <p:nvPr/>
+        </p:nvSpPr>
+        <p:spPr>
+          <a:xfrm>
+            <a:off x="8046720" y="1920240"/>
+            <a:ext cx="3383280" cy="4297680"/>
+          </a:xfrm>
+          <a:prstGeom prst="roundRect">
+            <a:avLst/>
+          </a:prstGeom>
+          <a:solidFill>
+            <a:srgbClr val="151E2E"/>
+          </a:solidFill>
+          <a:ln w="19050">
+            <a:solidFill>
+              <a:srgbClr val="243248"/>
+            </a:solidFill>
+          </a:ln>
+        </p:spPr>
+        <p:style>
+          <a:lnRef idx="1">
+            <a:schemeClr val="accent1"/>
+          </a:lnRef>
+          <a:fillRef idx="3">
+            <a:schemeClr val="accent1"/>
+          </a:fillRef>
+          <a:effectRef idx="2">
+            <a:schemeClr val="accent1"/>
+          </a:effectRef>
+          <a:fontRef idx="minor">
+            <a:schemeClr val="lt1"/>
+          </a:fontRef>
+        </p:style>
+        <p:txBody>
+          <a:bodyPr rtlCol="0" anchor="ctr"/>
+          <a:lstStyle/>
+          <a:p>
+            <a:pPr algn="ctr"/>
+          </a:p>
+        </p:txBody>
+      </p:sp>
+      <p:sp>
+        <p:nvSpPr>
+          <p:cNvPr id="11" name="TextBox 10"/>
+          <p:cNvSpPr txBox="1"/>
+          <p:nvPr/>
+        </p:nvSpPr>
+        <p:spPr>
+          <a:xfrm>
+            <a:off x="8229600" y="2103120"/>
+            <a:ext cx="3017520" cy="3931920"/>
+          </a:xfrm>
+          <a:prstGeom prst="rect">
+            <a:avLst/>
+          </a:prstGeom>
+          <a:noFill/>
+        </p:spPr>
+        <p:txBody>
+          <a:bodyPr wrap="square">
+            <a:spAutoFit/>
+          </a:bodyPr>
+          <a:lstStyle/>
+          <a:p>
+            <a:pPr>
+              <a:spcAft>
+                <a:spcPts val="800"/>
+              </a:spcAft>
+              <a:defRPr sz="1400" b="1">
+                <a:solidFill>
+                  <a:srgbClr val="FFFFFF"/>
+                </a:solidFill>
+                <a:latin typeface="Segoe UI"/>
+              </a:defRPr>
+            </a:pPr>
+            <a:r>
+              <a:t>💾 Dual-Path Storage Failover</a:t>
+            </a:r>
+          </a:p>
+          <a:p>
+            <a:pPr>
+              <a:spcAft>
+                <a:spcPts val="600"/>
+              </a:spcAft>
+              <a:defRPr sz="1100">
+                <a:solidFill>
+                  <a:srgbClr val="CBD5E1"/>
+                </a:solidFill>
+                <a:latin typeface="Segoe UI"/>
+              </a:defRPr>
+            </a:pPr>
+            <a:r>
+              <a:t>• Primary NetApp storage with 3s probe.</a:t>
+            </a:r>
+          </a:p>
+          <a:p>
+            <a:pPr>
+              <a:spcAft>
+                <a:spcPts val="600"/>
+              </a:spcAft>
+              <a:defRPr sz="1100">
+                <a:solidFill>
+                  <a:srgbClr val="CBD5E1"/>
+                </a:solidFill>
+                <a:latin typeface="Segoe UI"/>
+              </a:defRPr>
+            </a:pPr>
+            <a:r>
+              <a:t>• Auto-failover to local NVMe storage.</a:t>
+            </a:r>
+          </a:p>
+          <a:p>
+            <a:pPr>
+              <a:spcAft>
+                <a:spcPts val="600"/>
+              </a:spcAft>
+              <a:defRPr sz="1100">
+                <a:solidFill>
+                  <a:srgbClr val="CBD5E1"/>
+                </a:solidFill>
+                <a:latin typeface="Segoe UI"/>
+              </a:defRPr>
+            </a:pPr>
+            <a:r>
+              <a:t>• Endpoints buffer video during network cuts.</a:t>
+            </a:r>
+          </a:p>
+          <a:p>
+            <a:pPr>
+              <a:spcAft>
+                <a:spcPts val="600"/>
+              </a:spcAft>
+              <a:defRPr sz="1100">
+                <a:solidFill>
+                  <a:srgbClr val="CBD5E1"/>
+                </a:solidFill>
+                <a:latin typeface="Segoe UI"/>
+              </a:defRPr>
+            </a:pPr>
+            <a:r>
+              <a:t>• Automatic background synchronization.</a:t>
+            </a:r>
+          </a:p>
+          <a:p>
+            <a:pPr>
+              <a:spcAft>
+                <a:spcPts val="600"/>
+              </a:spcAft>
+              <a:defRPr sz="1100">
+                <a:solidFill>
+                  <a:srgbClr val="CBD5E1"/>
+                </a:solidFill>
+                <a:latin typeface="Segoe UI"/>
+              </a:defRPr>
+            </a:pPr>
+            <a:r>
+              <a:t>• Guaranteed 24/7 audit continuity.</a:t>
             </a:r>
           </a:p>
         </p:txBody>
@@ -9853,7 +9299,7 @@
             <a:avLst/>
           </a:prstGeom>
           <a:solidFill>
-            <a:srgbClr val="0A1128"/>
+            <a:srgbClr val="070A10"/>
           </a:solidFill>
           <a:ln>
             <a:noFill/>
@@ -9906,13 +9352,13 @@
             <a:pPr>
               <a:defRPr sz="1000" b="1">
                 <a:solidFill>
-                  <a:srgbClr val="F59E0B"/>
+                  <a:srgbClr val="06B6D4"/>
                 </a:solidFill>
                 <a:latin typeface="Arial"/>
               </a:defRPr>
             </a:pPr>
             <a:r>
-              <a:t>DETAILED AUDIT</a:t>
+              <a:t>INVESTIGATION POWER</a:t>
             </a:r>
           </a:p>
         </p:txBody>
@@ -9948,7 +9394,7 @@
               </a:defRPr>
             </a:pPr>
             <a:r>
-              <a:t>Forensic Keystroke Capture &amp; Synchronized Subtitles</a:t>
+              <a:t>Forensic Replay &amp; Visual NLE Investigation Studio</a:t>
             </a:r>
           </a:p>
         </p:txBody>
@@ -9984,7 +9430,7 @@
               </a:defRPr>
             </a:pPr>
             <a:r>
-              <a:t>Correlating operator intent with screen outcomes for definitive audit trails.</a:t>
+              <a:t>Accelerating incident debriefs and investigations from days to minutes.</a:t>
             </a:r>
           </a:p>
         </p:txBody>
@@ -9998,17 +9444,17 @@
         <p:spPr>
           <a:xfrm>
             <a:off x="731520" y="1920240"/>
-            <a:ext cx="3383280" cy="4297680"/>
+            <a:ext cx="5120640" cy="4297680"/>
           </a:xfrm>
           <a:prstGeom prst="roundRect">
             <a:avLst/>
           </a:prstGeom>
           <a:solidFill>
-            <a:srgbClr val="1E293B"/>
+            <a:srgbClr val="151E2E"/>
           </a:solidFill>
           <a:ln w="19050">
             <a:solidFill>
-              <a:srgbClr val="334155"/>
+              <a:srgbClr val="06B6D4"/>
             </a:solidFill>
           </a:ln>
         </p:spPr>
@@ -10043,7 +9489,7 @@
         <p:spPr>
           <a:xfrm>
             <a:off x="914400" y="2103120"/>
-            <a:ext cx="3017520" cy="3931920"/>
+            <a:ext cx="4754880" cy="3931920"/>
           </a:xfrm>
           <a:prstGeom prst="rect">
             <a:avLst/>
@@ -10062,61 +9508,77 @@
               </a:spcAft>
               <a:defRPr sz="1400" b="1">
                 <a:solidFill>
-                  <a:srgbClr val="FFFFFF"/>
-                </a:solidFill>
-                <a:latin typeface="Segoe UI"/>
-              </a:defRPr>
-            </a:pPr>
-            <a:r>
-              <a:t>⌨️ Command Audit Logging</a:t>
-            </a:r>
-          </a:p>
-          <a:p>
-            <a:pPr>
-              <a:spcAft>
-                <a:spcPts val="600"/>
-              </a:spcAft>
-              <a:defRPr sz="1100">
-                <a:solidFill>
-                  <a:srgbClr val="CBD5E1"/>
-                </a:solidFill>
-                <a:latin typeface="Segoe UI"/>
-              </a:defRPr>
-            </a:pPr>
-            <a:r>
-              <a:t>• Captures operator key combinations, shortcuts, and commands with millisecond timestamps.</a:t>
-            </a:r>
-          </a:p>
-          <a:p>
-            <a:pPr>
-              <a:spcAft>
-                <a:spcPts val="600"/>
-              </a:spcAft>
-              <a:defRPr sz="1100">
-                <a:solidFill>
-                  <a:srgbClr val="CBD5E1"/>
-                </a:solidFill>
-                <a:latin typeface="Segoe UI"/>
-              </a:defRPr>
-            </a:pPr>
-            <a:r>
-              <a:t>• Proves what commands were executed and in what precise sequence.</a:t>
-            </a:r>
-          </a:p>
-          <a:p>
-            <a:pPr>
-              <a:spcAft>
-                <a:spcPts val="600"/>
-              </a:spcAft>
-              <a:defRPr sz="1100">
-                <a:solidFill>
-                  <a:srgbClr val="CBD5E1"/>
-                </a:solidFill>
-                <a:latin typeface="Segoe UI"/>
-              </a:defRPr>
-            </a:pPr>
-            <a:r>
-              <a:t>• Essential for troubleshooting accidental system triggers or policy violations.</a:t>
+                  <a:srgbClr val="06B6D4"/>
+                </a:solidFill>
+                <a:latin typeface="Segoe UI"/>
+              </a:defRPr>
+            </a:pPr>
+            <a:r>
+              <a:t>🎞️ High-Speed Visual Scrubbing</a:t>
+            </a:r>
+          </a:p>
+          <a:p>
+            <a:pPr>
+              <a:spcAft>
+                <a:spcPts val="600"/>
+              </a:spcAft>
+              <a:defRPr sz="1100">
+                <a:solidFill>
+                  <a:srgbClr val="CBD5E1"/>
+                </a:solidFill>
+                <a:latin typeface="Segoe UI"/>
+              </a:defRPr>
+            </a:pPr>
+            <a:r>
+              <a:t>• Instant Visual Scrubbing: Hover thumbnails rendered on HTML5 Canvas allow browsing 24 hours without delay.</a:t>
+            </a:r>
+          </a:p>
+          <a:p>
+            <a:pPr>
+              <a:spcAft>
+                <a:spcPts val="600"/>
+              </a:spcAft>
+              <a:defRPr sz="1100">
+                <a:solidFill>
+                  <a:srgbClr val="CBD5E1"/>
+                </a:solidFill>
+                <a:latin typeface="Segoe UI"/>
+              </a:defRPr>
+            </a:pPr>
+            <a:r>
+              <a:t>• Non-Destructive Bookmarking: Tag incident timestamps, annotate events, and share project drafts.</a:t>
+            </a:r>
+          </a:p>
+          <a:p>
+            <a:pPr>
+              <a:spcAft>
+                <a:spcPts val="600"/>
+              </a:spcAft>
+              <a:defRPr sz="1100">
+                <a:solidFill>
+                  <a:srgbClr val="CBD5E1"/>
+                </a:solidFill>
+                <a:latin typeface="Segoe UI"/>
+              </a:defRPr>
+            </a:pPr>
+            <a:r>
+              <a:t>• Parallel Extraction Queue: Export single-station cuts with lossless stream copying or assemble multicam packs.</a:t>
+            </a:r>
+          </a:p>
+          <a:p>
+            <a:pPr>
+              <a:spcAft>
+                <a:spcPts val="600"/>
+              </a:spcAft>
+              <a:defRPr sz="1100">
+                <a:solidFill>
+                  <a:srgbClr val="CBD5E1"/>
+                </a:solidFill>
+                <a:latin typeface="Segoe UI"/>
+              </a:defRPr>
+            </a:pPr>
+            <a:r>
+              <a:t>• Complete Forensic Package: Exports video, burned-in timecode, keystroke subtitles, and audio in one verified file.</a:t>
             </a:r>
           </a:p>
         </p:txBody>
@@ -10129,18 +9591,18 @@
         </p:nvSpPr>
         <p:spPr>
           <a:xfrm>
-            <a:off x="4389120" y="1920240"/>
-            <a:ext cx="3383280" cy="4297680"/>
+            <a:off x="6217920" y="1920240"/>
+            <a:ext cx="5212080" cy="4297680"/>
           </a:xfrm>
           <a:prstGeom prst="roundRect">
             <a:avLst/>
           </a:prstGeom>
           <a:solidFill>
-            <a:srgbClr val="1E293B"/>
+            <a:srgbClr val="151E2E"/>
           </a:solidFill>
           <a:ln w="19050">
             <a:solidFill>
-              <a:srgbClr val="38BDF8"/>
+              <a:srgbClr val="243248"/>
             </a:solidFill>
           </a:ln>
         </p:spPr>
@@ -10174,8 +9636,8 @@
         </p:nvSpPr>
         <p:spPr>
           <a:xfrm>
-            <a:off x="4572000" y="2103120"/>
-            <a:ext cx="3017520" cy="3931920"/>
+            <a:off x="6400800" y="2103120"/>
+            <a:ext cx="4846320" cy="3931920"/>
           </a:xfrm>
           <a:prstGeom prst="rect">
             <a:avLst/>
@@ -10194,193 +9656,77 @@
               </a:spcAft>
               <a:defRPr sz="1400" b="1">
                 <a:solidFill>
-                  <a:srgbClr val="38BDF8"/>
-                </a:solidFill>
-                <a:latin typeface="Segoe UI"/>
-              </a:defRPr>
-            </a:pPr>
-            <a:r>
-              <a:t>📄 Synchronized Subtitles (.SRT)</a:t>
-            </a:r>
-          </a:p>
-          <a:p>
-            <a:pPr>
-              <a:spcAft>
-                <a:spcPts val="600"/>
-              </a:spcAft>
-              <a:defRPr sz="1100">
-                <a:solidFill>
-                  <a:srgbClr val="CBD5E1"/>
-                </a:solidFill>
-                <a:latin typeface="Segoe UI"/>
-              </a:defRPr>
-            </a:pPr>
-            <a:r>
-              <a:t>• Exported videos can automatically include SubRip (.srt) subtitle tracks.</a:t>
-            </a:r>
-          </a:p>
-          <a:p>
-            <a:pPr>
-              <a:spcAft>
-                <a:spcPts val="600"/>
-              </a:spcAft>
-              <a:defRPr sz="1100">
-                <a:solidFill>
-                  <a:srgbClr val="CBD5E1"/>
-                </a:solidFill>
-                <a:latin typeface="Segoe UI"/>
-              </a:defRPr>
-            </a:pPr>
-            <a:r>
-              <a:t>• Keystrokes appear overlaid at the bottom of the video exactly when they occurred.</a:t>
-            </a:r>
-          </a:p>
-          <a:p>
-            <a:pPr>
-              <a:spcAft>
-                <a:spcPts val="600"/>
-              </a:spcAft>
-              <a:defRPr sz="1100">
-                <a:solidFill>
-                  <a:srgbClr val="CBD5E1"/>
-                </a:solidFill>
-                <a:latin typeface="Segoe UI"/>
-              </a:defRPr>
-            </a:pPr>
-            <a:r>
-              <a:t>• Playable in any standard media player (VLC, Windows Media) without proprietary software.</a:t>
-            </a:r>
-          </a:p>
-        </p:txBody>
-      </p:sp>
-      <p:sp>
-        <p:nvSpPr>
-          <p:cNvPr id="10" name="Rounded Rectangle 9"/>
-          <p:cNvSpPr/>
-          <p:nvPr/>
-        </p:nvSpPr>
-        <p:spPr>
-          <a:xfrm>
-            <a:off x="8046720" y="1920240"/>
-            <a:ext cx="3383280" cy="4297680"/>
-          </a:xfrm>
-          <a:prstGeom prst="roundRect">
-            <a:avLst/>
-          </a:prstGeom>
-          <a:solidFill>
-            <a:srgbClr val="1E293B"/>
-          </a:solidFill>
-          <a:ln w="19050">
-            <a:solidFill>
-              <a:srgbClr val="334155"/>
-            </a:solidFill>
-          </a:ln>
-        </p:spPr>
-        <p:style>
-          <a:lnRef idx="1">
-            <a:schemeClr val="accent1"/>
-          </a:lnRef>
-          <a:fillRef idx="3">
-            <a:schemeClr val="accent1"/>
-          </a:fillRef>
-          <a:effectRef idx="2">
-            <a:schemeClr val="accent1"/>
-          </a:effectRef>
-          <a:fontRef idx="minor">
-            <a:schemeClr val="lt1"/>
-          </a:fontRef>
-        </p:style>
-        <p:txBody>
-          <a:bodyPr rtlCol="0" anchor="ctr"/>
-          <a:lstStyle/>
-          <a:p>
-            <a:pPr algn="ctr"/>
-          </a:p>
-        </p:txBody>
-      </p:sp>
-      <p:sp>
-        <p:nvSpPr>
-          <p:cNvPr id="11" name="TextBox 10"/>
-          <p:cNvSpPr txBox="1"/>
-          <p:nvPr/>
-        </p:nvSpPr>
-        <p:spPr>
-          <a:xfrm>
-            <a:off x="8229600" y="2103120"/>
-            <a:ext cx="3017520" cy="3931920"/>
-          </a:xfrm>
-          <a:prstGeom prst="rect">
-            <a:avLst/>
-          </a:prstGeom>
-          <a:noFill/>
-        </p:spPr>
-        <p:txBody>
-          <a:bodyPr wrap="square">
-            <a:spAutoFit/>
-          </a:bodyPr>
-          <a:lstStyle/>
-          <a:p>
-            <a:pPr>
-              <a:spcAft>
-                <a:spcPts val="800"/>
-              </a:spcAft>
-              <a:defRPr sz="1400" b="1">
-                <a:solidFill>
                   <a:srgbClr val="FFFFFF"/>
                 </a:solidFill>
                 <a:latin typeface="Segoe UI"/>
               </a:defRPr>
             </a:pPr>
             <a:r>
-              <a:t>🔒 Privacy Protection Gate</a:t>
-            </a:r>
-          </a:p>
-          <a:p>
-            <a:pPr>
-              <a:spcAft>
-                <a:spcPts val="600"/>
-              </a:spcAft>
-              <a:defRPr sz="1100">
-                <a:solidFill>
-                  <a:srgbClr val="CBD5E1"/>
-                </a:solidFill>
-                <a:latin typeface="Segoe UI"/>
-              </a:defRPr>
-            </a:pPr>
-            <a:r>
-              <a:t>• Keystroke recording is strictly bound to active screen recording.</a:t>
-            </a:r>
-          </a:p>
-          <a:p>
-            <a:pPr>
-              <a:spcAft>
-                <a:spcPts val="600"/>
-              </a:spcAft>
-              <a:defRPr sz="1100">
-                <a:solidFill>
-                  <a:srgbClr val="CBD5E1"/>
-                </a:solidFill>
-                <a:latin typeface="Segoe UI"/>
-              </a:defRPr>
-            </a:pPr>
-            <a:r>
-              <a:t>• When an operator logs out or the station is in standby, keyboard capture is automatically shut down.</a:t>
-            </a:r>
-          </a:p>
-          <a:p>
-            <a:pPr>
-              <a:spcAft>
-                <a:spcPts val="600"/>
-              </a:spcAft>
-              <a:defRPr sz="1100">
-                <a:solidFill>
-                  <a:srgbClr val="CBD5E1"/>
-                </a:solidFill>
-                <a:latin typeface="Segoe UI"/>
-              </a:defRPr>
-            </a:pPr>
-            <a:r>
-              <a:t>• Protects user privacy during administrative off-duty hours.</a:t>
+              <a:t>📈 90% Faster Incident Closure</a:t>
+            </a:r>
+          </a:p>
+          <a:p>
+            <a:pPr>
+              <a:spcAft>
+                <a:spcPts val="600"/>
+              </a:spcAft>
+              <a:defRPr sz="1100">
+                <a:solidFill>
+                  <a:srgbClr val="CBD5E1"/>
+                </a:solidFill>
+                <a:latin typeface="Segoe UI"/>
+              </a:defRPr>
+            </a:pPr>
+            <a:r>
+              <a:t>• Traditional Investigations: 24 to 48 hours of manual operator interviews and text log reconciliation.</a:t>
+            </a:r>
+          </a:p>
+          <a:p>
+            <a:pPr>
+              <a:spcAft>
+                <a:spcPts val="600"/>
+              </a:spcAft>
+              <a:defRPr sz="1100">
+                <a:solidFill>
+                  <a:srgbClr val="CBD5E1"/>
+                </a:solidFill>
+                <a:latin typeface="Segoe UI"/>
+              </a:defRPr>
+            </a:pPr>
+            <a:r>
+              <a:t>• ITB Visual Investigation: &lt; 5 minutes to scrub, verify, and export indisputable multi-screen proof.</a:t>
+            </a:r>
+          </a:p>
+          <a:p>
+            <a:pPr>
+              <a:spcAft>
+                <a:spcPts val="600"/>
+              </a:spcAft>
+              <a:defRPr sz="1100">
+                <a:solidFill>
+                  <a:srgbClr val="CBD5E1"/>
+                </a:solidFill>
+                <a:latin typeface="Segoe UI"/>
+              </a:defRPr>
+            </a:pPr>
+            <a:r>
+              <a:t>• Accredited Debriefs: Eliminates subjective memory bias with objective, frame-accurate multi-screen video.</a:t>
+            </a:r>
+          </a:p>
+          <a:p>
+            <a:pPr>
+              <a:spcAft>
+                <a:spcPts val="600"/>
+              </a:spcAft>
+              <a:defRPr sz="1100">
+                <a:solidFill>
+                  <a:srgbClr val="CBD5E1"/>
+                </a:solidFill>
+                <a:latin typeface="Segoe UI"/>
+              </a:defRPr>
+            </a:pPr>
+            <a:r>
+              <a:t>• Accelerates Operational Lessons: Rapidly turn incidents into actionable training doctrine.</a:t>
             </a:r>
           </a:p>
         </p:txBody>
